--- a/presentation_10_slides.pptx
+++ b/presentation_10_slides.pptx
@@ -2,21 +2,21 @@
 <file path=ppt/presentation.xml><?xml version="1.0" encoding="utf-8"?>
 <p:presentation xmlns:a="http://schemas.openxmlformats.org/drawingml/2006/main" xmlns:r="http://schemas.openxmlformats.org/officeDocument/2006/relationships" xmlns:p="http://schemas.openxmlformats.org/presentationml/2006/main" saveSubsetFonts="1" autoCompressPictures="0">
   <p:sldMasterIdLst>
-    <p:sldMasterId id="2147483648" r:id="rId1"/>
+    <p:sldMasterId id="2147483720" r:id="rId1"/>
   </p:sldMasterIdLst>
   <p:sldIdLst>
-    <p:sldId id="256" r:id="rId7"/>
-    <p:sldId id="257" r:id="rId8"/>
-    <p:sldId id="258" r:id="rId9"/>
-    <p:sldId id="259" r:id="rId10"/>
-    <p:sldId id="260" r:id="rId11"/>
-    <p:sldId id="261" r:id="rId12"/>
-    <p:sldId id="262" r:id="rId13"/>
-    <p:sldId id="263" r:id="rId14"/>
-    <p:sldId id="264" r:id="rId15"/>
-    <p:sldId id="265" r:id="rId16"/>
+    <p:sldId id="256" r:id="rId2"/>
+    <p:sldId id="257" r:id="rId3"/>
+    <p:sldId id="258" r:id="rId4"/>
+    <p:sldId id="259" r:id="rId5"/>
+    <p:sldId id="260" r:id="rId6"/>
+    <p:sldId id="261" r:id="rId7"/>
+    <p:sldId id="262" r:id="rId8"/>
+    <p:sldId id="263" r:id="rId9"/>
+    <p:sldId id="264" r:id="rId10"/>
+    <p:sldId id="265" r:id="rId11"/>
   </p:sldIdLst>
-  <p:sldSz cx="12191695" cy="6858000" type="screen4x3"/>
+  <p:sldSz cx="12192000" cy="6858000"/>
   <p:notesSz cx="6858000" cy="9144000"/>
   <p:defaultTextStyle>
     <a:defPPr>
@@ -135,7 +135,7 @@
       </p:grpSpPr>
       <p:sp>
         <p:nvSpPr>
-          <p:cNvPr id="2" name="Title 1"/>
+          <p:cNvPr id="14" name="Title 13"/>
           <p:cNvSpPr>
             <a:spLocks noGrp="1"/>
           </p:cNvSpPr>
@@ -145,25 +145,30 @@
         </p:nvSpPr>
         <p:spPr>
           <a:xfrm>
-            <a:off x="685800" y="2130425"/>
-            <a:ext cx="7772400" cy="1470025"/>
+            <a:off x="1910080" y="359898"/>
+            <a:ext cx="9875520" cy="1472184"/>
           </a:xfrm>
         </p:spPr>
         <p:txBody>
-          <a:bodyPr/>
-          <a:lstStyle/>
-          <a:p>
-            <a:r>
-              <a:rPr lang="en-US" smtClean="0"/>
+          <a:bodyPr anchor="b"/>
+          <a:lstStyle>
+            <a:lvl1pPr algn="l">
+              <a:defRPr/>
+            </a:lvl1pPr>
+            <a:extLst/>
+          </a:lstStyle>
+          <a:p>
+            <a:r>
+              <a:rPr kumimoji="0" lang="en-US" smtClean="0"/>
               <a:t>Click to edit Master title style</a:t>
             </a:r>
-            <a:endParaRPr lang="en-US"/>
-          </a:p>
-        </p:txBody>
-      </p:sp>
-      <p:sp>
-        <p:nvSpPr>
-          <p:cNvPr id="3" name="Subtitle 2"/>
+            <a:endParaRPr kumimoji="0" lang="en-US"/>
+          </a:p>
+        </p:txBody>
+      </p:sp>
+      <p:sp>
+        <p:nvSpPr>
+          <p:cNvPr id="22" name="Subtitle 21"/>
           <p:cNvSpPr>
             <a:spLocks noGrp="1"/>
           </p:cNvSpPr>
@@ -173,116 +178,62 @@
         </p:nvSpPr>
         <p:spPr>
           <a:xfrm>
-            <a:off x="1371600" y="3886200"/>
-            <a:ext cx="6400800" cy="1752600"/>
+            <a:off x="1910080" y="1850064"/>
+            <a:ext cx="9875520" cy="1752600"/>
           </a:xfrm>
         </p:spPr>
         <p:txBody>
-          <a:bodyPr/>
-          <a:lstStyle>
-            <a:lvl1pPr marL="0" indent="0" algn="ctr">
+          <a:bodyPr tIns="0"/>
+          <a:lstStyle>
+            <a:lvl1pPr marL="27432" indent="0" algn="l">
               <a:buNone/>
-              <a:defRPr>
-                <a:solidFill>
-                  <a:schemeClr val="tx1">
-                    <a:tint val="75000"/>
+              <a:defRPr sz="2600">
+                <a:solidFill>
+                  <a:schemeClr val="tx2">
+                    <a:shade val="30000"/>
+                    <a:satMod val="150000"/>
                   </a:schemeClr>
                 </a:solidFill>
               </a:defRPr>
             </a:lvl1pPr>
             <a:lvl2pPr marL="457200" indent="0" algn="ctr">
               <a:buNone/>
-              <a:defRPr>
-                <a:solidFill>
-                  <a:schemeClr val="tx1">
-                    <a:tint val="75000"/>
-                  </a:schemeClr>
-                </a:solidFill>
-              </a:defRPr>
             </a:lvl2pPr>
             <a:lvl3pPr marL="914400" indent="0" algn="ctr">
               <a:buNone/>
-              <a:defRPr>
-                <a:solidFill>
-                  <a:schemeClr val="tx1">
-                    <a:tint val="75000"/>
-                  </a:schemeClr>
-                </a:solidFill>
-              </a:defRPr>
             </a:lvl3pPr>
             <a:lvl4pPr marL="1371600" indent="0" algn="ctr">
               <a:buNone/>
-              <a:defRPr>
-                <a:solidFill>
-                  <a:schemeClr val="tx1">
-                    <a:tint val="75000"/>
-                  </a:schemeClr>
-                </a:solidFill>
-              </a:defRPr>
             </a:lvl4pPr>
             <a:lvl5pPr marL="1828800" indent="0" algn="ctr">
               <a:buNone/>
-              <a:defRPr>
-                <a:solidFill>
-                  <a:schemeClr val="tx1">
-                    <a:tint val="75000"/>
-                  </a:schemeClr>
-                </a:solidFill>
-              </a:defRPr>
             </a:lvl5pPr>
             <a:lvl6pPr marL="2286000" indent="0" algn="ctr">
               <a:buNone/>
-              <a:defRPr>
-                <a:solidFill>
-                  <a:schemeClr val="tx1">
-                    <a:tint val="75000"/>
-                  </a:schemeClr>
-                </a:solidFill>
-              </a:defRPr>
             </a:lvl6pPr>
             <a:lvl7pPr marL="2743200" indent="0" algn="ctr">
               <a:buNone/>
-              <a:defRPr>
-                <a:solidFill>
-                  <a:schemeClr val="tx1">
-                    <a:tint val="75000"/>
-                  </a:schemeClr>
-                </a:solidFill>
-              </a:defRPr>
             </a:lvl7pPr>
             <a:lvl8pPr marL="3200400" indent="0" algn="ctr">
               <a:buNone/>
-              <a:defRPr>
-                <a:solidFill>
-                  <a:schemeClr val="tx1">
-                    <a:tint val="75000"/>
-                  </a:schemeClr>
-                </a:solidFill>
-              </a:defRPr>
             </a:lvl8pPr>
             <a:lvl9pPr marL="3657600" indent="0" algn="ctr">
               <a:buNone/>
-              <a:defRPr>
-                <a:solidFill>
-                  <a:schemeClr val="tx1">
-                    <a:tint val="75000"/>
-                  </a:schemeClr>
-                </a:solidFill>
-              </a:defRPr>
             </a:lvl9pPr>
-          </a:lstStyle>
-          <a:p>
-            <a:r>
-              <a:rPr lang="en-US" smtClean="0"/>
+            <a:extLst/>
+          </a:lstStyle>
+          <a:p>
+            <a:r>
+              <a:rPr kumimoji="0" lang="en-US" smtClean="0"/>
               <a:t>Click to edit Master subtitle style</a:t>
             </a:r>
-            <a:endParaRPr lang="en-US"/>
-          </a:p>
-        </p:txBody>
-      </p:sp>
-      <p:sp>
-        <p:nvSpPr>
-          <p:cNvPr id="4" name="Date Placeholder 3"/>
+            <a:endParaRPr kumimoji="0" lang="en-US"/>
+          </a:p>
+        </p:txBody>
+      </p:sp>
+      <p:sp>
+        <p:nvSpPr>
+          <p:cNvPr id="7" name="Date Placeholder 6"/>
           <p:cNvSpPr>
             <a:spLocks noGrp="1"/>
           </p:cNvSpPr>
@@ -293,11 +244,13 @@
         <p:spPr/>
         <p:txBody>
           <a:bodyPr/>
-          <a:lstStyle/>
+          <a:lstStyle>
+            <a:extLst/>
+          </a:lstStyle>
           <a:p>
             <a:fld id="{5BCAD085-E8A6-8845-BD4E-CB4CCA059FC4}" type="datetimeFigureOut">
               <a:rPr lang="en-US" smtClean="0"/>
-              <a:t>1/27/13</a:t>
+              <a:t>9/18/2026</a:t>
             </a:fld>
             <a:endParaRPr lang="en-US"/>
           </a:p>
@@ -305,7 +258,7 @@
       </p:sp>
       <p:sp>
         <p:nvSpPr>
-          <p:cNvPr id="5" name="Footer Placeholder 4"/>
+          <p:cNvPr id="20" name="Footer Placeholder 19"/>
           <p:cNvSpPr>
             <a:spLocks noGrp="1"/>
           </p:cNvSpPr>
@@ -316,7 +269,9 @@
         <p:spPr/>
         <p:txBody>
           <a:bodyPr/>
-          <a:lstStyle/>
+          <a:lstStyle>
+            <a:extLst/>
+          </a:lstStyle>
           <a:p>
             <a:endParaRPr lang="en-US"/>
           </a:p>
@@ -324,7 +279,7 @@
       </p:sp>
       <p:sp>
         <p:nvSpPr>
-          <p:cNvPr id="6" name="Slide Number Placeholder 5"/>
+          <p:cNvPr id="10" name="Slide Number Placeholder 9"/>
           <p:cNvSpPr>
             <a:spLocks noGrp="1"/>
           </p:cNvSpPr>
@@ -335,7 +290,9 @@
         <p:spPr/>
         <p:txBody>
           <a:bodyPr/>
-          <a:lstStyle/>
+          <a:lstStyle>
+            <a:extLst/>
+          </a:lstStyle>
           <a:p>
             <a:fld id="{C1FF6DA9-008F-8B48-92A6-B652298478BF}" type="slidenum">
               <a:rPr lang="en-US" smtClean="0"/>
@@ -345,12 +302,145 @@
           </a:p>
         </p:txBody>
       </p:sp>
+      <p:sp>
+        <p:nvSpPr>
+          <p:cNvPr id="8" name="Oval 7"/>
+          <p:cNvSpPr/>
+          <p:nvPr/>
+        </p:nvSpPr>
+        <p:spPr>
+          <a:xfrm>
+            <a:off x="1228577" y="1413802"/>
+            <a:ext cx="280416" cy="210312"/>
+          </a:xfrm>
+          <a:prstGeom prst="ellipse">
+            <a:avLst/>
+          </a:prstGeom>
+          <a:gradFill rotWithShape="1">
+            <a:gsLst>
+              <a:gs pos="0">
+                <a:schemeClr val="accent1">
+                  <a:tint val="20000"/>
+                  <a:satMod val="450000"/>
+                  <a:alpha val="95000"/>
+                </a:schemeClr>
+              </a:gs>
+              <a:gs pos="50000">
+                <a:schemeClr val="accent1">
+                  <a:tint val="38000"/>
+                  <a:satMod val="250000"/>
+                  <a:alpha val="90000"/>
+                </a:schemeClr>
+              </a:gs>
+              <a:gs pos="95000">
+                <a:schemeClr val="accent1">
+                  <a:tint val="75000"/>
+                  <a:satMod val="255000"/>
+                  <a:alpha val="88000"/>
+                </a:schemeClr>
+              </a:gs>
+              <a:gs pos="100000">
+                <a:schemeClr val="accent1">
+                  <a:tint val="100000"/>
+                  <a:shade val="90000"/>
+                  <a:satMod val="255000"/>
+                  <a:alpha val="85000"/>
+                </a:schemeClr>
+              </a:gs>
+            </a:gsLst>
+            <a:path path="circle">
+              <a:fillToRect l="25000" t="12500" r="75000" b="87500"/>
+            </a:path>
+          </a:gradFill>
+          <a:ln w="2000" cap="rnd" cmpd="sng" algn="ctr">
+            <a:solidFill>
+              <a:schemeClr val="accent1">
+                <a:shade val="90000"/>
+                <a:satMod val="110000"/>
+                <a:alpha val="60000"/>
+              </a:schemeClr>
+            </a:solidFill>
+            <a:prstDash val="solid"/>
+          </a:ln>
+          <a:effectLst/>
+        </p:spPr>
+        <p:style>
+          <a:lnRef idx="1">
+            <a:schemeClr val="accent1"/>
+          </a:lnRef>
+          <a:fillRef idx="2">
+            <a:schemeClr val="accent1"/>
+          </a:fillRef>
+          <a:effectRef idx="1">
+            <a:schemeClr val="accent1"/>
+          </a:effectRef>
+          <a:fontRef idx="minor">
+            <a:schemeClr val="dk1"/>
+          </a:fontRef>
+        </p:style>
+        <p:txBody>
+          <a:bodyPr anchor="ctr"/>
+          <a:lstStyle>
+            <a:extLst/>
+          </a:lstStyle>
+          <a:p>
+            <a:pPr algn="ctr" eaLnBrk="1" latinLnBrk="0" hangingPunct="1"/>
+            <a:endParaRPr kumimoji="0" lang="en-US"/>
+          </a:p>
+        </p:txBody>
+      </p:sp>
+      <p:sp>
+        <p:nvSpPr>
+          <p:cNvPr id="9" name="Oval 8"/>
+          <p:cNvSpPr/>
+          <p:nvPr/>
+        </p:nvSpPr>
+        <p:spPr>
+          <a:xfrm>
+            <a:off x="1542901" y="1345016"/>
+            <a:ext cx="85344" cy="64008"/>
+          </a:xfrm>
+          <a:prstGeom prst="ellipse">
+            <a:avLst/>
+          </a:prstGeom>
+          <a:noFill/>
+          <a:ln w="12700" cap="rnd" cmpd="sng" algn="ctr">
+            <a:solidFill>
+              <a:schemeClr val="accent1">
+                <a:shade val="75000"/>
+                <a:alpha val="60000"/>
+              </a:schemeClr>
+            </a:solidFill>
+            <a:prstDash val="solid"/>
+          </a:ln>
+          <a:effectLst/>
+        </p:spPr>
+        <p:style>
+          <a:lnRef idx="1">
+            <a:schemeClr val="accent1"/>
+          </a:lnRef>
+          <a:fillRef idx="2">
+            <a:schemeClr val="accent1"/>
+          </a:fillRef>
+          <a:effectRef idx="1">
+            <a:schemeClr val="accent1"/>
+          </a:effectRef>
+          <a:fontRef idx="minor">
+            <a:schemeClr val="dk1"/>
+          </a:fontRef>
+        </p:style>
+        <p:txBody>
+          <a:bodyPr anchor="ctr"/>
+          <a:lstStyle>
+            <a:extLst/>
+          </a:lstStyle>
+          <a:p>
+            <a:pPr algn="ctr" eaLnBrk="1" latinLnBrk="0" hangingPunct="1"/>
+            <a:endParaRPr kumimoji="0" lang="en-US"/>
+          </a:p>
+        </p:txBody>
+      </p:sp>
     </p:spTree>
-    <p:extLst>
-      <p:ext uri="{BB962C8B-B14F-4D97-AF65-F5344CB8AC3E}">
-        <p14:creationId xmlns:p14="http://schemas.microsoft.com/office/powerpoint/2010/main" val="3168075583"/>
-      </p:ext>
-    </p:extLst>
   </p:cSld>
   <p:clrMapOvr>
     <a:masterClrMapping/>
@@ -388,13 +478,15 @@
         <p:spPr/>
         <p:txBody>
           <a:bodyPr/>
-          <a:lstStyle/>
-          <a:p>
-            <a:r>
-              <a:rPr lang="en-US" smtClean="0"/>
+          <a:lstStyle>
+            <a:extLst/>
+          </a:lstStyle>
+          <a:p>
+            <a:r>
+              <a:rPr kumimoji="0" lang="en-US" smtClean="0"/>
               <a:t>Click to edit Master title style</a:t>
             </a:r>
-            <a:endParaRPr lang="en-US"/>
+            <a:endParaRPr kumimoji="0" lang="en-US"/>
           </a:p>
         </p:txBody>
       </p:sp>
@@ -411,42 +503,44 @@
         <p:spPr/>
         <p:txBody>
           <a:bodyPr vert="eaVert"/>
-          <a:lstStyle/>
-          <a:p>
-            <a:pPr lvl="0"/>
+          <a:lstStyle>
+            <a:extLst/>
+          </a:lstStyle>
+          <a:p>
+            <a:pPr lvl="0" eaLnBrk="1" latinLnBrk="0" hangingPunct="1"/>
             <a:r>
               <a:rPr lang="en-US" smtClean="0"/>
               <a:t>Click to edit Master text styles</a:t>
             </a:r>
           </a:p>
           <a:p>
-            <a:pPr lvl="1"/>
+            <a:pPr lvl="1" eaLnBrk="1" latinLnBrk="0" hangingPunct="1"/>
             <a:r>
               <a:rPr lang="en-US" smtClean="0"/>
               <a:t>Second level</a:t>
             </a:r>
           </a:p>
           <a:p>
-            <a:pPr lvl="2"/>
+            <a:pPr lvl="2" eaLnBrk="1" latinLnBrk="0" hangingPunct="1"/>
             <a:r>
               <a:rPr lang="en-US" smtClean="0"/>
               <a:t>Third level</a:t>
             </a:r>
           </a:p>
           <a:p>
-            <a:pPr lvl="3"/>
+            <a:pPr lvl="3" eaLnBrk="1" latinLnBrk="0" hangingPunct="1"/>
             <a:r>
               <a:rPr lang="en-US" smtClean="0"/>
               <a:t>Fourth level</a:t>
             </a:r>
           </a:p>
           <a:p>
-            <a:pPr lvl="4"/>
+            <a:pPr lvl="4" eaLnBrk="1" latinLnBrk="0" hangingPunct="1"/>
             <a:r>
               <a:rPr lang="en-US" smtClean="0"/>
               <a:t>Fifth level</a:t>
             </a:r>
-            <a:endParaRPr lang="en-US"/>
+            <a:endParaRPr kumimoji="0" lang="en-US"/>
           </a:p>
         </p:txBody>
       </p:sp>
@@ -463,11 +557,13 @@
         <p:spPr/>
         <p:txBody>
           <a:bodyPr/>
-          <a:lstStyle/>
+          <a:lstStyle>
+            <a:extLst/>
+          </a:lstStyle>
           <a:p>
             <a:fld id="{5BCAD085-E8A6-8845-BD4E-CB4CCA059FC4}" type="datetimeFigureOut">
               <a:rPr lang="en-US" smtClean="0"/>
-              <a:t>1/27/13</a:t>
+              <a:t>9/18/2026</a:t>
             </a:fld>
             <a:endParaRPr lang="en-US"/>
           </a:p>
@@ -486,7 +582,9 @@
         <p:spPr/>
         <p:txBody>
           <a:bodyPr/>
-          <a:lstStyle/>
+          <a:lstStyle>
+            <a:extLst/>
+          </a:lstStyle>
           <a:p>
             <a:endParaRPr lang="en-US"/>
           </a:p>
@@ -505,7 +603,9 @@
         <p:spPr/>
         <p:txBody>
           <a:bodyPr/>
-          <a:lstStyle/>
+          <a:lstStyle>
+            <a:extLst/>
+          </a:lstStyle>
           <a:p>
             <a:fld id="{C1FF6DA9-008F-8B48-92A6-B652298478BF}" type="slidenum">
               <a:rPr lang="en-US" smtClean="0"/>
@@ -516,11 +616,6 @@
         </p:txBody>
       </p:sp>
     </p:spTree>
-    <p:extLst>
-      <p:ext uri="{BB962C8B-B14F-4D97-AF65-F5344CB8AC3E}">
-        <p14:creationId xmlns:p14="http://schemas.microsoft.com/office/powerpoint/2010/main" val="2910927964"/>
-      </p:ext>
-    </p:extLst>
   </p:cSld>
   <p:clrMapOvr>
     <a:masterClrMapping/>
@@ -557,19 +652,21 @@
         </p:nvSpPr>
         <p:spPr>
           <a:xfrm>
-            <a:off x="6629400" y="274638"/>
-            <a:ext cx="2057400" cy="5851525"/>
+            <a:off x="9144000" y="274640"/>
+            <a:ext cx="2438400" cy="5851525"/>
           </a:xfrm>
         </p:spPr>
         <p:txBody>
           <a:bodyPr vert="eaVert"/>
-          <a:lstStyle/>
-          <a:p>
-            <a:r>
-              <a:rPr lang="en-US" smtClean="0"/>
+          <a:lstStyle>
+            <a:extLst/>
+          </a:lstStyle>
+          <a:p>
+            <a:r>
+              <a:rPr kumimoji="0" lang="en-US" smtClean="0"/>
               <a:t>Click to edit Master title style</a:t>
             </a:r>
-            <a:endParaRPr lang="en-US"/>
+            <a:endParaRPr kumimoji="0" lang="en-US"/>
           </a:p>
         </p:txBody>
       </p:sp>
@@ -585,48 +682,50 @@
         </p:nvSpPr>
         <p:spPr>
           <a:xfrm>
-            <a:off x="457200" y="274638"/>
-            <a:ext cx="6019800" cy="5851525"/>
+            <a:off x="1524000" y="274641"/>
+            <a:ext cx="7416800" cy="5851525"/>
           </a:xfrm>
         </p:spPr>
         <p:txBody>
           <a:bodyPr vert="eaVert"/>
-          <a:lstStyle/>
-          <a:p>
-            <a:pPr lvl="0"/>
+          <a:lstStyle>
+            <a:extLst/>
+          </a:lstStyle>
+          <a:p>
+            <a:pPr lvl="0" eaLnBrk="1" latinLnBrk="0" hangingPunct="1"/>
             <a:r>
               <a:rPr lang="en-US" smtClean="0"/>
               <a:t>Click to edit Master text styles</a:t>
             </a:r>
           </a:p>
           <a:p>
-            <a:pPr lvl="1"/>
+            <a:pPr lvl="1" eaLnBrk="1" latinLnBrk="0" hangingPunct="1"/>
             <a:r>
               <a:rPr lang="en-US" smtClean="0"/>
               <a:t>Second level</a:t>
             </a:r>
           </a:p>
           <a:p>
-            <a:pPr lvl="2"/>
+            <a:pPr lvl="2" eaLnBrk="1" latinLnBrk="0" hangingPunct="1"/>
             <a:r>
               <a:rPr lang="en-US" smtClean="0"/>
               <a:t>Third level</a:t>
             </a:r>
           </a:p>
           <a:p>
-            <a:pPr lvl="3"/>
+            <a:pPr lvl="3" eaLnBrk="1" latinLnBrk="0" hangingPunct="1"/>
             <a:r>
               <a:rPr lang="en-US" smtClean="0"/>
               <a:t>Fourth level</a:t>
             </a:r>
           </a:p>
           <a:p>
-            <a:pPr lvl="4"/>
+            <a:pPr lvl="4" eaLnBrk="1" latinLnBrk="0" hangingPunct="1"/>
             <a:r>
               <a:rPr lang="en-US" smtClean="0"/>
               <a:t>Fifth level</a:t>
             </a:r>
-            <a:endParaRPr lang="en-US"/>
+            <a:endParaRPr kumimoji="0" lang="en-US"/>
           </a:p>
         </p:txBody>
       </p:sp>
@@ -643,11 +742,13 @@
         <p:spPr/>
         <p:txBody>
           <a:bodyPr/>
-          <a:lstStyle/>
+          <a:lstStyle>
+            <a:extLst/>
+          </a:lstStyle>
           <a:p>
             <a:fld id="{5BCAD085-E8A6-8845-BD4E-CB4CCA059FC4}" type="datetimeFigureOut">
               <a:rPr lang="en-US" smtClean="0"/>
-              <a:t>1/27/13</a:t>
+              <a:t>9/18/2026</a:t>
             </a:fld>
             <a:endParaRPr lang="en-US"/>
           </a:p>
@@ -666,7 +767,9 @@
         <p:spPr/>
         <p:txBody>
           <a:bodyPr/>
-          <a:lstStyle/>
+          <a:lstStyle>
+            <a:extLst/>
+          </a:lstStyle>
           <a:p>
             <a:endParaRPr lang="en-US"/>
           </a:p>
@@ -685,7 +788,9 @@
         <p:spPr/>
         <p:txBody>
           <a:bodyPr/>
-          <a:lstStyle/>
+          <a:lstStyle>
+            <a:extLst/>
+          </a:lstStyle>
           <a:p>
             <a:fld id="{C1FF6DA9-008F-8B48-92A6-B652298478BF}" type="slidenum">
               <a:rPr lang="en-US" smtClean="0"/>
@@ -696,11 +801,6 @@
         </p:txBody>
       </p:sp>
     </p:spTree>
-    <p:extLst>
-      <p:ext uri="{BB962C8B-B14F-4D97-AF65-F5344CB8AC3E}">
-        <p14:creationId xmlns:p14="http://schemas.microsoft.com/office/powerpoint/2010/main" val="3612223792"/>
-      </p:ext>
-    </p:extLst>
   </p:cSld>
   <p:clrMapOvr>
     <a:masterClrMapping/>
@@ -738,13 +838,15 @@
         <p:spPr/>
         <p:txBody>
           <a:bodyPr/>
-          <a:lstStyle/>
-          <a:p>
-            <a:r>
-              <a:rPr lang="en-US" smtClean="0"/>
+          <a:lstStyle>
+            <a:extLst/>
+          </a:lstStyle>
+          <a:p>
+            <a:r>
+              <a:rPr kumimoji="0" lang="en-US" smtClean="0"/>
               <a:t>Click to edit Master title style</a:t>
             </a:r>
-            <a:endParaRPr lang="en-US"/>
+            <a:endParaRPr kumimoji="0" lang="en-US"/>
           </a:p>
         </p:txBody>
       </p:sp>
@@ -761,42 +863,44 @@
         <p:spPr/>
         <p:txBody>
           <a:bodyPr/>
-          <a:lstStyle/>
-          <a:p>
-            <a:pPr lvl="0"/>
+          <a:lstStyle>
+            <a:extLst/>
+          </a:lstStyle>
+          <a:p>
+            <a:pPr lvl="0" eaLnBrk="1" latinLnBrk="0" hangingPunct="1"/>
             <a:r>
               <a:rPr lang="en-US" smtClean="0"/>
               <a:t>Click to edit Master text styles</a:t>
             </a:r>
           </a:p>
           <a:p>
-            <a:pPr lvl="1"/>
+            <a:pPr lvl="1" eaLnBrk="1" latinLnBrk="0" hangingPunct="1"/>
             <a:r>
               <a:rPr lang="en-US" smtClean="0"/>
               <a:t>Second level</a:t>
             </a:r>
           </a:p>
           <a:p>
-            <a:pPr lvl="2"/>
+            <a:pPr lvl="2" eaLnBrk="1" latinLnBrk="0" hangingPunct="1"/>
             <a:r>
               <a:rPr lang="en-US" smtClean="0"/>
               <a:t>Third level</a:t>
             </a:r>
           </a:p>
           <a:p>
-            <a:pPr lvl="3"/>
+            <a:pPr lvl="3" eaLnBrk="1" latinLnBrk="0" hangingPunct="1"/>
             <a:r>
               <a:rPr lang="en-US" smtClean="0"/>
               <a:t>Fourth level</a:t>
             </a:r>
           </a:p>
           <a:p>
-            <a:pPr lvl="4"/>
+            <a:pPr lvl="4" eaLnBrk="1" latinLnBrk="0" hangingPunct="1"/>
             <a:r>
               <a:rPr lang="en-US" smtClean="0"/>
               <a:t>Fifth level</a:t>
             </a:r>
-            <a:endParaRPr lang="en-US"/>
+            <a:endParaRPr kumimoji="0" lang="en-US"/>
           </a:p>
         </p:txBody>
       </p:sp>
@@ -813,11 +917,13 @@
         <p:spPr/>
         <p:txBody>
           <a:bodyPr/>
-          <a:lstStyle/>
+          <a:lstStyle>
+            <a:extLst/>
+          </a:lstStyle>
           <a:p>
             <a:fld id="{5BCAD085-E8A6-8845-BD4E-CB4CCA059FC4}" type="datetimeFigureOut">
               <a:rPr lang="en-US" smtClean="0"/>
-              <a:t>1/27/13</a:t>
+              <a:t>9/18/2026</a:t>
             </a:fld>
             <a:endParaRPr lang="en-US"/>
           </a:p>
@@ -836,7 +942,9 @@
         <p:spPr/>
         <p:txBody>
           <a:bodyPr/>
-          <a:lstStyle/>
+          <a:lstStyle>
+            <a:extLst/>
+          </a:lstStyle>
           <a:p>
             <a:endParaRPr lang="en-US"/>
           </a:p>
@@ -855,7 +963,9 @@
         <p:spPr/>
         <p:txBody>
           <a:bodyPr/>
-          <a:lstStyle/>
+          <a:lstStyle>
+            <a:extLst/>
+          </a:lstStyle>
           <a:p>
             <a:fld id="{C1FF6DA9-008F-8B48-92A6-B652298478BF}" type="slidenum">
               <a:rPr lang="en-US" smtClean="0"/>
@@ -866,11 +976,6 @@
         </p:txBody>
       </p:sp>
     </p:spTree>
-    <p:extLst>
-      <p:ext uri="{BB962C8B-B14F-4D97-AF65-F5344CB8AC3E}">
-        <p14:creationId xmlns:p14="http://schemas.microsoft.com/office/powerpoint/2010/main" val="2614314258"/>
-      </p:ext>
-    </p:extLst>
   </p:cSld>
   <p:clrMapOvr>
     <a:masterClrMapping/>
@@ -879,7 +984,7 @@
 </file>
 
 <file path=ppt/slideLayouts/slideLayout3.xml><?xml version="1.0" encoding="utf-8"?>
-<p:sldLayout xmlns:a="http://schemas.openxmlformats.org/drawingml/2006/main" xmlns:r="http://schemas.openxmlformats.org/officeDocument/2006/relationships" xmlns:p="http://schemas.openxmlformats.org/presentationml/2006/main" type="secHead" preserve="1">
+<p:sldLayout xmlns:a="http://schemas.openxmlformats.org/drawingml/2006/main" xmlns:r="http://schemas.openxmlformats.org/officeDocument/2006/relationships" xmlns:p="http://schemas.openxmlformats.org/presentationml/2006/main" showMasterSp="0" type="secHead" preserve="1">
   <p:cSld name="Section Header">
     <p:spTree>
       <p:nvGrpSpPr>
@@ -897,6 +1002,54 @@
       </p:grpSpPr>
       <p:sp>
         <p:nvSpPr>
+          <p:cNvPr id="7" name="Rectangle 6"/>
+          <p:cNvSpPr/>
+          <p:nvPr/>
+        </p:nvSpPr>
+        <p:spPr>
+          <a:xfrm>
+            <a:off x="3043853" y="-54"/>
+            <a:ext cx="9144000" cy="6858054"/>
+          </a:xfrm>
+          <a:prstGeom prst="rect">
+            <a:avLst/>
+          </a:prstGeom>
+          <a:solidFill>
+            <a:schemeClr val="bg1"/>
+          </a:solidFill>
+          <a:ln w="25400" cap="rnd" cmpd="sng" algn="ctr">
+            <a:noFill/>
+            <a:prstDash val="solid"/>
+          </a:ln>
+          <a:effectLst/>
+        </p:spPr>
+        <p:style>
+          <a:lnRef idx="3">
+            <a:schemeClr val="lt1"/>
+          </a:lnRef>
+          <a:fillRef idx="1">
+            <a:schemeClr val="accent1"/>
+          </a:fillRef>
+          <a:effectRef idx="1">
+            <a:schemeClr val="accent1"/>
+          </a:effectRef>
+          <a:fontRef idx="minor">
+            <a:schemeClr val="lt1"/>
+          </a:fontRef>
+        </p:style>
+        <p:txBody>
+          <a:bodyPr anchor="ctr"/>
+          <a:lstStyle>
+            <a:extLst/>
+          </a:lstStyle>
+          <a:p>
+            <a:pPr algn="ctr" eaLnBrk="1" latinLnBrk="0" hangingPunct="1"/>
+            <a:endParaRPr kumimoji="0" lang="en-US"/>
+          </a:p>
+        </p:txBody>
+      </p:sp>
+      <p:sp>
+        <p:nvSpPr>
           <p:cNvPr id="2" name="Title 1"/>
           <p:cNvSpPr>
             <a:spLocks noGrp="1"/>
@@ -907,23 +1060,28 @@
         </p:nvSpPr>
         <p:spPr>
           <a:xfrm>
-            <a:off x="722313" y="4406900"/>
-            <a:ext cx="7772400" cy="1362075"/>
+            <a:off x="3437856" y="2600325"/>
+            <a:ext cx="8534400" cy="2286000"/>
           </a:xfrm>
         </p:spPr>
         <p:txBody>
           <a:bodyPr anchor="t"/>
           <a:lstStyle>
             <a:lvl1pPr algn="l">
+              <a:lnSpc>
+                <a:spcPts val="4500"/>
+              </a:lnSpc>
+              <a:buNone/>
               <a:defRPr sz="4000" b="1" cap="all"/>
             </a:lvl1pPr>
-          </a:lstStyle>
-          <a:p>
-            <a:r>
-              <a:rPr lang="en-US" smtClean="0"/>
+            <a:extLst/>
+          </a:lstStyle>
+          <a:p>
+            <a:r>
+              <a:rPr kumimoji="0" lang="en-US" smtClean="0"/>
               <a:t>Click to edit Master title style</a:t>
             </a:r>
-            <a:endParaRPr lang="en-US"/>
+            <a:endParaRPr kumimoji="0" lang="en-US"/>
           </a:p>
         </p:txBody>
       </p:sp>
@@ -939,44 +1097,61 @@
         </p:nvSpPr>
         <p:spPr>
           <a:xfrm>
-            <a:off x="722313" y="2906713"/>
-            <a:ext cx="7772400" cy="1500187"/>
+            <a:off x="3437856" y="1066800"/>
+            <a:ext cx="8534400" cy="1509712"/>
           </a:xfrm>
         </p:spPr>
         <p:txBody>
           <a:bodyPr anchor="b"/>
           <a:lstStyle>
-            <a:lvl1pPr marL="0" indent="0">
+            <a:lvl1pPr marL="18288" indent="0">
+              <a:lnSpc>
+                <a:spcPts val="2300"/>
+              </a:lnSpc>
+              <a:spcBef>
+                <a:spcPts val="0"/>
+              </a:spcBef>
               <a:buNone/>
               <a:defRPr sz="2000">
+                <a:solidFill>
+                  <a:schemeClr val="tx2">
+                    <a:shade val="30000"/>
+                    <a:satMod val="150000"/>
+                  </a:schemeClr>
+                </a:solidFill>
+              </a:defRPr>
+            </a:lvl1pPr>
+            <a:lvl2pPr>
+              <a:buNone/>
+              <a:defRPr sz="1800">
                 <a:solidFill>
                   <a:schemeClr val="tx1">
                     <a:tint val="75000"/>
                   </a:schemeClr>
                 </a:solidFill>
               </a:defRPr>
-            </a:lvl1pPr>
-            <a:lvl2pPr marL="457200" indent="0">
+            </a:lvl2pPr>
+            <a:lvl3pPr>
               <a:buNone/>
-              <a:defRPr sz="1800">
+              <a:defRPr sz="1600">
                 <a:solidFill>
                   <a:schemeClr val="tx1">
                     <a:tint val="75000"/>
                   </a:schemeClr>
                 </a:solidFill>
               </a:defRPr>
-            </a:lvl2pPr>
-            <a:lvl3pPr marL="914400" indent="0">
+            </a:lvl3pPr>
+            <a:lvl4pPr>
               <a:buNone/>
-              <a:defRPr sz="1600">
+              <a:defRPr sz="1400">
                 <a:solidFill>
                   <a:schemeClr val="tx1">
                     <a:tint val="75000"/>
                   </a:schemeClr>
                 </a:solidFill>
               </a:defRPr>
-            </a:lvl3pPr>
-            <a:lvl4pPr marL="1371600" indent="0">
+            </a:lvl4pPr>
+            <a:lvl5pPr>
               <a:buNone/>
               <a:defRPr sz="1400">
                 <a:solidFill>
@@ -985,62 +1160,13 @@
                   </a:schemeClr>
                 </a:solidFill>
               </a:defRPr>
-            </a:lvl4pPr>
-            <a:lvl5pPr marL="1828800" indent="0">
-              <a:buNone/>
-              <a:defRPr sz="1400">
-                <a:solidFill>
-                  <a:schemeClr val="tx1">
-                    <a:tint val="75000"/>
-                  </a:schemeClr>
-                </a:solidFill>
-              </a:defRPr>
             </a:lvl5pPr>
-            <a:lvl6pPr marL="2286000" indent="0">
-              <a:buNone/>
-              <a:defRPr sz="1400">
-                <a:solidFill>
-                  <a:schemeClr val="tx1">
-                    <a:tint val="75000"/>
-                  </a:schemeClr>
-                </a:solidFill>
-              </a:defRPr>
-            </a:lvl6pPr>
-            <a:lvl7pPr marL="2743200" indent="0">
-              <a:buNone/>
-              <a:defRPr sz="1400">
-                <a:solidFill>
-                  <a:schemeClr val="tx1">
-                    <a:tint val="75000"/>
-                  </a:schemeClr>
-                </a:solidFill>
-              </a:defRPr>
-            </a:lvl7pPr>
-            <a:lvl8pPr marL="3200400" indent="0">
-              <a:buNone/>
-              <a:defRPr sz="1400">
-                <a:solidFill>
-                  <a:schemeClr val="tx1">
-                    <a:tint val="75000"/>
-                  </a:schemeClr>
-                </a:solidFill>
-              </a:defRPr>
-            </a:lvl8pPr>
-            <a:lvl9pPr marL="3657600" indent="0">
-              <a:buNone/>
-              <a:defRPr sz="1400">
-                <a:solidFill>
-                  <a:schemeClr val="tx1">
-                    <a:tint val="75000"/>
-                  </a:schemeClr>
-                </a:solidFill>
-              </a:defRPr>
-            </a:lvl9pPr>
-          </a:lstStyle>
-          <a:p>
-            <a:pPr lvl="0"/>
-            <a:r>
-              <a:rPr lang="en-US" smtClean="0"/>
+            <a:extLst/>
+          </a:lstStyle>
+          <a:p>
+            <a:pPr lvl="0" eaLnBrk="1" latinLnBrk="0" hangingPunct="1"/>
+            <a:r>
+              <a:rPr kumimoji="0" lang="en-US" smtClean="0"/>
               <a:t>Click to edit Master text styles</a:t>
             </a:r>
           </a:p>
@@ -1059,11 +1185,13 @@
         <p:spPr/>
         <p:txBody>
           <a:bodyPr/>
-          <a:lstStyle/>
+          <a:lstStyle>
+            <a:extLst/>
+          </a:lstStyle>
           <a:p>
             <a:fld id="{5BCAD085-E8A6-8845-BD4E-CB4CCA059FC4}" type="datetimeFigureOut">
               <a:rPr lang="en-US" smtClean="0"/>
-              <a:t>1/27/13</a:t>
+              <a:t>9/18/2026</a:t>
             </a:fld>
             <a:endParaRPr lang="en-US"/>
           </a:p>
@@ -1082,7 +1210,9 @@
         <p:spPr/>
         <p:txBody>
           <a:bodyPr/>
-          <a:lstStyle/>
+          <a:lstStyle>
+            <a:extLst/>
+          </a:lstStyle>
           <a:p>
             <a:endParaRPr lang="en-US"/>
           </a:p>
@@ -1101,7 +1231,9 @@
         <p:spPr/>
         <p:txBody>
           <a:bodyPr/>
-          <a:lstStyle/>
+          <a:lstStyle>
+            <a:extLst/>
+          </a:lstStyle>
           <a:p>
             <a:fld id="{C1FF6DA9-008F-8B48-92A6-B652298478BF}" type="slidenum">
               <a:rPr lang="en-US" smtClean="0"/>
@@ -1111,12 +1243,201 @@
           </a:p>
         </p:txBody>
       </p:sp>
+      <p:sp>
+        <p:nvSpPr>
+          <p:cNvPr id="10" name="Rectangle 9"/>
+          <p:cNvSpPr/>
+          <p:nvPr/>
+        </p:nvSpPr>
+        <p:spPr bwMode="invGray">
+          <a:xfrm>
+            <a:off x="3048000" y="0"/>
+            <a:ext cx="101600" cy="6858054"/>
+          </a:xfrm>
+          <a:prstGeom prst="rect">
+            <a:avLst/>
+          </a:prstGeom>
+          <a:solidFill>
+            <a:schemeClr val="bg1"/>
+          </a:solidFill>
+          <a:ln w="25400" cap="rnd" cmpd="sng" algn="ctr">
+            <a:noFill/>
+            <a:prstDash val="solid"/>
+          </a:ln>
+          <a:effectLst>
+            <a:outerShdw blurRad="38550" dist="38000" dir="10800000" algn="tl" rotWithShape="0">
+              <a:schemeClr val="bg2">
+                <a:shade val="20000"/>
+                <a:satMod val="110000"/>
+                <a:alpha val="25000"/>
+              </a:schemeClr>
+            </a:outerShdw>
+          </a:effectLst>
+        </p:spPr>
+        <p:style>
+          <a:lnRef idx="3">
+            <a:schemeClr val="lt1"/>
+          </a:lnRef>
+          <a:fillRef idx="1">
+            <a:schemeClr val="accent1"/>
+          </a:fillRef>
+          <a:effectRef idx="1">
+            <a:schemeClr val="accent1"/>
+          </a:effectRef>
+          <a:fontRef idx="minor">
+            <a:schemeClr val="lt1"/>
+          </a:fontRef>
+        </p:style>
+        <p:txBody>
+          <a:bodyPr anchor="ctr"/>
+          <a:lstStyle>
+            <a:extLst/>
+          </a:lstStyle>
+          <a:p>
+            <a:pPr algn="ctr" eaLnBrk="1" latinLnBrk="0" hangingPunct="1"/>
+            <a:endParaRPr kumimoji="0" lang="en-US"/>
+          </a:p>
+        </p:txBody>
+      </p:sp>
+      <p:sp>
+        <p:nvSpPr>
+          <p:cNvPr id="8" name="Oval 7"/>
+          <p:cNvSpPr/>
+          <p:nvPr/>
+        </p:nvSpPr>
+        <p:spPr>
+          <a:xfrm>
+            <a:off x="2896428" y="2814656"/>
+            <a:ext cx="280416" cy="210312"/>
+          </a:xfrm>
+          <a:prstGeom prst="ellipse">
+            <a:avLst/>
+          </a:prstGeom>
+          <a:gradFill rotWithShape="1">
+            <a:gsLst>
+              <a:gs pos="0">
+                <a:schemeClr val="accent1">
+                  <a:tint val="20000"/>
+                  <a:satMod val="450000"/>
+                  <a:alpha val="95000"/>
+                </a:schemeClr>
+              </a:gs>
+              <a:gs pos="50000">
+                <a:schemeClr val="accent1">
+                  <a:tint val="38000"/>
+                  <a:satMod val="250000"/>
+                  <a:alpha val="90000"/>
+                </a:schemeClr>
+              </a:gs>
+              <a:gs pos="95000">
+                <a:schemeClr val="accent1">
+                  <a:tint val="75000"/>
+                  <a:satMod val="255000"/>
+                  <a:alpha val="88000"/>
+                </a:schemeClr>
+              </a:gs>
+              <a:gs pos="100000">
+                <a:schemeClr val="accent1">
+                  <a:tint val="100000"/>
+                  <a:shade val="90000"/>
+                  <a:satMod val="255000"/>
+                  <a:alpha val="85000"/>
+                </a:schemeClr>
+              </a:gs>
+            </a:gsLst>
+            <a:path path="circle">
+              <a:fillToRect l="25000" t="12500" r="75000" b="87500"/>
+            </a:path>
+          </a:gradFill>
+          <a:ln w="2000" cap="rnd" cmpd="sng" algn="ctr">
+            <a:solidFill>
+              <a:schemeClr val="accent1">
+                <a:shade val="90000"/>
+                <a:satMod val="110000"/>
+                <a:alpha val="60000"/>
+              </a:schemeClr>
+            </a:solidFill>
+            <a:prstDash val="solid"/>
+          </a:ln>
+          <a:effectLst/>
+        </p:spPr>
+        <p:style>
+          <a:lnRef idx="1">
+            <a:schemeClr val="accent1"/>
+          </a:lnRef>
+          <a:fillRef idx="2">
+            <a:schemeClr val="accent1"/>
+          </a:fillRef>
+          <a:effectRef idx="1">
+            <a:schemeClr val="accent1"/>
+          </a:effectRef>
+          <a:fontRef idx="minor">
+            <a:schemeClr val="dk1"/>
+          </a:fontRef>
+        </p:style>
+        <p:txBody>
+          <a:bodyPr anchor="ctr"/>
+          <a:lstStyle>
+            <a:extLst/>
+          </a:lstStyle>
+          <a:p>
+            <a:pPr algn="ctr" eaLnBrk="1" latinLnBrk="0" hangingPunct="1"/>
+            <a:endParaRPr kumimoji="0" lang="en-US"/>
+          </a:p>
+        </p:txBody>
+      </p:sp>
+      <p:sp>
+        <p:nvSpPr>
+          <p:cNvPr id="9" name="Oval 8"/>
+          <p:cNvSpPr/>
+          <p:nvPr/>
+        </p:nvSpPr>
+        <p:spPr>
+          <a:xfrm>
+            <a:off x="3210752" y="2745870"/>
+            <a:ext cx="85344" cy="64008"/>
+          </a:xfrm>
+          <a:prstGeom prst="ellipse">
+            <a:avLst/>
+          </a:prstGeom>
+          <a:noFill/>
+          <a:ln w="12700" cap="rnd" cmpd="sng" algn="ctr">
+            <a:solidFill>
+              <a:schemeClr val="accent1">
+                <a:shade val="75000"/>
+                <a:alpha val="60000"/>
+              </a:schemeClr>
+            </a:solidFill>
+            <a:prstDash val="solid"/>
+          </a:ln>
+          <a:effectLst/>
+        </p:spPr>
+        <p:style>
+          <a:lnRef idx="1">
+            <a:schemeClr val="accent1"/>
+          </a:lnRef>
+          <a:fillRef idx="2">
+            <a:schemeClr val="accent1"/>
+          </a:fillRef>
+          <a:effectRef idx="1">
+            <a:schemeClr val="accent1"/>
+          </a:effectRef>
+          <a:fontRef idx="minor">
+            <a:schemeClr val="dk1"/>
+          </a:fontRef>
+        </p:style>
+        <p:txBody>
+          <a:bodyPr anchor="ctr"/>
+          <a:lstStyle>
+            <a:extLst/>
+          </a:lstStyle>
+          <a:p>
+            <a:pPr algn="ctr" eaLnBrk="1" latinLnBrk="0" hangingPunct="1"/>
+            <a:endParaRPr kumimoji="0" lang="en-US"/>
+          </a:p>
+        </p:txBody>
+      </p:sp>
     </p:spTree>
-    <p:extLst>
-      <p:ext uri="{BB962C8B-B14F-4D97-AF65-F5344CB8AC3E}">
-        <p14:creationId xmlns:p14="http://schemas.microsoft.com/office/powerpoint/2010/main" val="960648375"/>
-      </p:ext>
-    </p:extLst>
   </p:cSld>
   <p:clrMapOvr>
     <a:masterClrMapping/>
@@ -1151,16 +1472,23 @@
             <p:ph type="title"/>
           </p:nvPr>
         </p:nvSpPr>
-        <p:spPr/>
+        <p:spPr>
+          <a:xfrm>
+            <a:off x="1914144" y="274320"/>
+            <a:ext cx="9997440" cy="1143000"/>
+          </a:xfrm>
+        </p:spPr>
         <p:txBody>
           <a:bodyPr/>
-          <a:lstStyle/>
-          <a:p>
-            <a:r>
-              <a:rPr lang="en-US" smtClean="0"/>
+          <a:lstStyle>
+            <a:extLst/>
+          </a:lstStyle>
+          <a:p>
+            <a:r>
+              <a:rPr kumimoji="0" lang="en-US" smtClean="0"/>
               <a:t>Click to edit Master title style</a:t>
             </a:r>
-            <a:endParaRPr lang="en-US"/>
+            <a:endParaRPr kumimoji="0" lang="en-US"/>
           </a:p>
         </p:txBody>
       </p:sp>
@@ -1176,8 +1504,8 @@
         </p:nvSpPr>
         <p:spPr>
           <a:xfrm>
-            <a:off x="457200" y="1600200"/>
-            <a:ext cx="4038600" cy="4525963"/>
+            <a:off x="1914144" y="1524000"/>
+            <a:ext cx="4876800" cy="4663440"/>
           </a:xfrm>
         </p:spPr>
         <p:txBody>
@@ -1198,54 +1526,43 @@
             <a:lvl5pPr>
               <a:defRPr sz="1800"/>
             </a:lvl5pPr>
-            <a:lvl6pPr>
-              <a:defRPr sz="1800"/>
-            </a:lvl6pPr>
-            <a:lvl7pPr>
-              <a:defRPr sz="1800"/>
-            </a:lvl7pPr>
-            <a:lvl8pPr>
-              <a:defRPr sz="1800"/>
-            </a:lvl8pPr>
-            <a:lvl9pPr>
-              <a:defRPr sz="1800"/>
-            </a:lvl9pPr>
-          </a:lstStyle>
-          <a:p>
-            <a:pPr lvl="0"/>
+            <a:extLst/>
+          </a:lstStyle>
+          <a:p>
+            <a:pPr lvl="0" eaLnBrk="1" latinLnBrk="0" hangingPunct="1"/>
             <a:r>
               <a:rPr lang="en-US" smtClean="0"/>
               <a:t>Click to edit Master text styles</a:t>
             </a:r>
           </a:p>
           <a:p>
-            <a:pPr lvl="1"/>
+            <a:pPr lvl="1" eaLnBrk="1" latinLnBrk="0" hangingPunct="1"/>
             <a:r>
               <a:rPr lang="en-US" smtClean="0"/>
               <a:t>Second level</a:t>
             </a:r>
           </a:p>
           <a:p>
-            <a:pPr lvl="2"/>
+            <a:pPr lvl="2" eaLnBrk="1" latinLnBrk="0" hangingPunct="1"/>
             <a:r>
               <a:rPr lang="en-US" smtClean="0"/>
               <a:t>Third level</a:t>
             </a:r>
           </a:p>
           <a:p>
-            <a:pPr lvl="3"/>
+            <a:pPr lvl="3" eaLnBrk="1" latinLnBrk="0" hangingPunct="1"/>
             <a:r>
               <a:rPr lang="en-US" smtClean="0"/>
               <a:t>Fourth level</a:t>
             </a:r>
           </a:p>
           <a:p>
-            <a:pPr lvl="4"/>
+            <a:pPr lvl="4" eaLnBrk="1" latinLnBrk="0" hangingPunct="1"/>
             <a:r>
               <a:rPr lang="en-US" smtClean="0"/>
               <a:t>Fifth level</a:t>
             </a:r>
-            <a:endParaRPr lang="en-US"/>
+            <a:endParaRPr kumimoji="0" lang="en-US"/>
           </a:p>
         </p:txBody>
       </p:sp>
@@ -1261,8 +1578,8 @@
         </p:nvSpPr>
         <p:spPr>
           <a:xfrm>
-            <a:off x="4648200" y="1600200"/>
-            <a:ext cx="4038600" cy="4525963"/>
+            <a:off x="7034784" y="1524000"/>
+            <a:ext cx="4876800" cy="4663440"/>
           </a:xfrm>
         </p:spPr>
         <p:txBody>
@@ -1283,54 +1600,43 @@
             <a:lvl5pPr>
               <a:defRPr sz="1800"/>
             </a:lvl5pPr>
-            <a:lvl6pPr>
-              <a:defRPr sz="1800"/>
-            </a:lvl6pPr>
-            <a:lvl7pPr>
-              <a:defRPr sz="1800"/>
-            </a:lvl7pPr>
-            <a:lvl8pPr>
-              <a:defRPr sz="1800"/>
-            </a:lvl8pPr>
-            <a:lvl9pPr>
-              <a:defRPr sz="1800"/>
-            </a:lvl9pPr>
-          </a:lstStyle>
-          <a:p>
-            <a:pPr lvl="0"/>
+            <a:extLst/>
+          </a:lstStyle>
+          <a:p>
+            <a:pPr lvl="0" eaLnBrk="1" latinLnBrk="0" hangingPunct="1"/>
             <a:r>
               <a:rPr lang="en-US" smtClean="0"/>
               <a:t>Click to edit Master text styles</a:t>
             </a:r>
           </a:p>
           <a:p>
-            <a:pPr lvl="1"/>
+            <a:pPr lvl="1" eaLnBrk="1" latinLnBrk="0" hangingPunct="1"/>
             <a:r>
               <a:rPr lang="en-US" smtClean="0"/>
               <a:t>Second level</a:t>
             </a:r>
           </a:p>
           <a:p>
-            <a:pPr lvl="2"/>
+            <a:pPr lvl="2" eaLnBrk="1" latinLnBrk="0" hangingPunct="1"/>
             <a:r>
               <a:rPr lang="en-US" smtClean="0"/>
               <a:t>Third level</a:t>
             </a:r>
           </a:p>
           <a:p>
-            <a:pPr lvl="3"/>
+            <a:pPr lvl="3" eaLnBrk="1" latinLnBrk="0" hangingPunct="1"/>
             <a:r>
               <a:rPr lang="en-US" smtClean="0"/>
               <a:t>Fourth level</a:t>
             </a:r>
           </a:p>
           <a:p>
-            <a:pPr lvl="4"/>
+            <a:pPr lvl="4" eaLnBrk="1" latinLnBrk="0" hangingPunct="1"/>
             <a:r>
               <a:rPr lang="en-US" smtClean="0"/>
               <a:t>Fifth level</a:t>
             </a:r>
-            <a:endParaRPr lang="en-US"/>
+            <a:endParaRPr kumimoji="0" lang="en-US"/>
           </a:p>
         </p:txBody>
       </p:sp>
@@ -1347,11 +1653,13 @@
         <p:spPr/>
         <p:txBody>
           <a:bodyPr/>
-          <a:lstStyle/>
+          <a:lstStyle>
+            <a:extLst/>
+          </a:lstStyle>
           <a:p>
             <a:fld id="{5BCAD085-E8A6-8845-BD4E-CB4CCA059FC4}" type="datetimeFigureOut">
               <a:rPr lang="en-US" smtClean="0"/>
-              <a:t>1/27/13</a:t>
+              <a:t>9/18/2026</a:t>
             </a:fld>
             <a:endParaRPr lang="en-US"/>
           </a:p>
@@ -1370,7 +1678,9 @@
         <p:spPr/>
         <p:txBody>
           <a:bodyPr/>
-          <a:lstStyle/>
+          <a:lstStyle>
+            <a:extLst/>
+          </a:lstStyle>
           <a:p>
             <a:endParaRPr lang="en-US"/>
           </a:p>
@@ -1389,7 +1699,9 @@
         <p:spPr/>
         <p:txBody>
           <a:bodyPr/>
-          <a:lstStyle/>
+          <a:lstStyle>
+            <a:extLst/>
+          </a:lstStyle>
           <a:p>
             <a:fld id="{C1FF6DA9-008F-8B48-92A6-B652298478BF}" type="slidenum">
               <a:rPr lang="en-US" smtClean="0"/>
@@ -1400,11 +1712,6 @@
         </p:txBody>
       </p:sp>
     </p:spTree>
-    <p:extLst>
-      <p:ext uri="{BB962C8B-B14F-4D97-AF65-F5344CB8AC3E}">
-        <p14:creationId xmlns:p14="http://schemas.microsoft.com/office/powerpoint/2010/main" val="2782244947"/>
-      </p:ext>
-    </p:extLst>
   </p:cSld>
   <p:clrMapOvr>
     <a:masterClrMapping/>
@@ -1413,7 +1720,7 @@
 </file>
 
 <file path=ppt/slideLayouts/slideLayout5.xml><?xml version="1.0" encoding="utf-8"?>
-<p:sldLayout xmlns:a="http://schemas.openxmlformats.org/drawingml/2006/main" xmlns:r="http://schemas.openxmlformats.org/officeDocument/2006/relationships" xmlns:p="http://schemas.openxmlformats.org/presentationml/2006/main" type="twoTxTwoObj" preserve="1">
+<p:sldLayout xmlns:a="http://schemas.openxmlformats.org/drawingml/2006/main" xmlns:r="http://schemas.openxmlformats.org/officeDocument/2006/relationships" xmlns:p="http://schemas.openxmlformats.org/presentationml/2006/main" showMasterSp="0" type="twoTxTwoObj" preserve="1">
   <p:cSld name="Comparison">
     <p:spTree>
       <p:nvGrpSpPr>
@@ -1439,20 +1746,26 @@
             <p:ph type="title"/>
           </p:nvPr>
         </p:nvSpPr>
-        <p:spPr/>
-        <p:txBody>
-          <a:bodyPr/>
-          <a:lstStyle>
-            <a:lvl1pPr>
-              <a:defRPr/>
+        <p:spPr>
+          <a:xfrm>
+            <a:off x="609600" y="5160336"/>
+            <a:ext cx="10972800" cy="1143000"/>
+          </a:xfrm>
+        </p:spPr>
+        <p:txBody>
+          <a:bodyPr anchor="ctr"/>
+          <a:lstStyle>
+            <a:lvl1pPr algn="ctr">
+              <a:defRPr sz="4500" b="1" cap="none" baseline="0"/>
             </a:lvl1pPr>
-          </a:lstStyle>
-          <a:p>
-            <a:r>
-              <a:rPr lang="en-US" smtClean="0"/>
+            <a:extLst/>
+          </a:lstStyle>
+          <a:p>
+            <a:r>
+              <a:rPr kumimoji="0" lang="en-US" smtClean="0"/>
               <a:t>Click to edit Master title style</a:t>
             </a:r>
-            <a:endParaRPr lang="en-US"/>
+            <a:endParaRPr kumimoji="0" lang="en-US"/>
           </a:p>
         </p:txBody>
       </p:sp>
@@ -1468,54 +1781,58 @@
         </p:nvSpPr>
         <p:spPr>
           <a:xfrm>
-            <a:off x="457200" y="1535113"/>
-            <a:ext cx="4040188" cy="639762"/>
+            <a:off x="609600" y="328278"/>
+            <a:ext cx="5364480" cy="640080"/>
           </a:xfrm>
+          <a:solidFill>
+            <a:schemeClr val="bg1"/>
+          </a:solidFill>
+          <a:ln w="10795">
+            <a:solidFill>
+              <a:schemeClr val="bg1"/>
+            </a:solidFill>
+            <a:miter lim="800000"/>
+          </a:ln>
         </p:spPr>
         <p:txBody>
-          <a:bodyPr anchor="b"/>
-          <a:lstStyle>
-            <a:lvl1pPr marL="0" indent="0">
+          <a:bodyPr anchor="ctr"/>
+          <a:lstStyle>
+            <a:lvl1pPr marL="64008" indent="0" algn="l">
+              <a:lnSpc>
+                <a:spcPct val="100000"/>
+              </a:lnSpc>
+              <a:spcBef>
+                <a:spcPts val="100"/>
+              </a:spcBef>
               <a:buNone/>
-              <a:defRPr sz="2400" b="1"/>
+              <a:defRPr sz="1900" b="0">
+                <a:solidFill>
+                  <a:schemeClr val="tx1"/>
+                </a:solidFill>
+              </a:defRPr>
             </a:lvl1pPr>
-            <a:lvl2pPr marL="457200" indent="0">
+            <a:lvl2pPr>
               <a:buNone/>
               <a:defRPr sz="2000" b="1"/>
             </a:lvl2pPr>
-            <a:lvl3pPr marL="914400" indent="0">
+            <a:lvl3pPr>
               <a:buNone/>
               <a:defRPr sz="1800" b="1"/>
             </a:lvl3pPr>
-            <a:lvl4pPr marL="1371600" indent="0">
+            <a:lvl4pPr>
               <a:buNone/>
               <a:defRPr sz="1600" b="1"/>
             </a:lvl4pPr>
-            <a:lvl5pPr marL="1828800" indent="0">
+            <a:lvl5pPr>
               <a:buNone/>
               <a:defRPr sz="1600" b="1"/>
             </a:lvl5pPr>
-            <a:lvl6pPr marL="2286000" indent="0">
-              <a:buNone/>
-              <a:defRPr sz="1600" b="1"/>
-            </a:lvl6pPr>
-            <a:lvl7pPr marL="2743200" indent="0">
-              <a:buNone/>
-              <a:defRPr sz="1600" b="1"/>
-            </a:lvl7pPr>
-            <a:lvl8pPr marL="3200400" indent="0">
-              <a:buNone/>
-              <a:defRPr sz="1600" b="1"/>
-            </a:lvl8pPr>
-            <a:lvl9pPr marL="3657600" indent="0">
-              <a:buNone/>
-              <a:defRPr sz="1600" b="1"/>
-            </a:lvl9pPr>
-          </a:lstStyle>
-          <a:p>
-            <a:pPr lvl="0"/>
-            <a:r>
-              <a:rPr lang="en-US" smtClean="0"/>
+            <a:extLst/>
+          </a:lstStyle>
+          <a:p>
+            <a:pPr lvl="0" eaLnBrk="1" latinLnBrk="0" hangingPunct="1"/>
+            <a:r>
+              <a:rPr kumimoji="0" lang="en-US" smtClean="0"/>
               <a:t>Click to edit Master text styles</a:t>
             </a:r>
           </a:p>
@@ -1523,151 +1840,181 @@
       </p:sp>
       <p:sp>
         <p:nvSpPr>
-          <p:cNvPr id="4" name="Content Placeholder 3"/>
+          <p:cNvPr id="4" name="Text Placeholder 3"/>
           <p:cNvSpPr>
             <a:spLocks noGrp="1"/>
           </p:cNvSpPr>
           <p:nvPr>
-            <p:ph sz="half" idx="2"/>
+            <p:ph type="body" sz="half" idx="3"/>
           </p:nvPr>
         </p:nvSpPr>
         <p:spPr>
           <a:xfrm>
-            <a:off x="457200" y="2174875"/>
-            <a:ext cx="4040188" cy="3951288"/>
+            <a:off x="6217920" y="328278"/>
+            <a:ext cx="5364480" cy="640080"/>
           </a:xfrm>
+          <a:solidFill>
+            <a:schemeClr val="bg1"/>
+          </a:solidFill>
+          <a:ln w="10795">
+            <a:solidFill>
+              <a:schemeClr val="bg1"/>
+            </a:solidFill>
+            <a:miter lim="800000"/>
+          </a:ln>
         </p:spPr>
         <p:txBody>
-          <a:bodyPr/>
-          <a:lstStyle>
-            <a:lvl1pPr>
-              <a:defRPr sz="2400"/>
+          <a:bodyPr anchor="ctr"/>
+          <a:lstStyle>
+            <a:lvl1pPr marL="64008" indent="0" algn="l">
+              <a:lnSpc>
+                <a:spcPct val="100000"/>
+              </a:lnSpc>
+              <a:spcBef>
+                <a:spcPts val="100"/>
+              </a:spcBef>
+              <a:buNone/>
+              <a:defRPr sz="1900" b="0">
+                <a:solidFill>
+                  <a:schemeClr val="tx1"/>
+                </a:solidFill>
+              </a:defRPr>
             </a:lvl1pPr>
             <a:lvl2pPr>
-              <a:defRPr sz="2000"/>
+              <a:buNone/>
+              <a:defRPr sz="2000" b="1"/>
             </a:lvl2pPr>
             <a:lvl3pPr>
-              <a:defRPr sz="1800"/>
+              <a:buNone/>
+              <a:defRPr sz="1800" b="1"/>
             </a:lvl3pPr>
             <a:lvl4pPr>
-              <a:defRPr sz="1600"/>
+              <a:buNone/>
+              <a:defRPr sz="1600" b="1"/>
             </a:lvl4pPr>
             <a:lvl5pPr>
-              <a:defRPr sz="1600"/>
+              <a:buNone/>
+              <a:defRPr sz="1600" b="1"/>
             </a:lvl5pPr>
-            <a:lvl6pPr>
-              <a:defRPr sz="1600"/>
-            </a:lvl6pPr>
-            <a:lvl7pPr>
-              <a:defRPr sz="1600"/>
-            </a:lvl7pPr>
-            <a:lvl8pPr>
-              <a:defRPr sz="1600"/>
-            </a:lvl8pPr>
-            <a:lvl9pPr>
-              <a:defRPr sz="1600"/>
-            </a:lvl9pPr>
-          </a:lstStyle>
-          <a:p>
-            <a:pPr lvl="0"/>
-            <a:r>
-              <a:rPr lang="en-US" smtClean="0"/>
+            <a:extLst/>
+          </a:lstStyle>
+          <a:p>
+            <a:pPr lvl="0" eaLnBrk="1" latinLnBrk="0" hangingPunct="1"/>
+            <a:r>
+              <a:rPr kumimoji="0" lang="en-US" smtClean="0"/>
               <a:t>Click to edit Master text styles</a:t>
             </a:r>
           </a:p>
-          <a:p>
-            <a:pPr lvl="1"/>
-            <a:r>
-              <a:rPr lang="en-US" smtClean="0"/>
-              <a:t>Second level</a:t>
-            </a:r>
-          </a:p>
-          <a:p>
-            <a:pPr lvl="2"/>
-            <a:r>
-              <a:rPr lang="en-US" smtClean="0"/>
-              <a:t>Third level</a:t>
-            </a:r>
-          </a:p>
-          <a:p>
-            <a:pPr lvl="3"/>
-            <a:r>
-              <a:rPr lang="en-US" smtClean="0"/>
-              <a:t>Fourth level</a:t>
-            </a:r>
-          </a:p>
-          <a:p>
-            <a:pPr lvl="4"/>
-            <a:r>
-              <a:rPr lang="en-US" smtClean="0"/>
-              <a:t>Fifth level</a:t>
-            </a:r>
-            <a:endParaRPr lang="en-US"/>
-          </a:p>
-        </p:txBody>
-      </p:sp>
-      <p:sp>
-        <p:nvSpPr>
-          <p:cNvPr id="5" name="Text Placeholder 4"/>
+        </p:txBody>
+      </p:sp>
+      <p:sp>
+        <p:nvSpPr>
+          <p:cNvPr id="5" name="Content Placeholder 4"/>
           <p:cNvSpPr>
             <a:spLocks noGrp="1"/>
           </p:cNvSpPr>
           <p:nvPr>
-            <p:ph type="body" sz="quarter" idx="3"/>
+            <p:ph sz="quarter" idx="2"/>
           </p:nvPr>
         </p:nvSpPr>
         <p:spPr>
           <a:xfrm>
-            <a:off x="4645025" y="1535113"/>
-            <a:ext cx="4041775" cy="639762"/>
+            <a:off x="609600" y="969336"/>
+            <a:ext cx="5364480" cy="4114800"/>
           </a:xfrm>
+          <a:ln w="10795">
+            <a:solidFill>
+              <a:schemeClr val="bg1"/>
+            </a:solidFill>
+            <a:prstDash val="dash"/>
+            <a:miter lim="800000"/>
+          </a:ln>
         </p:spPr>
         <p:txBody>
-          <a:bodyPr anchor="b"/>
-          <a:lstStyle>
-            <a:lvl1pPr marL="0" indent="0">
-              <a:buNone/>
-              <a:defRPr sz="2400" b="1"/>
+          <a:bodyPr/>
+          <a:lstStyle>
+            <a:lvl1pPr marL="393192" indent="-274320">
+              <a:lnSpc>
+                <a:spcPct val="100000"/>
+              </a:lnSpc>
+              <a:spcBef>
+                <a:spcPts val="700"/>
+              </a:spcBef>
+              <a:defRPr sz="2400"/>
             </a:lvl1pPr>
-            <a:lvl2pPr marL="457200" indent="0">
-              <a:buNone/>
-              <a:defRPr sz="2000" b="1"/>
+            <a:lvl2pPr>
+              <a:lnSpc>
+                <a:spcPct val="100000"/>
+              </a:lnSpc>
+              <a:spcBef>
+                <a:spcPts val="700"/>
+              </a:spcBef>
+              <a:defRPr sz="2000"/>
             </a:lvl2pPr>
-            <a:lvl3pPr marL="914400" indent="0">
-              <a:buNone/>
-              <a:defRPr sz="1800" b="1"/>
+            <a:lvl3pPr>
+              <a:lnSpc>
+                <a:spcPct val="100000"/>
+              </a:lnSpc>
+              <a:spcBef>
+                <a:spcPts val="700"/>
+              </a:spcBef>
+              <a:defRPr sz="1800"/>
             </a:lvl3pPr>
-            <a:lvl4pPr marL="1371600" indent="0">
-              <a:buNone/>
-              <a:defRPr sz="1600" b="1"/>
+            <a:lvl4pPr>
+              <a:lnSpc>
+                <a:spcPct val="100000"/>
+              </a:lnSpc>
+              <a:spcBef>
+                <a:spcPts val="700"/>
+              </a:spcBef>
+              <a:defRPr sz="1600"/>
             </a:lvl4pPr>
-            <a:lvl5pPr marL="1828800" indent="0">
-              <a:buNone/>
-              <a:defRPr sz="1600" b="1"/>
+            <a:lvl5pPr>
+              <a:lnSpc>
+                <a:spcPct val="100000"/>
+              </a:lnSpc>
+              <a:spcBef>
+                <a:spcPts val="700"/>
+              </a:spcBef>
+              <a:defRPr sz="1600"/>
             </a:lvl5pPr>
-            <a:lvl6pPr marL="2286000" indent="0">
-              <a:buNone/>
-              <a:defRPr sz="1600" b="1"/>
-            </a:lvl6pPr>
-            <a:lvl7pPr marL="2743200" indent="0">
-              <a:buNone/>
-              <a:defRPr sz="1600" b="1"/>
-            </a:lvl7pPr>
-            <a:lvl8pPr marL="3200400" indent="0">
-              <a:buNone/>
-              <a:defRPr sz="1600" b="1"/>
-            </a:lvl8pPr>
-            <a:lvl9pPr marL="3657600" indent="0">
-              <a:buNone/>
-              <a:defRPr sz="1600" b="1"/>
-            </a:lvl9pPr>
-          </a:lstStyle>
-          <a:p>
-            <a:pPr lvl="0"/>
+            <a:extLst/>
+          </a:lstStyle>
+          <a:p>
+            <a:pPr lvl="0" eaLnBrk="1" latinLnBrk="0" hangingPunct="1"/>
             <a:r>
               <a:rPr lang="en-US" smtClean="0"/>
               <a:t>Click to edit Master text styles</a:t>
             </a:r>
+          </a:p>
+          <a:p>
+            <a:pPr lvl="1" eaLnBrk="1" latinLnBrk="0" hangingPunct="1"/>
+            <a:r>
+              <a:rPr lang="en-US" smtClean="0"/>
+              <a:t>Second level</a:t>
+            </a:r>
+          </a:p>
+          <a:p>
+            <a:pPr lvl="2" eaLnBrk="1" latinLnBrk="0" hangingPunct="1"/>
+            <a:r>
+              <a:rPr lang="en-US" smtClean="0"/>
+              <a:t>Third level</a:t>
+            </a:r>
+          </a:p>
+          <a:p>
+            <a:pPr lvl="3" eaLnBrk="1" latinLnBrk="0" hangingPunct="1"/>
+            <a:r>
+              <a:rPr lang="en-US" smtClean="0"/>
+              <a:t>Fourth level</a:t>
+            </a:r>
+          </a:p>
+          <a:p>
+            <a:pPr lvl="4" eaLnBrk="1" latinLnBrk="0" hangingPunct="1"/>
+            <a:r>
+              <a:rPr lang="en-US" smtClean="0"/>
+              <a:t>Fifth level</a:t>
+            </a:r>
+            <a:endParaRPr kumimoji="0" lang="en-US"/>
           </a:p>
         </p:txBody>
       </p:sp>
@@ -1683,76 +2030,102 @@
         </p:nvSpPr>
         <p:spPr>
           <a:xfrm>
-            <a:off x="4645025" y="2174875"/>
-            <a:ext cx="4041775" cy="3951288"/>
+            <a:off x="6217920" y="969336"/>
+            <a:ext cx="5364480" cy="4114800"/>
           </a:xfrm>
+          <a:ln w="10795">
+            <a:solidFill>
+              <a:schemeClr val="bg1"/>
+            </a:solidFill>
+            <a:prstDash val="dash"/>
+            <a:miter lim="800000"/>
+          </a:ln>
         </p:spPr>
         <p:txBody>
           <a:bodyPr/>
           <a:lstStyle>
-            <a:lvl1pPr>
+            <a:lvl1pPr marL="393192" indent="-274320">
+              <a:lnSpc>
+                <a:spcPct val="100000"/>
+              </a:lnSpc>
+              <a:spcBef>
+                <a:spcPts val="700"/>
+              </a:spcBef>
               <a:defRPr sz="2400"/>
             </a:lvl1pPr>
             <a:lvl2pPr>
+              <a:lnSpc>
+                <a:spcPct val="100000"/>
+              </a:lnSpc>
+              <a:spcBef>
+                <a:spcPts val="700"/>
+              </a:spcBef>
               <a:defRPr sz="2000"/>
             </a:lvl2pPr>
             <a:lvl3pPr>
+              <a:lnSpc>
+                <a:spcPct val="100000"/>
+              </a:lnSpc>
+              <a:spcBef>
+                <a:spcPts val="700"/>
+              </a:spcBef>
               <a:defRPr sz="1800"/>
             </a:lvl3pPr>
             <a:lvl4pPr>
+              <a:lnSpc>
+                <a:spcPct val="100000"/>
+              </a:lnSpc>
+              <a:spcBef>
+                <a:spcPts val="700"/>
+              </a:spcBef>
               <a:defRPr sz="1600"/>
             </a:lvl4pPr>
             <a:lvl5pPr>
+              <a:lnSpc>
+                <a:spcPct val="100000"/>
+              </a:lnSpc>
+              <a:spcBef>
+                <a:spcPts val="700"/>
+              </a:spcBef>
               <a:defRPr sz="1600"/>
             </a:lvl5pPr>
-            <a:lvl6pPr>
-              <a:defRPr sz="1600"/>
-            </a:lvl6pPr>
-            <a:lvl7pPr>
-              <a:defRPr sz="1600"/>
-            </a:lvl7pPr>
-            <a:lvl8pPr>
-              <a:defRPr sz="1600"/>
-            </a:lvl8pPr>
-            <a:lvl9pPr>
-              <a:defRPr sz="1600"/>
-            </a:lvl9pPr>
-          </a:lstStyle>
-          <a:p>
-            <a:pPr lvl="0"/>
+            <a:extLst/>
+          </a:lstStyle>
+          <a:p>
+            <a:pPr lvl="0" eaLnBrk="1" latinLnBrk="0" hangingPunct="1"/>
             <a:r>
               <a:rPr lang="en-US" smtClean="0"/>
               <a:t>Click to edit Master text styles</a:t>
             </a:r>
           </a:p>
           <a:p>
-            <a:pPr lvl="1"/>
+            <a:pPr lvl="1" eaLnBrk="1" latinLnBrk="0" hangingPunct="1"/>
             <a:r>
               <a:rPr lang="en-US" smtClean="0"/>
               <a:t>Second level</a:t>
             </a:r>
           </a:p>
           <a:p>
-            <a:pPr lvl="2"/>
+            <a:pPr lvl="2" eaLnBrk="1" latinLnBrk="0" hangingPunct="1"/>
             <a:r>
               <a:rPr lang="en-US" smtClean="0"/>
               <a:t>Third level</a:t>
             </a:r>
           </a:p>
           <a:p>
-            <a:pPr lvl="3"/>
+            <a:pPr lvl="3" eaLnBrk="1" latinLnBrk="0" hangingPunct="1"/>
             <a:r>
               <a:rPr lang="en-US" smtClean="0"/>
               <a:t>Fourth level</a:t>
             </a:r>
           </a:p>
           <a:p>
-            <a:pPr lvl="4"/>
+            <a:pPr lvl="4" eaLnBrk="1" latinLnBrk="0" hangingPunct="1"/>
             <a:r>
               <a:rPr lang="en-US" smtClean="0"/>
               <a:t>Fifth level</a:t>
             </a:r>
-            <a:endParaRPr lang="en-US"/>
+            <a:endParaRPr kumimoji="0" lang="en-US"/>
           </a:p>
         </p:txBody>
       </p:sp>
@@ -1769,11 +2142,13 @@
         <p:spPr/>
         <p:txBody>
           <a:bodyPr/>
-          <a:lstStyle/>
+          <a:lstStyle>
+            <a:extLst/>
+          </a:lstStyle>
           <a:p>
             <a:fld id="{5BCAD085-E8A6-8845-BD4E-CB4CCA059FC4}" type="datetimeFigureOut">
               <a:rPr lang="en-US" smtClean="0"/>
-              <a:t>1/27/13</a:t>
+              <a:t>9/18/2026</a:t>
             </a:fld>
             <a:endParaRPr lang="en-US"/>
           </a:p>
@@ -1792,7 +2167,9 @@
         <p:spPr/>
         <p:txBody>
           <a:bodyPr/>
-          <a:lstStyle/>
+          <a:lstStyle>
+            <a:extLst/>
+          </a:lstStyle>
           <a:p>
             <a:endParaRPr lang="en-US"/>
           </a:p>
@@ -1811,7 +2188,9 @@
         <p:spPr/>
         <p:txBody>
           <a:bodyPr/>
-          <a:lstStyle/>
+          <a:lstStyle>
+            <a:extLst/>
+          </a:lstStyle>
           <a:p>
             <a:fld id="{C1FF6DA9-008F-8B48-92A6-B652298478BF}" type="slidenum">
               <a:rPr lang="en-US" smtClean="0"/>
@@ -1822,11 +2201,6 @@
         </p:txBody>
       </p:sp>
     </p:spTree>
-    <p:extLst>
-      <p:ext uri="{BB962C8B-B14F-4D97-AF65-F5344CB8AC3E}">
-        <p14:creationId xmlns:p14="http://schemas.microsoft.com/office/powerpoint/2010/main" val="990158736"/>
-      </p:ext>
-    </p:extLst>
   </p:cSld>
   <p:clrMapOvr>
     <a:masterClrMapping/>
@@ -1861,16 +2235,23 @@
             <p:ph type="title"/>
           </p:nvPr>
         </p:nvSpPr>
-        <p:spPr/>
-        <p:txBody>
-          <a:bodyPr/>
-          <a:lstStyle/>
-          <a:p>
-            <a:r>
-              <a:rPr lang="en-US" smtClean="0"/>
+        <p:spPr>
+          <a:xfrm>
+            <a:off x="1914144" y="274320"/>
+            <a:ext cx="9997440" cy="1143000"/>
+          </a:xfrm>
+        </p:spPr>
+        <p:txBody>
+          <a:bodyPr anchor="ctr"/>
+          <a:lstStyle>
+            <a:extLst/>
+          </a:lstStyle>
+          <a:p>
+            <a:r>
+              <a:rPr kumimoji="0" lang="en-US" smtClean="0"/>
               <a:t>Click to edit Master title style</a:t>
             </a:r>
-            <a:endParaRPr lang="en-US"/>
+            <a:endParaRPr kumimoji="0" lang="en-US"/>
           </a:p>
         </p:txBody>
       </p:sp>
@@ -1887,11 +2268,13 @@
         <p:spPr/>
         <p:txBody>
           <a:bodyPr/>
-          <a:lstStyle/>
+          <a:lstStyle>
+            <a:extLst/>
+          </a:lstStyle>
           <a:p>
             <a:fld id="{5BCAD085-E8A6-8845-BD4E-CB4CCA059FC4}" type="datetimeFigureOut">
               <a:rPr lang="en-US" smtClean="0"/>
-              <a:t>1/27/13</a:t>
+              <a:t>9/18/2026</a:t>
             </a:fld>
             <a:endParaRPr lang="en-US"/>
           </a:p>
@@ -1910,7 +2293,9 @@
         <p:spPr/>
         <p:txBody>
           <a:bodyPr/>
-          <a:lstStyle/>
+          <a:lstStyle>
+            <a:extLst/>
+          </a:lstStyle>
           <a:p>
             <a:endParaRPr lang="en-US"/>
           </a:p>
@@ -1929,7 +2314,9 @@
         <p:spPr/>
         <p:txBody>
           <a:bodyPr/>
-          <a:lstStyle/>
+          <a:lstStyle>
+            <a:extLst/>
+          </a:lstStyle>
           <a:p>
             <a:fld id="{C1FF6DA9-008F-8B48-92A6-B652298478BF}" type="slidenum">
               <a:rPr lang="en-US" smtClean="0"/>
@@ -1940,11 +2327,6 @@
         </p:txBody>
       </p:sp>
     </p:spTree>
-    <p:extLst>
-      <p:ext uri="{BB962C8B-B14F-4D97-AF65-F5344CB8AC3E}">
-        <p14:creationId xmlns:p14="http://schemas.microsoft.com/office/powerpoint/2010/main" val="727027711"/>
-      </p:ext>
-    </p:extLst>
   </p:cSld>
   <p:clrMapOvr>
     <a:masterClrMapping/>
@@ -1953,7 +2335,7 @@
 </file>
 
 <file path=ppt/slideLayouts/slideLayout7.xml><?xml version="1.0" encoding="utf-8"?>
-<p:sldLayout xmlns:a="http://schemas.openxmlformats.org/drawingml/2006/main" xmlns:r="http://schemas.openxmlformats.org/officeDocument/2006/relationships" xmlns:p="http://schemas.openxmlformats.org/presentationml/2006/main" type="blank" preserve="1">
+<p:sldLayout xmlns:a="http://schemas.openxmlformats.org/drawingml/2006/main" xmlns:r="http://schemas.openxmlformats.org/officeDocument/2006/relationships" xmlns:p="http://schemas.openxmlformats.org/presentationml/2006/main" showMasterSp="0" type="blank" preserve="1">
   <p:cSld name="Blank">
     <p:spTree>
       <p:nvGrpSpPr>
@@ -1971,6 +2353,54 @@
       </p:grpSpPr>
       <p:sp>
         <p:nvSpPr>
+          <p:cNvPr id="5" name="Rectangle 4"/>
+          <p:cNvSpPr/>
+          <p:nvPr/>
+        </p:nvSpPr>
+        <p:spPr>
+          <a:xfrm>
+            <a:off x="1353312" y="0"/>
+            <a:ext cx="10838688" cy="6858000"/>
+          </a:xfrm>
+          <a:prstGeom prst="rect">
+            <a:avLst/>
+          </a:prstGeom>
+          <a:solidFill>
+            <a:schemeClr val="bg1"/>
+          </a:solidFill>
+          <a:ln w="25400" cap="rnd" cmpd="sng" algn="ctr">
+            <a:noFill/>
+            <a:prstDash val="solid"/>
+          </a:ln>
+          <a:effectLst/>
+        </p:spPr>
+        <p:style>
+          <a:lnRef idx="3">
+            <a:schemeClr val="lt1"/>
+          </a:lnRef>
+          <a:fillRef idx="1">
+            <a:schemeClr val="accent1"/>
+          </a:fillRef>
+          <a:effectRef idx="1">
+            <a:schemeClr val="accent1"/>
+          </a:effectRef>
+          <a:fontRef idx="minor">
+            <a:schemeClr val="lt1"/>
+          </a:fontRef>
+        </p:style>
+        <p:txBody>
+          <a:bodyPr anchor="ctr"/>
+          <a:lstStyle>
+            <a:extLst/>
+          </a:lstStyle>
+          <a:p>
+            <a:pPr algn="ctr" eaLnBrk="1" latinLnBrk="0" hangingPunct="1"/>
+            <a:endParaRPr kumimoji="0" lang="en-US"/>
+          </a:p>
+        </p:txBody>
+      </p:sp>
+      <p:sp>
+        <p:nvSpPr>
           <p:cNvPr id="2" name="Date Placeholder 1"/>
           <p:cNvSpPr>
             <a:spLocks noGrp="1"/>
@@ -1982,11 +2412,13 @@
         <p:spPr/>
         <p:txBody>
           <a:bodyPr/>
-          <a:lstStyle/>
+          <a:lstStyle>
+            <a:extLst/>
+          </a:lstStyle>
           <a:p>
             <a:fld id="{5BCAD085-E8A6-8845-BD4E-CB4CCA059FC4}" type="datetimeFigureOut">
               <a:rPr lang="en-US" smtClean="0"/>
-              <a:t>1/27/13</a:t>
+              <a:t>9/18/2026</a:t>
             </a:fld>
             <a:endParaRPr lang="en-US"/>
           </a:p>
@@ -2005,7 +2437,9 @@
         <p:spPr/>
         <p:txBody>
           <a:bodyPr/>
-          <a:lstStyle/>
+          <a:lstStyle>
+            <a:extLst/>
+          </a:lstStyle>
           <a:p>
             <a:endParaRPr lang="en-US"/>
           </a:p>
@@ -2024,7 +2458,9 @@
         <p:spPr/>
         <p:txBody>
           <a:bodyPr/>
-          <a:lstStyle/>
+          <a:lstStyle>
+            <a:extLst/>
+          </a:lstStyle>
           <a:p>
             <a:fld id="{C1FF6DA9-008F-8B48-92A6-B652298478BF}" type="slidenum">
               <a:rPr lang="en-US" smtClean="0"/>
@@ -2034,12 +2470,63 @@
           </a:p>
         </p:txBody>
       </p:sp>
+      <p:sp>
+        <p:nvSpPr>
+          <p:cNvPr id="6" name="Rectangle 5"/>
+          <p:cNvSpPr/>
+          <p:nvPr/>
+        </p:nvSpPr>
+        <p:spPr bwMode="invGray">
+          <a:xfrm>
+            <a:off x="1353312" y="-54"/>
+            <a:ext cx="97536" cy="6858054"/>
+          </a:xfrm>
+          <a:prstGeom prst="rect">
+            <a:avLst/>
+          </a:prstGeom>
+          <a:solidFill>
+            <a:schemeClr val="bg1"/>
+          </a:solidFill>
+          <a:ln w="25400" cap="rnd" cmpd="sng" algn="ctr">
+            <a:noFill/>
+            <a:prstDash val="solid"/>
+          </a:ln>
+          <a:effectLst>
+            <a:outerShdw blurRad="38550" dist="38000" dir="10800000" algn="tl" rotWithShape="0">
+              <a:schemeClr val="bg2">
+                <a:shade val="20000"/>
+                <a:satMod val="110000"/>
+                <a:alpha val="25000"/>
+              </a:schemeClr>
+            </a:outerShdw>
+          </a:effectLst>
+        </p:spPr>
+        <p:style>
+          <a:lnRef idx="3">
+            <a:schemeClr val="lt1"/>
+          </a:lnRef>
+          <a:fillRef idx="1">
+            <a:schemeClr val="accent1"/>
+          </a:fillRef>
+          <a:effectRef idx="1">
+            <a:schemeClr val="accent1"/>
+          </a:effectRef>
+          <a:fontRef idx="minor">
+            <a:schemeClr val="lt1"/>
+          </a:fontRef>
+        </p:style>
+        <p:txBody>
+          <a:bodyPr anchor="ctr"/>
+          <a:lstStyle>
+            <a:extLst/>
+          </a:lstStyle>
+          <a:p>
+            <a:pPr algn="ctr" eaLnBrk="1" latinLnBrk="0" hangingPunct="1"/>
+            <a:endParaRPr kumimoji="0" lang="en-US"/>
+          </a:p>
+        </p:txBody>
+      </p:sp>
     </p:spTree>
-    <p:extLst>
-      <p:ext uri="{BB962C8B-B14F-4D97-AF65-F5344CB8AC3E}">
-        <p14:creationId xmlns:p14="http://schemas.microsoft.com/office/powerpoint/2010/main" val="1212999818"/>
-      </p:ext>
-    </p:extLst>
   </p:cSld>
   <p:clrMapOvr>
     <a:masterClrMapping/>
@@ -2048,7 +2535,7 @@
 </file>
 
 <file path=ppt/slideLayouts/slideLayout8.xml><?xml version="1.0" encoding="utf-8"?>
-<p:sldLayout xmlns:a="http://schemas.openxmlformats.org/drawingml/2006/main" xmlns:r="http://schemas.openxmlformats.org/officeDocument/2006/relationships" xmlns:p="http://schemas.openxmlformats.org/presentationml/2006/main" type="objTx" preserve="1">
+<p:sldLayout xmlns:a="http://schemas.openxmlformats.org/drawingml/2006/main" xmlns:r="http://schemas.openxmlformats.org/officeDocument/2006/relationships" xmlns:p="http://schemas.openxmlformats.org/presentationml/2006/main" showMasterSp="0" type="objTx" preserve="1">
   <p:cSld name="Content with Caption">
     <p:spTree>
       <p:nvGrpSpPr>
@@ -2076,40 +2563,104 @@
         </p:nvSpPr>
         <p:spPr>
           <a:xfrm>
-            <a:off x="457200" y="273050"/>
-            <a:ext cx="3008313" cy="1162050"/>
+            <a:off x="609600" y="216778"/>
+            <a:ext cx="5080000" cy="1162050"/>
           </a:xfrm>
+          <a:ln>
+            <a:noFill/>
+          </a:ln>
         </p:spPr>
         <p:txBody>
           <a:bodyPr anchor="b"/>
           <a:lstStyle>
             <a:lvl1pPr algn="l">
-              <a:defRPr sz="2000" b="1"/>
+              <a:lnSpc>
+                <a:spcPts val="2000"/>
+              </a:lnSpc>
+              <a:buNone/>
+              <a:defRPr sz="2200" b="1" cap="all" baseline="0"/>
             </a:lvl1pPr>
-          </a:lstStyle>
-          <a:p>
-            <a:r>
-              <a:rPr lang="en-US" smtClean="0"/>
+            <a:extLst/>
+          </a:lstStyle>
+          <a:p>
+            <a:r>
+              <a:rPr kumimoji="0" lang="en-US" smtClean="0"/>
               <a:t>Click to edit Master title style</a:t>
             </a:r>
-            <a:endParaRPr lang="en-US"/>
-          </a:p>
-        </p:txBody>
-      </p:sp>
-      <p:sp>
-        <p:nvSpPr>
-          <p:cNvPr id="3" name="Content Placeholder 2"/>
+            <a:endParaRPr kumimoji="0" lang="en-US"/>
+          </a:p>
+        </p:txBody>
+      </p:sp>
+      <p:sp>
+        <p:nvSpPr>
+          <p:cNvPr id="3" name="Text Placeholder 2"/>
           <p:cNvSpPr>
             <a:spLocks noGrp="1"/>
           </p:cNvSpPr>
           <p:nvPr>
-            <p:ph idx="1"/>
+            <p:ph type="body" idx="2"/>
           </p:nvPr>
         </p:nvSpPr>
         <p:spPr>
           <a:xfrm>
-            <a:off x="3575050" y="273050"/>
-            <a:ext cx="5111750" cy="5853113"/>
+            <a:off x="609600" y="1406964"/>
+            <a:ext cx="5080000" cy="698500"/>
+          </a:xfrm>
+        </p:spPr>
+        <p:txBody>
+          <a:bodyPr/>
+          <a:lstStyle>
+            <a:lvl1pPr marL="45720" indent="0">
+              <a:lnSpc>
+                <a:spcPct val="100000"/>
+              </a:lnSpc>
+              <a:spcBef>
+                <a:spcPts val="0"/>
+              </a:spcBef>
+              <a:buNone/>
+              <a:defRPr sz="1400"/>
+            </a:lvl1pPr>
+            <a:lvl2pPr>
+              <a:buNone/>
+              <a:defRPr sz="1200"/>
+            </a:lvl2pPr>
+            <a:lvl3pPr>
+              <a:buNone/>
+              <a:defRPr sz="1000"/>
+            </a:lvl3pPr>
+            <a:lvl4pPr>
+              <a:buNone/>
+              <a:defRPr sz="900"/>
+            </a:lvl4pPr>
+            <a:lvl5pPr>
+              <a:buNone/>
+              <a:defRPr sz="900"/>
+            </a:lvl5pPr>
+            <a:extLst/>
+          </a:lstStyle>
+          <a:p>
+            <a:pPr lvl="0" eaLnBrk="1" latinLnBrk="0" hangingPunct="1"/>
+            <a:r>
+              <a:rPr kumimoji="0" lang="en-US" smtClean="0"/>
+              <a:t>Click to edit Master text styles</a:t>
+            </a:r>
+          </a:p>
+        </p:txBody>
+      </p:sp>
+      <p:sp>
+        <p:nvSpPr>
+          <p:cNvPr id="4" name="Content Placeholder 3"/>
+          <p:cNvSpPr>
+            <a:spLocks noGrp="1"/>
+          </p:cNvSpPr>
+          <p:nvPr>
+            <p:ph sz="half" idx="1"/>
+          </p:nvPr>
+        </p:nvSpPr>
+        <p:spPr>
+          <a:xfrm>
+            <a:off x="609600" y="2133601"/>
+            <a:ext cx="10871200" cy="3992563"/>
           </a:xfrm>
         </p:spPr>
         <p:txBody>
@@ -2130,119 +2681,43 @@
             <a:lvl5pPr>
               <a:defRPr sz="2000"/>
             </a:lvl5pPr>
-            <a:lvl6pPr>
-              <a:defRPr sz="2000"/>
-            </a:lvl6pPr>
-            <a:lvl7pPr>
-              <a:defRPr sz="2000"/>
-            </a:lvl7pPr>
-            <a:lvl8pPr>
-              <a:defRPr sz="2000"/>
-            </a:lvl8pPr>
-            <a:lvl9pPr>
-              <a:defRPr sz="2000"/>
-            </a:lvl9pPr>
-          </a:lstStyle>
-          <a:p>
-            <a:pPr lvl="0"/>
+            <a:extLst/>
+          </a:lstStyle>
+          <a:p>
+            <a:pPr lvl="0" eaLnBrk="1" latinLnBrk="0" hangingPunct="1"/>
             <a:r>
               <a:rPr lang="en-US" smtClean="0"/>
               <a:t>Click to edit Master text styles</a:t>
             </a:r>
           </a:p>
           <a:p>
-            <a:pPr lvl="1"/>
+            <a:pPr lvl="1" eaLnBrk="1" latinLnBrk="0" hangingPunct="1"/>
             <a:r>
               <a:rPr lang="en-US" smtClean="0"/>
               <a:t>Second level</a:t>
             </a:r>
           </a:p>
           <a:p>
-            <a:pPr lvl="2"/>
+            <a:pPr lvl="2" eaLnBrk="1" latinLnBrk="0" hangingPunct="1"/>
             <a:r>
               <a:rPr lang="en-US" smtClean="0"/>
               <a:t>Third level</a:t>
             </a:r>
           </a:p>
           <a:p>
-            <a:pPr lvl="3"/>
+            <a:pPr lvl="3" eaLnBrk="1" latinLnBrk="0" hangingPunct="1"/>
             <a:r>
               <a:rPr lang="en-US" smtClean="0"/>
               <a:t>Fourth level</a:t>
             </a:r>
           </a:p>
           <a:p>
-            <a:pPr lvl="4"/>
+            <a:pPr lvl="4" eaLnBrk="1" latinLnBrk="0" hangingPunct="1"/>
             <a:r>
               <a:rPr lang="en-US" smtClean="0"/>
               <a:t>Fifth level</a:t>
             </a:r>
-            <a:endParaRPr lang="en-US"/>
-          </a:p>
-        </p:txBody>
-      </p:sp>
-      <p:sp>
-        <p:nvSpPr>
-          <p:cNvPr id="4" name="Text Placeholder 3"/>
-          <p:cNvSpPr>
-            <a:spLocks noGrp="1"/>
-          </p:cNvSpPr>
-          <p:nvPr>
-            <p:ph type="body" sz="half" idx="2"/>
-          </p:nvPr>
-        </p:nvSpPr>
-        <p:spPr>
-          <a:xfrm>
-            <a:off x="457200" y="1435100"/>
-            <a:ext cx="3008313" cy="4691063"/>
-          </a:xfrm>
-        </p:spPr>
-        <p:txBody>
-          <a:bodyPr/>
-          <a:lstStyle>
-            <a:lvl1pPr marL="0" indent="0">
-              <a:buNone/>
-              <a:defRPr sz="1400"/>
-            </a:lvl1pPr>
-            <a:lvl2pPr marL="457200" indent="0">
-              <a:buNone/>
-              <a:defRPr sz="1200"/>
-            </a:lvl2pPr>
-            <a:lvl3pPr marL="914400" indent="0">
-              <a:buNone/>
-              <a:defRPr sz="1000"/>
-            </a:lvl3pPr>
-            <a:lvl4pPr marL="1371600" indent="0">
-              <a:buNone/>
-              <a:defRPr sz="900"/>
-            </a:lvl4pPr>
-            <a:lvl5pPr marL="1828800" indent="0">
-              <a:buNone/>
-              <a:defRPr sz="900"/>
-            </a:lvl5pPr>
-            <a:lvl6pPr marL="2286000" indent="0">
-              <a:buNone/>
-              <a:defRPr sz="900"/>
-            </a:lvl6pPr>
-            <a:lvl7pPr marL="2743200" indent="0">
-              <a:buNone/>
-              <a:defRPr sz="900"/>
-            </a:lvl7pPr>
-            <a:lvl8pPr marL="3200400" indent="0">
-              <a:buNone/>
-              <a:defRPr sz="900"/>
-            </a:lvl8pPr>
-            <a:lvl9pPr marL="3657600" indent="0">
-              <a:buNone/>
-              <a:defRPr sz="900"/>
-            </a:lvl9pPr>
-          </a:lstStyle>
-          <a:p>
-            <a:pPr lvl="0"/>
-            <a:r>
-              <a:rPr lang="en-US" smtClean="0"/>
-              <a:t>Click to edit Master text styles</a:t>
-            </a:r>
+            <a:endParaRPr kumimoji="0" lang="en-US"/>
           </a:p>
         </p:txBody>
       </p:sp>
@@ -2259,11 +2734,13 @@
         <p:spPr/>
         <p:txBody>
           <a:bodyPr/>
-          <a:lstStyle/>
+          <a:lstStyle>
+            <a:extLst/>
+          </a:lstStyle>
           <a:p>
             <a:fld id="{5BCAD085-E8A6-8845-BD4E-CB4CCA059FC4}" type="datetimeFigureOut">
               <a:rPr lang="en-US" smtClean="0"/>
-              <a:t>1/27/13</a:t>
+              <a:t>9/18/2026</a:t>
             </a:fld>
             <a:endParaRPr lang="en-US"/>
           </a:p>
@@ -2282,7 +2759,9 @@
         <p:spPr/>
         <p:txBody>
           <a:bodyPr/>
-          <a:lstStyle/>
+          <a:lstStyle>
+            <a:extLst/>
+          </a:lstStyle>
           <a:p>
             <a:endParaRPr lang="en-US"/>
           </a:p>
@@ -2301,7 +2780,9 @@
         <p:spPr/>
         <p:txBody>
           <a:bodyPr/>
-          <a:lstStyle/>
+          <a:lstStyle>
+            <a:extLst/>
+          </a:lstStyle>
           <a:p>
             <a:fld id="{C1FF6DA9-008F-8B48-92A6-B652298478BF}" type="slidenum">
               <a:rPr lang="en-US" smtClean="0"/>
@@ -2312,11 +2793,6 @@
         </p:txBody>
       </p:sp>
     </p:spTree>
-    <p:extLst>
-      <p:ext uri="{BB962C8B-B14F-4D97-AF65-F5344CB8AC3E}">
-        <p14:creationId xmlns:p14="http://schemas.microsoft.com/office/powerpoint/2010/main" val="1840726560"/>
-      </p:ext>
-    </p:extLst>
   </p:cSld>
   <p:clrMapOvr>
     <a:masterClrMapping/>
@@ -2325,7 +2801,7 @@
 </file>
 
 <file path=ppt/slideLayouts/slideLayout9.xml><?xml version="1.0" encoding="utf-8"?>
-<p:sldLayout xmlns:a="http://schemas.openxmlformats.org/drawingml/2006/main" xmlns:r="http://schemas.openxmlformats.org/officeDocument/2006/relationships" xmlns:p="http://schemas.openxmlformats.org/presentationml/2006/main" type="picTx" preserve="1">
+<p:sldLayout xmlns:a="http://schemas.openxmlformats.org/drawingml/2006/main" xmlns:r="http://schemas.openxmlformats.org/officeDocument/2006/relationships" xmlns:p="http://schemas.openxmlformats.org/presentationml/2006/main" showMasterSp="0" type="picTx" preserve="1">
   <p:cSld name="Picture with Caption">
     <p:spTree>
       <p:nvGrpSpPr>
@@ -2353,23 +2829,176 @@
         </p:nvSpPr>
         <p:spPr>
           <a:xfrm>
-            <a:off x="1792288" y="4800600"/>
-            <a:ext cx="5486400" cy="566738"/>
+            <a:off x="7849195" y="1066800"/>
+            <a:ext cx="3657600" cy="1981200"/>
           </a:xfrm>
         </p:spPr>
         <p:txBody>
-          <a:bodyPr anchor="b"/>
+          <a:bodyPr anchor="b">
+            <a:noAutofit/>
+          </a:bodyPr>
           <a:lstStyle>
             <a:lvl1pPr algn="l">
-              <a:defRPr sz="2000" b="1"/>
+              <a:buNone/>
+              <a:defRPr sz="2100" b="1">
+                <a:effectLst/>
+              </a:defRPr>
             </a:lvl1pPr>
-          </a:lstStyle>
-          <a:p>
-            <a:r>
+            <a:extLst/>
+          </a:lstStyle>
+          <a:p>
+            <a:r>
+              <a:rPr kumimoji="0" lang="en-US" smtClean="0"/>
+              <a:t>Click to edit Master title style</a:t>
+            </a:r>
+            <a:endParaRPr kumimoji="0" lang="en-US"/>
+          </a:p>
+        </p:txBody>
+      </p:sp>
+      <p:sp>
+        <p:nvSpPr>
+          <p:cNvPr id="5" name="Date Placeholder 4"/>
+          <p:cNvSpPr>
+            <a:spLocks noGrp="1"/>
+          </p:cNvSpPr>
+          <p:nvPr>
+            <p:ph type="dt" sz="half" idx="10"/>
+          </p:nvPr>
+        </p:nvSpPr>
+        <p:spPr/>
+        <p:txBody>
+          <a:bodyPr/>
+          <a:lstStyle>
+            <a:extLst/>
+          </a:lstStyle>
+          <a:p>
+            <a:fld id="{5BCAD085-E8A6-8845-BD4E-CB4CCA059FC4}" type="datetimeFigureOut">
               <a:rPr lang="en-US" smtClean="0"/>
-              <a:t>Click to edit Master title style</a:t>
-            </a:r>
+              <a:t>9/18/2026</a:t>
+            </a:fld>
             <a:endParaRPr lang="en-US"/>
+          </a:p>
+        </p:txBody>
+      </p:sp>
+      <p:sp>
+        <p:nvSpPr>
+          <p:cNvPr id="6" name="Footer Placeholder 5"/>
+          <p:cNvSpPr>
+            <a:spLocks noGrp="1"/>
+          </p:cNvSpPr>
+          <p:nvPr>
+            <p:ph type="ftr" sz="quarter" idx="11"/>
+          </p:nvPr>
+        </p:nvSpPr>
+        <p:spPr/>
+        <p:txBody>
+          <a:bodyPr/>
+          <a:lstStyle>
+            <a:extLst/>
+          </a:lstStyle>
+          <a:p>
+            <a:endParaRPr lang="en-US"/>
+          </a:p>
+        </p:txBody>
+      </p:sp>
+      <p:sp>
+        <p:nvSpPr>
+          <p:cNvPr id="7" name="Slide Number Placeholder 6"/>
+          <p:cNvSpPr>
+            <a:spLocks noGrp="1"/>
+          </p:cNvSpPr>
+          <p:nvPr>
+            <p:ph type="sldNum" sz="quarter" idx="12"/>
+          </p:nvPr>
+        </p:nvSpPr>
+        <p:spPr/>
+        <p:txBody>
+          <a:bodyPr/>
+          <a:lstStyle>
+            <a:extLst/>
+          </a:lstStyle>
+          <a:p>
+            <a:fld id="{C1FF6DA9-008F-8B48-92A6-B652298478BF}" type="slidenum">
+              <a:rPr lang="en-US" smtClean="0"/>
+              <a:t>‹#›</a:t>
+            </a:fld>
+            <a:endParaRPr lang="en-US"/>
+          </a:p>
+        </p:txBody>
+      </p:sp>
+      <p:sp>
+        <p:nvSpPr>
+          <p:cNvPr id="8" name="Rectangle 7"/>
+          <p:cNvSpPr/>
+          <p:nvPr/>
+        </p:nvSpPr>
+        <p:spPr>
+          <a:xfrm>
+            <a:off x="1016000" y="1066800"/>
+            <a:ext cx="6096000" cy="4572000"/>
+          </a:xfrm>
+          <a:prstGeom prst="rect">
+            <a:avLst/>
+          </a:prstGeom>
+          <a:solidFill>
+            <a:srgbClr val="FFFFFF"/>
+          </a:solidFill>
+          <a:ln w="88900" cap="sq">
+            <a:solidFill>
+              <a:srgbClr val="FFFFFF"/>
+            </a:solidFill>
+            <a:miter lim="800000"/>
+          </a:ln>
+          <a:effectLst>
+            <a:outerShdw blurRad="55500" dist="18500" dir="5400000" algn="tl" rotWithShape="0">
+              <a:srgbClr val="000000">
+                <a:alpha val="35000"/>
+              </a:srgbClr>
+            </a:outerShdw>
+          </a:effectLst>
+          <a:scene3d>
+            <a:camera prst="orthographicFront"/>
+            <a:lightRig rig="twoPt" dir="t">
+              <a:rot lat="0" lon="0" rev="7200000"/>
+            </a:lightRig>
+          </a:scene3d>
+          <a:sp3d contourW="635">
+            <a:bevelT w="25400" h="19050"/>
+            <a:contourClr>
+              <a:srgbClr val="969696"/>
+            </a:contourClr>
+          </a:sp3d>
+        </p:spPr>
+        <p:txBody>
+          <a:bodyPr lIns="91440" tIns="274320" rtlCol="0" anchor="t">
+            <a:normAutofit/>
+          </a:bodyPr>
+          <a:lstStyle>
+            <a:extLst/>
+          </a:lstStyle>
+          <a:p>
+            <a:pPr marL="0" indent="-283464" algn="l" rtl="0" eaLnBrk="1" latinLnBrk="0" hangingPunct="1">
+              <a:lnSpc>
+                <a:spcPts val="3000"/>
+              </a:lnSpc>
+              <a:spcBef>
+                <a:spcPts val="600"/>
+              </a:spcBef>
+              <a:buClr>
+                <a:schemeClr val="accent1"/>
+              </a:buClr>
+              <a:buSzPct val="80000"/>
+              <a:buFont typeface="Wingdings 2"/>
+              <a:buNone/>
+            </a:pPr>
+            <a:endParaRPr kumimoji="0" lang="en-US" sz="3200" kern="1200">
+              <a:solidFill>
+                <a:schemeClr val="tx1"/>
+              </a:solidFill>
+              <a:latin typeface="+mn-lt"/>
+              <a:ea typeface="+mn-ea"/>
+              <a:cs typeface="+mn-cs"/>
+            </a:endParaRPr>
           </a:p>
         </p:txBody>
       </p:sp>
@@ -2385,52 +3014,161 @@
         </p:nvSpPr>
         <p:spPr>
           <a:xfrm>
-            <a:off x="1792288" y="612775"/>
-            <a:ext cx="5486400" cy="4114800"/>
+            <a:off x="1117600" y="1143004"/>
+            <a:ext cx="5892800" cy="3514531"/>
           </a:xfrm>
+          <a:prstGeom prst="roundRect">
+            <a:avLst>
+              <a:gd name="adj" fmla="val 783"/>
+            </a:avLst>
+          </a:prstGeom>
+          <a:solidFill>
+            <a:schemeClr val="bg2"/>
+          </a:solidFill>
+          <a:ln w="127000">
+            <a:noFill/>
+            <a:miter lim="800000"/>
+          </a:ln>
+          <a:effectLst/>
         </p:spPr>
         <p:txBody>
-          <a:bodyPr/>
-          <a:lstStyle>
-            <a:lvl1pPr marL="0" indent="0">
+          <a:bodyPr lIns="91440" tIns="274320" anchor="t"/>
+          <a:lstStyle>
+            <a:lvl1pPr indent="0">
               <a:buNone/>
               <a:defRPr sz="3200"/>
             </a:lvl1pPr>
-            <a:lvl2pPr marL="457200" indent="0">
-              <a:buNone/>
-              <a:defRPr sz="2800"/>
-            </a:lvl2pPr>
-            <a:lvl3pPr marL="914400" indent="0">
-              <a:buNone/>
-              <a:defRPr sz="2400"/>
-            </a:lvl3pPr>
-            <a:lvl4pPr marL="1371600" indent="0">
-              <a:buNone/>
-              <a:defRPr sz="2000"/>
-            </a:lvl4pPr>
-            <a:lvl5pPr marL="1828800" indent="0">
-              <a:buNone/>
-              <a:defRPr sz="2000"/>
-            </a:lvl5pPr>
-            <a:lvl6pPr marL="2286000" indent="0">
-              <a:buNone/>
-              <a:defRPr sz="2000"/>
-            </a:lvl6pPr>
-            <a:lvl7pPr marL="2743200" indent="0">
-              <a:buNone/>
-              <a:defRPr sz="2000"/>
-            </a:lvl7pPr>
-            <a:lvl8pPr marL="3200400" indent="0">
-              <a:buNone/>
-              <a:defRPr sz="2000"/>
-            </a:lvl8pPr>
-            <a:lvl9pPr marL="3657600" indent="0">
-              <a:buNone/>
-              <a:defRPr sz="2000"/>
-            </a:lvl9pPr>
-          </a:lstStyle>
-          <a:p>
-            <a:endParaRPr lang="en-US"/>
+            <a:extLst/>
+          </a:lstStyle>
+          <a:p>
+            <a:pPr marL="0" algn="l" eaLnBrk="1" latinLnBrk="0" hangingPunct="1"/>
+            <a:r>
+              <a:rPr kumimoji="0" lang="en-US" smtClean="0"/>
+              <a:t>Click icon to add picture</a:t>
+            </a:r>
+            <a:endParaRPr kumimoji="0" lang="en-US" dirty="0"/>
+          </a:p>
+        </p:txBody>
+      </p:sp>
+      <p:sp>
+        <p:nvSpPr>
+          <p:cNvPr id="9" name="Flowchart: Process 8"/>
+          <p:cNvSpPr/>
+          <p:nvPr/>
+        </p:nvSpPr>
+        <p:spPr>
+          <a:xfrm rot="19468671">
+            <a:off x="528967" y="954341"/>
+            <a:ext cx="914400" cy="204310"/>
+          </a:xfrm>
+          <a:prstGeom prst="flowChartProcess">
+            <a:avLst/>
+          </a:prstGeom>
+          <a:solidFill>
+            <a:srgbClr val="FBFBFB">
+              <a:alpha val="45098"/>
+            </a:srgbClr>
+          </a:solidFill>
+          <a:ln w="6350" cap="rnd" cmpd="sng" algn="ctr">
+            <a:solidFill>
+              <a:srgbClr val="FFFFFF">
+                <a:alpha val="100000"/>
+              </a:srgbClr>
+            </a:solidFill>
+            <a:prstDash val="solid"/>
+          </a:ln>
+          <a:effectLst>
+            <a:outerShdw blurRad="25400" dist="25400" dir="3300000" sx="96000" sy="96000" algn="tl" rotWithShape="0">
+              <a:schemeClr val="bg2">
+                <a:shade val="90000"/>
+                <a:satMod val="200000"/>
+                <a:alpha val="40000"/>
+              </a:schemeClr>
+            </a:outerShdw>
+          </a:effectLst>
+        </p:spPr>
+        <p:style>
+          <a:lnRef idx="3">
+            <a:schemeClr val="lt1"/>
+          </a:lnRef>
+          <a:fillRef idx="1">
+            <a:schemeClr val="accent1"/>
+          </a:fillRef>
+          <a:effectRef idx="1">
+            <a:schemeClr val="accent1"/>
+          </a:effectRef>
+          <a:fontRef idx="minor">
+            <a:schemeClr val="lt1"/>
+          </a:fontRef>
+        </p:style>
+        <p:txBody>
+          <a:bodyPr anchor="ctr"/>
+          <a:lstStyle>
+            <a:extLst/>
+          </a:lstStyle>
+          <a:p>
+            <a:pPr algn="ctr" eaLnBrk="1" latinLnBrk="0" hangingPunct="1"/>
+            <a:endParaRPr kumimoji="0" lang="en-US"/>
+          </a:p>
+        </p:txBody>
+      </p:sp>
+      <p:sp>
+        <p:nvSpPr>
+          <p:cNvPr id="10" name="Flowchart: Process 9"/>
+          <p:cNvSpPr/>
+          <p:nvPr/>
+        </p:nvSpPr>
+        <p:spPr>
+          <a:xfrm rot="2103354" flipH="1">
+            <a:off x="6671556" y="936786"/>
+            <a:ext cx="865632" cy="204310"/>
+          </a:xfrm>
+          <a:prstGeom prst="flowChartProcess">
+            <a:avLst/>
+          </a:prstGeom>
+          <a:solidFill>
+            <a:srgbClr val="FBFBFB">
+              <a:alpha val="45098"/>
+            </a:srgbClr>
+          </a:solidFill>
+          <a:ln w="6350" cap="rnd" cmpd="sng" algn="ctr">
+            <a:solidFill>
+              <a:srgbClr val="FFFFFF">
+                <a:alpha val="100000"/>
+              </a:srgbClr>
+            </a:solidFill>
+            <a:prstDash val="solid"/>
+          </a:ln>
+          <a:effectLst>
+            <a:outerShdw blurRad="25400" dist="25400" dir="3300000" sx="96000" sy="96000" algn="tl" rotWithShape="0">
+              <a:schemeClr val="bg2">
+                <a:alpha val="20000"/>
+              </a:schemeClr>
+            </a:outerShdw>
+          </a:effectLst>
+        </p:spPr>
+        <p:style>
+          <a:lnRef idx="3">
+            <a:schemeClr val="lt1"/>
+          </a:lnRef>
+          <a:fillRef idx="1">
+            <a:schemeClr val="accent1"/>
+          </a:fillRef>
+          <a:effectRef idx="1">
+            <a:schemeClr val="accent1"/>
+          </a:effectRef>
+          <a:fontRef idx="minor">
+            <a:schemeClr val="lt1"/>
+          </a:fontRef>
+        </p:style>
+        <p:txBody>
+          <a:bodyPr anchor="ctr"/>
+          <a:lstStyle>
+            <a:extLst/>
+          </a:lstStyle>
+          <a:p>
+            <a:pPr algn="ctr" eaLnBrk="1" latinLnBrk="0" hangingPunct="1"/>
+            <a:endParaRPr kumimoji="0" lang="en-US" dirty="0"/>
           </a:p>
         </p:txBody>
       </p:sp>
@@ -2446,130 +3184,51 @@
         </p:nvSpPr>
         <p:spPr>
           <a:xfrm>
-            <a:off x="1792288" y="5367338"/>
-            <a:ext cx="5486400" cy="804862"/>
+            <a:off x="1117600" y="4800600"/>
+            <a:ext cx="5892800" cy="762000"/>
           </a:xfrm>
         </p:spPr>
         <p:txBody>
-          <a:bodyPr/>
-          <a:lstStyle>
-            <a:lvl1pPr marL="0" indent="0">
+          <a:bodyPr anchor="ctr"/>
+          <a:lstStyle>
+            <a:lvl1pPr marL="0" indent="0" algn="l">
+              <a:lnSpc>
+                <a:spcPts val="1600"/>
+              </a:lnSpc>
+              <a:spcBef>
+                <a:spcPts val="0"/>
+              </a:spcBef>
               <a:buNone/>
-              <a:defRPr sz="1400"/>
+              <a:defRPr sz="1400">
+                <a:solidFill>
+                  <a:srgbClr val="777777"/>
+                </a:solidFill>
+              </a:defRPr>
             </a:lvl1pPr>
-            <a:lvl2pPr marL="457200" indent="0">
-              <a:buNone/>
+            <a:lvl2pPr>
               <a:defRPr sz="1200"/>
             </a:lvl2pPr>
-            <a:lvl3pPr marL="914400" indent="0">
-              <a:buNone/>
+            <a:lvl3pPr>
               <a:defRPr sz="1000"/>
             </a:lvl3pPr>
-            <a:lvl4pPr marL="1371600" indent="0">
-              <a:buNone/>
+            <a:lvl4pPr>
               <a:defRPr sz="900"/>
             </a:lvl4pPr>
-            <a:lvl5pPr marL="1828800" indent="0">
-              <a:buNone/>
+            <a:lvl5pPr>
               <a:defRPr sz="900"/>
             </a:lvl5pPr>
-            <a:lvl6pPr marL="2286000" indent="0">
-              <a:buNone/>
-              <a:defRPr sz="900"/>
-            </a:lvl6pPr>
-            <a:lvl7pPr marL="2743200" indent="0">
-              <a:buNone/>
-              <a:defRPr sz="900"/>
-            </a:lvl7pPr>
-            <a:lvl8pPr marL="3200400" indent="0">
-              <a:buNone/>
-              <a:defRPr sz="900"/>
-            </a:lvl8pPr>
-            <a:lvl9pPr marL="3657600" indent="0">
-              <a:buNone/>
-              <a:defRPr sz="900"/>
-            </a:lvl9pPr>
-          </a:lstStyle>
-          <a:p>
-            <a:pPr lvl="0"/>
-            <a:r>
-              <a:rPr lang="en-US" smtClean="0"/>
+            <a:extLst/>
+          </a:lstStyle>
+          <a:p>
+            <a:pPr lvl="0" eaLnBrk="1" latinLnBrk="0" hangingPunct="1"/>
+            <a:r>
+              <a:rPr kumimoji="0" lang="en-US" smtClean="0"/>
               <a:t>Click to edit Master text styles</a:t>
             </a:r>
           </a:p>
         </p:txBody>
       </p:sp>
-      <p:sp>
-        <p:nvSpPr>
-          <p:cNvPr id="5" name="Date Placeholder 4"/>
-          <p:cNvSpPr>
-            <a:spLocks noGrp="1"/>
-          </p:cNvSpPr>
-          <p:nvPr>
-            <p:ph type="dt" sz="half" idx="10"/>
-          </p:nvPr>
-        </p:nvSpPr>
-        <p:spPr/>
-        <p:txBody>
-          <a:bodyPr/>
-          <a:lstStyle/>
-          <a:p>
-            <a:fld id="{5BCAD085-E8A6-8845-BD4E-CB4CCA059FC4}" type="datetimeFigureOut">
-              <a:rPr lang="en-US" smtClean="0"/>
-              <a:t>1/27/13</a:t>
-            </a:fld>
-            <a:endParaRPr lang="en-US"/>
-          </a:p>
-        </p:txBody>
-      </p:sp>
-      <p:sp>
-        <p:nvSpPr>
-          <p:cNvPr id="6" name="Footer Placeholder 5"/>
-          <p:cNvSpPr>
-            <a:spLocks noGrp="1"/>
-          </p:cNvSpPr>
-          <p:nvPr>
-            <p:ph type="ftr" sz="quarter" idx="11"/>
-          </p:nvPr>
-        </p:nvSpPr>
-        <p:spPr/>
-        <p:txBody>
-          <a:bodyPr/>
-          <a:lstStyle/>
-          <a:p>
-            <a:endParaRPr lang="en-US"/>
-          </a:p>
-        </p:txBody>
-      </p:sp>
-      <p:sp>
-        <p:nvSpPr>
-          <p:cNvPr id="7" name="Slide Number Placeholder 6"/>
-          <p:cNvSpPr>
-            <a:spLocks noGrp="1"/>
-          </p:cNvSpPr>
-          <p:nvPr>
-            <p:ph type="sldNum" sz="quarter" idx="12"/>
-          </p:nvPr>
-        </p:nvSpPr>
-        <p:spPr/>
-        <p:txBody>
-          <a:bodyPr/>
-          <a:lstStyle/>
-          <a:p>
-            <a:fld id="{C1FF6DA9-008F-8B48-92A6-B652298478BF}" type="slidenum">
-              <a:rPr lang="en-US" smtClean="0"/>
-              <a:t>‹#›</a:t>
-            </a:fld>
-            <a:endParaRPr lang="en-US"/>
-          </a:p>
-        </p:txBody>
-      </p:sp>
     </p:spTree>
-    <p:extLst>
-      <p:ext uri="{BB962C8B-B14F-4D97-AF65-F5344CB8AC3E}">
-        <p14:creationId xmlns:p14="http://schemas.microsoft.com/office/powerpoint/2010/main" val="3889236939"/>
-      </p:ext>
-    </p:extLst>
   </p:cSld>
   <p:clrMapOvr>
     <a:masterClrMapping/>
@@ -2581,8 +3240,8 @@
 <p:sldMaster xmlns:a="http://schemas.openxmlformats.org/drawingml/2006/main" xmlns:r="http://schemas.openxmlformats.org/officeDocument/2006/relationships" xmlns:p="http://schemas.openxmlformats.org/presentationml/2006/main">
   <p:cSld>
     <p:bg>
-      <p:bgRef idx="1001">
-        <a:schemeClr val="bg1"/>
+      <p:bgRef idx="1003">
+        <a:schemeClr val="bg2"/>
       </p:bgRef>
     </p:bg>
     <p:spTree>
@@ -2601,7 +3260,268 @@
       </p:grpSpPr>
       <p:sp>
         <p:nvSpPr>
-          <p:cNvPr id="2" name="Title Placeholder 1"/>
+          <p:cNvPr id="7" name="Pie 6"/>
+          <p:cNvSpPr/>
+          <p:nvPr/>
+        </p:nvSpPr>
+        <p:spPr>
+          <a:xfrm>
+            <a:off x="-1087902" y="-815922"/>
+            <a:ext cx="2185183" cy="1638887"/>
+          </a:xfrm>
+          <a:prstGeom prst="pie">
+            <a:avLst>
+              <a:gd name="adj1" fmla="val 0"/>
+              <a:gd name="adj2" fmla="val 5402120"/>
+            </a:avLst>
+          </a:prstGeom>
+          <a:solidFill>
+            <a:schemeClr val="bg2">
+              <a:tint val="18000"/>
+              <a:satMod val="220000"/>
+              <a:alpha val="33000"/>
+            </a:schemeClr>
+          </a:solidFill>
+          <a:ln w="3175" cap="rnd" cmpd="sng" algn="ctr">
+            <a:solidFill>
+              <a:schemeClr val="bg2">
+                <a:shade val="70000"/>
+                <a:satMod val="200000"/>
+                <a:alpha val="100000"/>
+              </a:schemeClr>
+            </a:solidFill>
+            <a:prstDash val="solid"/>
+          </a:ln>
+          <a:effectLst/>
+        </p:spPr>
+        <p:style>
+          <a:lnRef idx="3">
+            <a:schemeClr val="lt1"/>
+          </a:lnRef>
+          <a:fillRef idx="1">
+            <a:schemeClr val="accent1"/>
+          </a:fillRef>
+          <a:effectRef idx="1">
+            <a:schemeClr val="accent1"/>
+          </a:effectRef>
+          <a:fontRef idx="minor">
+            <a:schemeClr val="lt1"/>
+          </a:fontRef>
+        </p:style>
+        <p:txBody>
+          <a:bodyPr anchor="ctr"/>
+          <a:lstStyle>
+            <a:extLst/>
+          </a:lstStyle>
+          <a:p>
+            <a:pPr algn="ctr" eaLnBrk="1" latinLnBrk="0" hangingPunct="1"/>
+            <a:endParaRPr kumimoji="0" lang="en-US"/>
+          </a:p>
+        </p:txBody>
+      </p:sp>
+      <p:sp>
+        <p:nvSpPr>
+          <p:cNvPr id="8" name="Oval 7"/>
+          <p:cNvSpPr/>
+          <p:nvPr/>
+        </p:nvSpPr>
+        <p:spPr>
+          <a:xfrm>
+            <a:off x="225089" y="21103"/>
+            <a:ext cx="2269588" cy="1702191"/>
+          </a:xfrm>
+          <a:prstGeom prst="ellipse">
+            <a:avLst/>
+          </a:prstGeom>
+          <a:noFill/>
+          <a:ln w="27305" cap="rnd" cmpd="sng" algn="ctr">
+            <a:solidFill>
+              <a:schemeClr val="bg2">
+                <a:tint val="45000"/>
+                <a:satMod val="325000"/>
+                <a:alpha val="100000"/>
+              </a:schemeClr>
+            </a:solidFill>
+            <a:prstDash val="solid"/>
+          </a:ln>
+          <a:effectLst>
+            <a:outerShdw blurRad="25400" dist="25400" dir="5400000" algn="tl" rotWithShape="0">
+              <a:schemeClr val="bg2">
+                <a:shade val="50000"/>
+                <a:satMod val="150000"/>
+                <a:alpha val="85000"/>
+              </a:schemeClr>
+            </a:outerShdw>
+          </a:effectLst>
+        </p:spPr>
+        <p:style>
+          <a:lnRef idx="3">
+            <a:schemeClr val="lt1"/>
+          </a:lnRef>
+          <a:fillRef idx="1">
+            <a:schemeClr val="accent1"/>
+          </a:fillRef>
+          <a:effectRef idx="1">
+            <a:schemeClr val="accent1"/>
+          </a:effectRef>
+          <a:fontRef idx="minor">
+            <a:schemeClr val="lt1"/>
+          </a:fontRef>
+        </p:style>
+        <p:txBody>
+          <a:bodyPr anchor="ctr"/>
+          <a:lstStyle>
+            <a:extLst/>
+          </a:lstStyle>
+          <a:p>
+            <a:pPr algn="ctr" eaLnBrk="1" latinLnBrk="0" hangingPunct="1"/>
+            <a:endParaRPr kumimoji="0" lang="en-US"/>
+          </a:p>
+        </p:txBody>
+      </p:sp>
+      <p:sp>
+        <p:nvSpPr>
+          <p:cNvPr id="11" name="Donut 10"/>
+          <p:cNvSpPr/>
+          <p:nvPr/>
+        </p:nvSpPr>
+        <p:spPr>
+          <a:xfrm rot="2315675">
+            <a:off x="243842" y="1055077"/>
+            <a:ext cx="1500956" cy="1102624"/>
+          </a:xfrm>
+          <a:prstGeom prst="donut">
+            <a:avLst>
+              <a:gd name="adj" fmla="val 11833"/>
+            </a:avLst>
+          </a:prstGeom>
+          <a:gradFill rotWithShape="1">
+            <a:gsLst>
+              <a:gs pos="0">
+                <a:schemeClr val="bg2">
+                  <a:tint val="10000"/>
+                  <a:shade val="99000"/>
+                  <a:satMod val="355000"/>
+                  <a:alpha val="70000"/>
+                </a:schemeClr>
+              </a:gs>
+              <a:gs pos="70000">
+                <a:schemeClr val="bg2">
+                  <a:tint val="6000"/>
+                  <a:shade val="100000"/>
+                  <a:satMod val="400000"/>
+                  <a:alpha val="55000"/>
+                </a:schemeClr>
+              </a:gs>
+              <a:gs pos="100000">
+                <a:schemeClr val="bg2">
+                  <a:tint val="100000"/>
+                  <a:shade val="75000"/>
+                  <a:satMod val="370000"/>
+                  <a:alpha val="60000"/>
+                </a:schemeClr>
+              </a:gs>
+            </a:gsLst>
+            <a:path path="circle">
+              <a:fillToRect l="-407500" t="-50000" r="507500" b="150000"/>
+            </a:path>
+          </a:gradFill>
+          <a:ln w="7350" cap="rnd" cmpd="sng" algn="ctr">
+            <a:solidFill>
+              <a:schemeClr val="bg2">
+                <a:shade val="60000"/>
+                <a:satMod val="220000"/>
+                <a:alpha val="100000"/>
+              </a:schemeClr>
+            </a:solidFill>
+            <a:prstDash val="solid"/>
+          </a:ln>
+          <a:effectLst>
+            <a:outerShdw blurRad="12700" dist="15000" dir="4500000" algn="tl" rotWithShape="0">
+              <a:schemeClr val="bg2">
+                <a:shade val="10000"/>
+                <a:satMod val="200000"/>
+                <a:alpha val="35000"/>
+              </a:schemeClr>
+            </a:outerShdw>
+          </a:effectLst>
+        </p:spPr>
+        <p:style>
+          <a:lnRef idx="3">
+            <a:schemeClr val="lt1"/>
+          </a:lnRef>
+          <a:fillRef idx="1">
+            <a:schemeClr val="accent1"/>
+          </a:fillRef>
+          <a:effectRef idx="1">
+            <a:schemeClr val="accent1"/>
+          </a:effectRef>
+          <a:fontRef idx="minor">
+            <a:schemeClr val="lt1"/>
+          </a:fontRef>
+        </p:style>
+        <p:txBody>
+          <a:bodyPr anchor="ctr"/>
+          <a:lstStyle>
+            <a:extLst/>
+          </a:lstStyle>
+          <a:p>
+            <a:pPr algn="ctr" eaLnBrk="1" latinLnBrk="0" hangingPunct="1"/>
+            <a:endParaRPr kumimoji="0" lang="en-US"/>
+          </a:p>
+        </p:txBody>
+      </p:sp>
+      <p:sp>
+        <p:nvSpPr>
+          <p:cNvPr id="12" name="Rectangle 11"/>
+          <p:cNvSpPr/>
+          <p:nvPr/>
+        </p:nvSpPr>
+        <p:spPr>
+          <a:xfrm>
+            <a:off x="1350498" y="-54"/>
+            <a:ext cx="10841503" cy="6858054"/>
+          </a:xfrm>
+          <a:prstGeom prst="rect">
+            <a:avLst/>
+          </a:prstGeom>
+          <a:solidFill>
+            <a:schemeClr val="bg1"/>
+          </a:solidFill>
+          <a:ln w="25400" cap="rnd" cmpd="sng" algn="ctr">
+            <a:noFill/>
+            <a:prstDash val="solid"/>
+          </a:ln>
+          <a:effectLst/>
+        </p:spPr>
+        <p:style>
+          <a:lnRef idx="3">
+            <a:schemeClr val="lt1"/>
+          </a:lnRef>
+          <a:fillRef idx="1">
+            <a:schemeClr val="accent1"/>
+          </a:fillRef>
+          <a:effectRef idx="1">
+            <a:schemeClr val="accent1"/>
+          </a:effectRef>
+          <a:fontRef idx="minor">
+            <a:schemeClr val="lt1"/>
+          </a:fontRef>
+        </p:style>
+        <p:txBody>
+          <a:bodyPr anchor="ctr"/>
+          <a:lstStyle>
+            <a:extLst/>
+          </a:lstStyle>
+          <a:p>
+            <a:pPr algn="ctr" eaLnBrk="1" latinLnBrk="0" hangingPunct="1"/>
+            <a:endParaRPr kumimoji="0" lang="en-US"/>
+          </a:p>
+        </p:txBody>
+      </p:sp>
+      <p:sp>
+        <p:nvSpPr>
+          <p:cNvPr id="5" name="Title Placeholder 4"/>
           <p:cNvSpPr>
             <a:spLocks noGrp="1"/>
           </p:cNvSpPr>
@@ -2611,30 +3531,32 @@
         </p:nvSpPr>
         <p:spPr>
           <a:xfrm>
-            <a:off x="457200" y="274638"/>
-            <a:ext cx="8229600" cy="1143000"/>
+            <a:off x="1914144" y="274638"/>
+            <a:ext cx="9997440" cy="1143000"/>
           </a:xfrm>
           <a:prstGeom prst="rect">
             <a:avLst/>
           </a:prstGeom>
         </p:spPr>
         <p:txBody>
-          <a:bodyPr vert="horz" lIns="91440" tIns="45720" rIns="91440" bIns="45720" rtlCol="0" anchor="ctr">
+          <a:bodyPr anchor="ctr">
             <a:normAutofit/>
           </a:bodyPr>
-          <a:lstStyle/>
-          <a:p>
-            <a:r>
-              <a:rPr lang="en-US" smtClean="0"/>
+          <a:lstStyle>
+            <a:extLst/>
+          </a:lstStyle>
+          <a:p>
+            <a:r>
+              <a:rPr kumimoji="0" lang="en-US" smtClean="0"/>
               <a:t>Click to edit Master title style</a:t>
             </a:r>
-            <a:endParaRPr lang="en-US"/>
-          </a:p>
-        </p:txBody>
-      </p:sp>
-      <p:sp>
-        <p:nvSpPr>
-          <p:cNvPr id="3" name="Text Placeholder 2"/>
+            <a:endParaRPr kumimoji="0" lang="en-US"/>
+          </a:p>
+        </p:txBody>
+      </p:sp>
+      <p:sp>
+        <p:nvSpPr>
+          <p:cNvPr id="9" name="Text Placeholder 8"/>
           <p:cNvSpPr>
             <a:spLocks noGrp="1"/>
           </p:cNvSpPr>
@@ -2644,59 +3566,61 @@
         </p:nvSpPr>
         <p:spPr>
           <a:xfrm>
-            <a:off x="457200" y="1600200"/>
-            <a:ext cx="8229600" cy="4525963"/>
+            <a:off x="1914144" y="1447800"/>
+            <a:ext cx="9997440" cy="4800600"/>
           </a:xfrm>
           <a:prstGeom prst="rect">
             <a:avLst/>
           </a:prstGeom>
         </p:spPr>
         <p:txBody>
-          <a:bodyPr vert="horz" lIns="91440" tIns="45720" rIns="91440" bIns="45720" rtlCol="0">
+          <a:bodyPr>
             <a:normAutofit/>
           </a:bodyPr>
-          <a:lstStyle/>
-          <a:p>
-            <a:pPr lvl="0"/>
-            <a:r>
-              <a:rPr lang="en-US" smtClean="0"/>
+          <a:lstStyle>
+            <a:extLst/>
+          </a:lstStyle>
+          <a:p>
+            <a:pPr lvl="0" eaLnBrk="1" latinLnBrk="0" hangingPunct="1"/>
+            <a:r>
+              <a:rPr kumimoji="0" lang="en-US" smtClean="0"/>
               <a:t>Click to edit Master text styles</a:t>
             </a:r>
           </a:p>
           <a:p>
-            <a:pPr lvl="1"/>
-            <a:r>
-              <a:rPr lang="en-US" smtClean="0"/>
+            <a:pPr lvl="1" eaLnBrk="1" latinLnBrk="0" hangingPunct="1"/>
+            <a:r>
+              <a:rPr kumimoji="0" lang="en-US" smtClean="0"/>
               <a:t>Second level</a:t>
             </a:r>
           </a:p>
           <a:p>
-            <a:pPr lvl="2"/>
-            <a:r>
-              <a:rPr lang="en-US" smtClean="0"/>
+            <a:pPr lvl="2" eaLnBrk="1" latinLnBrk="0" hangingPunct="1"/>
+            <a:r>
+              <a:rPr kumimoji="0" lang="en-US" smtClean="0"/>
               <a:t>Third level</a:t>
             </a:r>
           </a:p>
           <a:p>
-            <a:pPr lvl="3"/>
-            <a:r>
-              <a:rPr lang="en-US" smtClean="0"/>
+            <a:pPr lvl="3" eaLnBrk="1" latinLnBrk="0" hangingPunct="1"/>
+            <a:r>
+              <a:rPr kumimoji="0" lang="en-US" smtClean="0"/>
               <a:t>Fourth level</a:t>
             </a:r>
           </a:p>
           <a:p>
-            <a:pPr lvl="4"/>
-            <a:r>
-              <a:rPr lang="en-US" smtClean="0"/>
+            <a:pPr lvl="4" eaLnBrk="1" latinLnBrk="0" hangingPunct="1"/>
+            <a:r>
+              <a:rPr kumimoji="0" lang="en-US" smtClean="0"/>
               <a:t>Fifth level</a:t>
             </a:r>
-            <a:endParaRPr lang="en-US"/>
-          </a:p>
-        </p:txBody>
-      </p:sp>
-      <p:sp>
-        <p:nvSpPr>
-          <p:cNvPr id="4" name="Date Placeholder 3"/>
+            <a:endParaRPr kumimoji="0" lang="en-US"/>
+          </a:p>
+        </p:txBody>
+      </p:sp>
+      <p:sp>
+        <p:nvSpPr>
+          <p:cNvPr id="24" name="Date Placeholder 23"/>
           <p:cNvSpPr>
             <a:spLocks noGrp="1"/>
           </p:cNvSpPr>
@@ -2706,30 +3630,32 @@
         </p:nvSpPr>
         <p:spPr>
           <a:xfrm>
-            <a:off x="457200" y="6356350"/>
-            <a:ext cx="2133600" cy="365125"/>
+            <a:off x="4775200" y="6305550"/>
+            <a:ext cx="2844800" cy="476250"/>
           </a:xfrm>
           <a:prstGeom prst="rect">
             <a:avLst/>
           </a:prstGeom>
         </p:spPr>
         <p:txBody>
-          <a:bodyPr vert="horz" lIns="91440" tIns="45720" rIns="91440" bIns="45720" rtlCol="0" anchor="ctr"/>
-          <a:lstStyle>
-            <a:lvl1pPr algn="l">
-              <a:defRPr sz="1200">
-                <a:solidFill>
-                  <a:schemeClr val="tx1">
-                    <a:tint val="75000"/>
+          <a:bodyPr anchor="b"/>
+          <a:lstStyle>
+            <a:lvl1pPr algn="r" eaLnBrk="1" latinLnBrk="0" hangingPunct="1">
+              <a:defRPr kumimoji="0" sz="1200">
+                <a:solidFill>
+                  <a:schemeClr val="bg2">
+                    <a:shade val="50000"/>
+                    <a:satMod val="200000"/>
                   </a:schemeClr>
                 </a:solidFill>
               </a:defRPr>
             </a:lvl1pPr>
+            <a:extLst/>
           </a:lstStyle>
           <a:p>
             <a:fld id="{5BCAD085-E8A6-8845-BD4E-CB4CCA059FC4}" type="datetimeFigureOut">
               <a:rPr lang="en-US" smtClean="0"/>
-              <a:t>1/27/13</a:t>
+              <a:t>9/18/2026</a:t>
             </a:fld>
             <a:endParaRPr lang="en-US"/>
           </a:p>
@@ -2737,7 +3663,7 @@
       </p:sp>
       <p:sp>
         <p:nvSpPr>
-          <p:cNvPr id="5" name="Footer Placeholder 4"/>
+          <p:cNvPr id="10" name="Footer Placeholder 9"/>
           <p:cNvSpPr>
             <a:spLocks noGrp="1"/>
           </p:cNvSpPr>
@@ -2747,25 +3673,28 @@
         </p:nvSpPr>
         <p:spPr>
           <a:xfrm>
-            <a:off x="3124200" y="6356350"/>
-            <a:ext cx="2895600" cy="365125"/>
+            <a:off x="7620000" y="6305550"/>
+            <a:ext cx="3860800" cy="476250"/>
           </a:xfrm>
           <a:prstGeom prst="rect">
             <a:avLst/>
           </a:prstGeom>
         </p:spPr>
         <p:txBody>
-          <a:bodyPr vert="horz" lIns="91440" tIns="45720" rIns="91440" bIns="45720" rtlCol="0" anchor="ctr"/>
-          <a:lstStyle>
-            <a:lvl1pPr algn="ctr">
-              <a:defRPr sz="1200">
-                <a:solidFill>
-                  <a:schemeClr val="tx1">
-                    <a:tint val="75000"/>
+          <a:bodyPr anchor="b"/>
+          <a:lstStyle>
+            <a:lvl1pPr eaLnBrk="1" latinLnBrk="0" hangingPunct="1">
+              <a:defRPr kumimoji="0" sz="1200">
+                <a:solidFill>
+                  <a:schemeClr val="bg2">
+                    <a:shade val="50000"/>
+                    <a:satMod val="200000"/>
                   </a:schemeClr>
                 </a:solidFill>
+                <a:effectLst/>
               </a:defRPr>
             </a:lvl1pPr>
+            <a:extLst/>
           </a:lstStyle>
           <a:p>
             <a:endParaRPr lang="en-US"/>
@@ -2774,7 +3703,7 @@
       </p:sp>
       <p:sp>
         <p:nvSpPr>
-          <p:cNvPr id="6" name="Slide Number Placeholder 5"/>
+          <p:cNvPr id="22" name="Slide Number Placeholder 21"/>
           <p:cNvSpPr>
             <a:spLocks noGrp="1"/>
           </p:cNvSpPr>
@@ -2784,25 +3713,28 @@
         </p:nvSpPr>
         <p:spPr>
           <a:xfrm>
-            <a:off x="6553200" y="6356350"/>
-            <a:ext cx="2133600" cy="365125"/>
+            <a:off x="11484864" y="6305550"/>
+            <a:ext cx="609600" cy="476250"/>
           </a:xfrm>
           <a:prstGeom prst="rect">
             <a:avLst/>
           </a:prstGeom>
         </p:spPr>
         <p:txBody>
-          <a:bodyPr vert="horz" lIns="91440" tIns="45720" rIns="91440" bIns="45720" rtlCol="0" anchor="ctr"/>
-          <a:lstStyle>
-            <a:lvl1pPr algn="r">
-              <a:defRPr sz="1200">
-                <a:solidFill>
-                  <a:schemeClr val="tx1">
-                    <a:tint val="75000"/>
+          <a:bodyPr anchor="b"/>
+          <a:lstStyle>
+            <a:lvl1pPr algn="ctr" eaLnBrk="1" latinLnBrk="0" hangingPunct="1">
+              <a:defRPr kumimoji="0" sz="1200">
+                <a:solidFill>
+                  <a:schemeClr val="bg2">
+                    <a:shade val="50000"/>
+                    <a:satMod val="200000"/>
                   </a:schemeClr>
                 </a:solidFill>
+                <a:effectLst/>
               </a:defRPr>
             </a:lvl1pPr>
+            <a:extLst/>
           </a:lstStyle>
           <a:p>
             <a:fld id="{C1FF6DA9-008F-8B48-92A6-B652298478BF}" type="slidenum">
@@ -2813,52 +3745,120 @@
           </a:p>
         </p:txBody>
       </p:sp>
+      <p:sp>
+        <p:nvSpPr>
+          <p:cNvPr id="15" name="Rectangle 14"/>
+          <p:cNvSpPr/>
+          <p:nvPr/>
+        </p:nvSpPr>
+        <p:spPr bwMode="invGray">
+          <a:xfrm>
+            <a:off x="1353312" y="-54"/>
+            <a:ext cx="97536" cy="6858054"/>
+          </a:xfrm>
+          <a:prstGeom prst="rect">
+            <a:avLst/>
+          </a:prstGeom>
+          <a:solidFill>
+            <a:schemeClr val="bg1"/>
+          </a:solidFill>
+          <a:ln w="25400" cap="rnd" cmpd="sng" algn="ctr">
+            <a:noFill/>
+            <a:prstDash val="solid"/>
+          </a:ln>
+          <a:effectLst>
+            <a:outerShdw blurRad="38550" dist="38000" dir="10800000" algn="tl" rotWithShape="0">
+              <a:schemeClr val="bg2">
+                <a:shade val="20000"/>
+                <a:satMod val="110000"/>
+                <a:alpha val="25000"/>
+              </a:schemeClr>
+            </a:outerShdw>
+          </a:effectLst>
+        </p:spPr>
+        <p:style>
+          <a:lnRef idx="3">
+            <a:schemeClr val="lt1"/>
+          </a:lnRef>
+          <a:fillRef idx="1">
+            <a:schemeClr val="accent1"/>
+          </a:fillRef>
+          <a:effectRef idx="1">
+            <a:schemeClr val="accent1"/>
+          </a:effectRef>
+          <a:fontRef idx="minor">
+            <a:schemeClr val="lt1"/>
+          </a:fontRef>
+        </p:style>
+        <p:txBody>
+          <a:bodyPr anchor="ctr"/>
+          <a:lstStyle>
+            <a:extLst/>
+          </a:lstStyle>
+          <a:p>
+            <a:pPr algn="ctr" eaLnBrk="1" latinLnBrk="0" hangingPunct="1"/>
+            <a:endParaRPr kumimoji="0" lang="en-US"/>
+          </a:p>
+        </p:txBody>
+      </p:sp>
     </p:spTree>
-    <p:extLst>
-      <p:ext uri="{BB962C8B-B14F-4D97-AF65-F5344CB8AC3E}">
-        <p14:creationId xmlns:p14="http://schemas.microsoft.com/office/powerpoint/2010/main" val="2209977519"/>
-      </p:ext>
-    </p:extLst>
   </p:cSld>
   <p:clrMap bg1="lt1" tx1="dk1" bg2="lt2" tx2="dk2" accent1="accent1" accent2="accent2" accent3="accent3" accent4="accent4" accent5="accent5" accent6="accent6" hlink="hlink" folHlink="folHlink"/>
   <p:sldLayoutIdLst>
-    <p:sldLayoutId id="2147483649" r:id="rId1"/>
-    <p:sldLayoutId id="2147483650" r:id="rId2"/>
-    <p:sldLayoutId id="2147483651" r:id="rId3"/>
-    <p:sldLayoutId id="2147483652" r:id="rId4"/>
-    <p:sldLayoutId id="2147483653" r:id="rId5"/>
-    <p:sldLayoutId id="2147483654" r:id="rId6"/>
-    <p:sldLayoutId id="2147483655" r:id="rId7"/>
-    <p:sldLayoutId id="2147483656" r:id="rId8"/>
-    <p:sldLayoutId id="2147483657" r:id="rId9"/>
-    <p:sldLayoutId id="2147483658" r:id="rId10"/>
-    <p:sldLayoutId id="2147483659" r:id="rId11"/>
+    <p:sldLayoutId id="2147483721" r:id="rId1"/>
+    <p:sldLayoutId id="2147483722" r:id="rId2"/>
+    <p:sldLayoutId id="2147483723" r:id="rId3"/>
+    <p:sldLayoutId id="2147483724" r:id="rId4"/>
+    <p:sldLayoutId id="2147483725" r:id="rId5"/>
+    <p:sldLayoutId id="2147483726" r:id="rId6"/>
+    <p:sldLayoutId id="2147483727" r:id="rId7"/>
+    <p:sldLayoutId id="2147483728" r:id="rId8"/>
+    <p:sldLayoutId id="2147483729" r:id="rId9"/>
+    <p:sldLayoutId id="2147483730" r:id="rId10"/>
+    <p:sldLayoutId id="2147483731" r:id="rId11"/>
   </p:sldLayoutIdLst>
   <p:txStyles>
     <p:titleStyle>
-      <a:lvl1pPr algn="ctr" defTabSz="457200" rtl="0" eaLnBrk="1" latinLnBrk="0" hangingPunct="1">
+      <a:lvl1pPr algn="l" rtl="0" eaLnBrk="1" latinLnBrk="0" hangingPunct="1">
         <a:spcBef>
           <a:spcPct val="0"/>
         </a:spcBef>
         <a:buNone/>
-        <a:defRPr sz="4400" kern="1200">
+        <a:defRPr kumimoji="0" sz="4300" kern="1200">
           <a:solidFill>
-            <a:schemeClr val="tx1"/>
+            <a:schemeClr val="tx2">
+              <a:satMod val="130000"/>
+            </a:schemeClr>
           </a:solidFill>
+          <a:effectLst>
+            <a:outerShdw blurRad="50000" dist="30000" dir="5400000" algn="tl" rotWithShape="0">
+              <a:srgbClr val="000000">
+                <a:alpha val="30000"/>
+              </a:srgbClr>
+            </a:outerShdw>
+          </a:effectLst>
           <a:latin typeface="+mj-lt"/>
           <a:ea typeface="+mj-ea"/>
           <a:cs typeface="+mj-cs"/>
         </a:defRPr>
       </a:lvl1pPr>
+      <a:extLst/>
     </p:titleStyle>
     <p:bodyStyle>
-      <a:lvl1pPr marL="342900" indent="-342900" algn="l" defTabSz="457200" rtl="0" eaLnBrk="1" latinLnBrk="0" hangingPunct="1">
+      <a:lvl1pPr marL="365760" indent="-283464" algn="l" rtl="0" eaLnBrk="1" latinLnBrk="0" hangingPunct="1">
+        <a:lnSpc>
+          <a:spcPct val="100000"/>
+        </a:lnSpc>
         <a:spcBef>
-          <a:spcPct val="20000"/>
+          <a:spcPts val="600"/>
         </a:spcBef>
-        <a:buFont typeface="Arial"/>
-        <a:buChar char="•"/>
-        <a:defRPr sz="3200" kern="1200">
+        <a:buClr>
+          <a:schemeClr val="accent1"/>
+        </a:buClr>
+        <a:buSzPct val="80000"/>
+        <a:buFont typeface="Wingdings 2"/>
+        <a:buChar char=""/>
+        <a:defRPr kumimoji="0" sz="3200" kern="1200">
           <a:solidFill>
             <a:schemeClr val="tx1"/>
           </a:solidFill>
@@ -2867,13 +3867,19 @@
           <a:cs typeface="+mn-cs"/>
         </a:defRPr>
       </a:lvl1pPr>
-      <a:lvl2pPr marL="742950" indent="-285750" algn="l" defTabSz="457200" rtl="0" eaLnBrk="1" latinLnBrk="0" hangingPunct="1">
+      <a:lvl2pPr marL="640080" indent="-237744" algn="l" rtl="0" eaLnBrk="1" latinLnBrk="0" hangingPunct="1">
+        <a:lnSpc>
+          <a:spcPct val="100000"/>
+        </a:lnSpc>
         <a:spcBef>
-          <a:spcPct val="20000"/>
+          <a:spcPts val="550"/>
         </a:spcBef>
-        <a:buFont typeface="Arial"/>
-        <a:buChar char="–"/>
-        <a:defRPr sz="2800" kern="1200">
+        <a:buClr>
+          <a:schemeClr val="accent1"/>
+        </a:buClr>
+        <a:buFont typeface="Verdana"/>
+        <a:buChar char="◦"/>
+        <a:defRPr kumimoji="0" sz="2800" kern="1200">
           <a:solidFill>
             <a:schemeClr val="tx1"/>
           </a:solidFill>
@@ -2882,13 +3888,19 @@
           <a:cs typeface="+mn-cs"/>
         </a:defRPr>
       </a:lvl2pPr>
-      <a:lvl3pPr marL="1143000" indent="-228600" algn="l" defTabSz="457200" rtl="0" eaLnBrk="1" latinLnBrk="0" hangingPunct="1">
+      <a:lvl3pPr marL="886968" indent="-228600" algn="l" rtl="0" eaLnBrk="1" latinLnBrk="0" hangingPunct="1">
+        <a:lnSpc>
+          <a:spcPct val="100000"/>
+        </a:lnSpc>
         <a:spcBef>
           <a:spcPct val="20000"/>
         </a:spcBef>
-        <a:buFont typeface="Arial"/>
-        <a:buChar char="•"/>
-        <a:defRPr sz="2400" kern="1200">
+        <a:buClr>
+          <a:schemeClr val="accent2"/>
+        </a:buClr>
+        <a:buFont typeface="Wingdings 2"/>
+        <a:buChar char=""/>
+        <a:defRPr kumimoji="0" sz="2400" kern="1200">
           <a:solidFill>
             <a:schemeClr val="tx1"/>
           </a:solidFill>
@@ -2897,13 +3909,19 @@
           <a:cs typeface="+mn-cs"/>
         </a:defRPr>
       </a:lvl3pPr>
-      <a:lvl4pPr marL="1600200" indent="-228600" algn="l" defTabSz="457200" rtl="0" eaLnBrk="1" latinLnBrk="0" hangingPunct="1">
+      <a:lvl4pPr marL="1097280" indent="-173736" algn="l" rtl="0" eaLnBrk="1" latinLnBrk="0" hangingPunct="1">
+        <a:lnSpc>
+          <a:spcPct val="100000"/>
+        </a:lnSpc>
         <a:spcBef>
           <a:spcPct val="20000"/>
         </a:spcBef>
-        <a:buFont typeface="Arial"/>
-        <a:buChar char="–"/>
-        <a:defRPr sz="2000" kern="1200">
+        <a:buClr>
+          <a:schemeClr val="accent3"/>
+        </a:buClr>
+        <a:buFont typeface="Wingdings 2"/>
+        <a:buChar char=""/>
+        <a:defRPr kumimoji="0" sz="2000" kern="1200">
           <a:solidFill>
             <a:schemeClr val="tx1"/>
           </a:solidFill>
@@ -2912,13 +3930,19 @@
           <a:cs typeface="+mn-cs"/>
         </a:defRPr>
       </a:lvl4pPr>
-      <a:lvl5pPr marL="2057400" indent="-228600" algn="l" defTabSz="457200" rtl="0" eaLnBrk="1" latinLnBrk="0" hangingPunct="1">
+      <a:lvl5pPr marL="1298448" indent="-182880" algn="l" rtl="0" eaLnBrk="1" latinLnBrk="0" hangingPunct="1">
+        <a:lnSpc>
+          <a:spcPct val="100000"/>
+        </a:lnSpc>
         <a:spcBef>
           <a:spcPct val="20000"/>
         </a:spcBef>
-        <a:buFont typeface="Arial"/>
-        <a:buChar char="»"/>
-        <a:defRPr sz="2000" kern="1200">
+        <a:buClr>
+          <a:schemeClr val="accent4"/>
+        </a:buClr>
+        <a:buFont typeface="Wingdings 2"/>
+        <a:buChar char=""/>
+        <a:defRPr kumimoji="0" sz="2000" kern="1200">
           <a:solidFill>
             <a:schemeClr val="tx1"/>
           </a:solidFill>
@@ -2927,13 +3951,19 @@
           <a:cs typeface="+mn-cs"/>
         </a:defRPr>
       </a:lvl5pPr>
-      <a:lvl6pPr marL="2514600" indent="-228600" algn="l" defTabSz="457200" rtl="0" eaLnBrk="1" latinLnBrk="0" hangingPunct="1">
+      <a:lvl6pPr marL="1508760" indent="-182880" algn="l" rtl="0" eaLnBrk="1" latinLnBrk="0" hangingPunct="1">
+        <a:lnSpc>
+          <a:spcPct val="100000"/>
+        </a:lnSpc>
         <a:spcBef>
           <a:spcPct val="20000"/>
         </a:spcBef>
-        <a:buFont typeface="Arial"/>
-        <a:buChar char="•"/>
-        <a:defRPr sz="2000" kern="1200">
+        <a:buClr>
+          <a:schemeClr val="accent5"/>
+        </a:buClr>
+        <a:buFont typeface="Wingdings 2"/>
+        <a:buChar char=""/>
+        <a:defRPr kumimoji="0" sz="2000" kern="1200">
           <a:solidFill>
             <a:schemeClr val="tx1"/>
           </a:solidFill>
@@ -2942,13 +3972,19 @@
           <a:cs typeface="+mn-cs"/>
         </a:defRPr>
       </a:lvl6pPr>
-      <a:lvl7pPr marL="2971800" indent="-228600" algn="l" defTabSz="457200" rtl="0" eaLnBrk="1" latinLnBrk="0" hangingPunct="1">
+      <a:lvl7pPr marL="1719072" indent="-182880" algn="l" rtl="0" eaLnBrk="1" latinLnBrk="0" hangingPunct="1">
+        <a:lnSpc>
+          <a:spcPct val="100000"/>
+        </a:lnSpc>
         <a:spcBef>
           <a:spcPct val="20000"/>
         </a:spcBef>
-        <a:buFont typeface="Arial"/>
-        <a:buChar char="•"/>
-        <a:defRPr sz="2000" kern="1200">
+        <a:buClr>
+          <a:schemeClr val="accent6"/>
+        </a:buClr>
+        <a:buFont typeface="Wingdings 2"/>
+        <a:buChar char=""/>
+        <a:defRPr kumimoji="0" sz="2000" kern="1200">
           <a:solidFill>
             <a:schemeClr val="tx1"/>
           </a:solidFill>
@@ -2957,13 +3993,19 @@
           <a:cs typeface="+mn-cs"/>
         </a:defRPr>
       </a:lvl7pPr>
-      <a:lvl8pPr marL="3429000" indent="-228600" algn="l" defTabSz="457200" rtl="0" eaLnBrk="1" latinLnBrk="0" hangingPunct="1">
+      <a:lvl8pPr marL="1920240" indent="-182880" algn="l" rtl="0" eaLnBrk="1" latinLnBrk="0" hangingPunct="1">
+        <a:lnSpc>
+          <a:spcPct val="100000"/>
+        </a:lnSpc>
         <a:spcBef>
           <a:spcPct val="20000"/>
         </a:spcBef>
-        <a:buFont typeface="Arial"/>
-        <a:buChar char="•"/>
-        <a:defRPr sz="2000" kern="1200">
+        <a:buClr>
+          <a:schemeClr val="accent6"/>
+        </a:buClr>
+        <a:buFont typeface="Wingdings 2"/>
+        <a:buChar char=""/>
+        <a:defRPr kumimoji="0" sz="2000" kern="1200">
           <a:solidFill>
             <a:schemeClr val="tx1"/>
           </a:solidFill>
@@ -2972,13 +4014,19 @@
           <a:cs typeface="+mn-cs"/>
         </a:defRPr>
       </a:lvl8pPr>
-      <a:lvl9pPr marL="3886200" indent="-228600" algn="l" defTabSz="457200" rtl="0" eaLnBrk="1" latinLnBrk="0" hangingPunct="1">
+      <a:lvl9pPr marL="2130552" indent="-182880" algn="l" rtl="0" eaLnBrk="1" latinLnBrk="0" hangingPunct="1">
+        <a:lnSpc>
+          <a:spcPct val="100000"/>
+        </a:lnSpc>
         <a:spcBef>
           <a:spcPct val="20000"/>
         </a:spcBef>
-        <a:buFont typeface="Arial"/>
-        <a:buChar char="•"/>
-        <a:defRPr sz="2000" kern="1200">
+        <a:buClr>
+          <a:schemeClr val="accent6"/>
+        </a:buClr>
+        <a:buFont typeface="Wingdings 2"/>
+        <a:buChar char=""/>
+        <a:defRPr kumimoji="0" sz="2000" kern="1200">
           <a:solidFill>
             <a:schemeClr val="tx1"/>
           </a:solidFill>
@@ -2987,13 +4035,11 @@
           <a:cs typeface="+mn-cs"/>
         </a:defRPr>
       </a:lvl9pPr>
+      <a:extLst/>
     </p:bodyStyle>
     <p:otherStyle>
-      <a:defPPr>
-        <a:defRPr lang="en-US"/>
-      </a:defPPr>
-      <a:lvl1pPr marL="0" algn="l" defTabSz="457200" rtl="0" eaLnBrk="1" latinLnBrk="0" hangingPunct="1">
-        <a:defRPr sz="1800" kern="1200">
+      <a:lvl1pPr marL="0" algn="l" rtl="0" eaLnBrk="1" latinLnBrk="0" hangingPunct="1">
+        <a:defRPr kumimoji="0" kern="1200">
           <a:solidFill>
             <a:schemeClr val="tx1"/>
           </a:solidFill>
@@ -3002,8 +4048,8 @@
           <a:cs typeface="+mn-cs"/>
         </a:defRPr>
       </a:lvl1pPr>
-      <a:lvl2pPr marL="457200" algn="l" defTabSz="457200" rtl="0" eaLnBrk="1" latinLnBrk="0" hangingPunct="1">
-        <a:defRPr sz="1800" kern="1200">
+      <a:lvl2pPr marL="457200" algn="l" rtl="0" eaLnBrk="1" latinLnBrk="0" hangingPunct="1">
+        <a:defRPr kumimoji="0" kern="1200">
           <a:solidFill>
             <a:schemeClr val="tx1"/>
           </a:solidFill>
@@ -3012,8 +4058,8 @@
           <a:cs typeface="+mn-cs"/>
         </a:defRPr>
       </a:lvl2pPr>
-      <a:lvl3pPr marL="914400" algn="l" defTabSz="457200" rtl="0" eaLnBrk="1" latinLnBrk="0" hangingPunct="1">
-        <a:defRPr sz="1800" kern="1200">
+      <a:lvl3pPr marL="914400" algn="l" rtl="0" eaLnBrk="1" latinLnBrk="0" hangingPunct="1">
+        <a:defRPr kumimoji="0" kern="1200">
           <a:solidFill>
             <a:schemeClr val="tx1"/>
           </a:solidFill>
@@ -3022,8 +4068,8 @@
           <a:cs typeface="+mn-cs"/>
         </a:defRPr>
       </a:lvl3pPr>
-      <a:lvl4pPr marL="1371600" algn="l" defTabSz="457200" rtl="0" eaLnBrk="1" latinLnBrk="0" hangingPunct="1">
-        <a:defRPr sz="1800" kern="1200">
+      <a:lvl4pPr marL="1371600" algn="l" rtl="0" eaLnBrk="1" latinLnBrk="0" hangingPunct="1">
+        <a:defRPr kumimoji="0" kern="1200">
           <a:solidFill>
             <a:schemeClr val="tx1"/>
           </a:solidFill>
@@ -3032,8 +4078,8 @@
           <a:cs typeface="+mn-cs"/>
         </a:defRPr>
       </a:lvl4pPr>
-      <a:lvl5pPr marL="1828800" algn="l" defTabSz="457200" rtl="0" eaLnBrk="1" latinLnBrk="0" hangingPunct="1">
-        <a:defRPr sz="1800" kern="1200">
+      <a:lvl5pPr marL="1828800" algn="l" rtl="0" eaLnBrk="1" latinLnBrk="0" hangingPunct="1">
+        <a:defRPr kumimoji="0" kern="1200">
           <a:solidFill>
             <a:schemeClr val="tx1"/>
           </a:solidFill>
@@ -3042,8 +4088,8 @@
           <a:cs typeface="+mn-cs"/>
         </a:defRPr>
       </a:lvl5pPr>
-      <a:lvl6pPr marL="2286000" algn="l" defTabSz="457200" rtl="0" eaLnBrk="1" latinLnBrk="0" hangingPunct="1">
-        <a:defRPr sz="1800" kern="1200">
+      <a:lvl6pPr marL="2286000" algn="l" rtl="0" eaLnBrk="1" latinLnBrk="0" hangingPunct="1">
+        <a:defRPr kumimoji="0" kern="1200">
           <a:solidFill>
             <a:schemeClr val="tx1"/>
           </a:solidFill>
@@ -3052,8 +4098,8 @@
           <a:cs typeface="+mn-cs"/>
         </a:defRPr>
       </a:lvl6pPr>
-      <a:lvl7pPr marL="2743200" algn="l" defTabSz="457200" rtl="0" eaLnBrk="1" latinLnBrk="0" hangingPunct="1">
-        <a:defRPr sz="1800" kern="1200">
+      <a:lvl7pPr marL="2743200" algn="l" rtl="0" eaLnBrk="1" latinLnBrk="0" hangingPunct="1">
+        <a:defRPr kumimoji="0" kern="1200">
           <a:solidFill>
             <a:schemeClr val="tx1"/>
           </a:solidFill>
@@ -3062,8 +4108,8 @@
           <a:cs typeface="+mn-cs"/>
         </a:defRPr>
       </a:lvl7pPr>
-      <a:lvl8pPr marL="3200400" algn="l" defTabSz="457200" rtl="0" eaLnBrk="1" latinLnBrk="0" hangingPunct="1">
-        <a:defRPr sz="1800" kern="1200">
+      <a:lvl8pPr marL="3200400" algn="l" rtl="0" eaLnBrk="1" latinLnBrk="0" hangingPunct="1">
+        <a:defRPr kumimoji="0" kern="1200">
           <a:solidFill>
             <a:schemeClr val="tx1"/>
           </a:solidFill>
@@ -3072,8 +4118,8 @@
           <a:cs typeface="+mn-cs"/>
         </a:defRPr>
       </a:lvl8pPr>
-      <a:lvl9pPr marL="3657600" algn="l" defTabSz="457200" rtl="0" eaLnBrk="1" latinLnBrk="0" hangingPunct="1">
-        <a:defRPr sz="1800" kern="1200">
+      <a:lvl9pPr marL="3657600" algn="l" rtl="0" eaLnBrk="1" latinLnBrk="0" hangingPunct="1">
+        <a:defRPr kumimoji="0" kern="1200">
           <a:solidFill>
             <a:schemeClr val="tx1"/>
           </a:solidFill>
@@ -3082,13 +4128,14 @@
           <a:cs typeface="+mn-cs"/>
         </a:defRPr>
       </a:lvl9pPr>
+      <a:extLst/>
     </p:otherStyle>
   </p:txStyles>
 </p:sldMaster>
 </file>
 
 <file path=ppt/slides/slide1.xml><?xml version="1.0" encoding="utf-8"?>
-<p:sld xmlns:a="http://schemas.openxmlformats.org/drawingml/2006/main" xmlns:p="http://schemas.openxmlformats.org/presentationml/2006/main" xmlns:r="http://schemas.openxmlformats.org/officeDocument/2006/relationships">
+<p:sld xmlns:a="http://schemas.openxmlformats.org/drawingml/2006/main" xmlns:r="http://schemas.openxmlformats.org/officeDocument/2006/relationships" xmlns:p="http://schemas.openxmlformats.org/presentationml/2006/main">
   <p:cSld>
     <p:spTree>
       <p:nvGrpSpPr>
@@ -3096,7 +4143,14 @@
         <p:cNvGrpSpPr/>
         <p:nvPr/>
       </p:nvGrpSpPr>
-      <p:grpSpPr/>
+      <p:grpSpPr>
+        <a:xfrm>
+          <a:off x="0" y="0"/>
+          <a:ext cx="0" cy="0"/>
+          <a:chOff x="0" y="0"/>
+          <a:chExt cx="0" cy="0"/>
+        </a:xfrm>
+      </p:grpSpPr>
       <p:sp>
         <p:nvSpPr>
           <p:cNvPr id="2" name="Rectangle 1"/>
@@ -3105,14 +4159,17 @@
         </p:nvSpPr>
         <p:spPr>
           <a:xfrm>
-            <a:off x="0" y="0"/>
+            <a:off x="2" y="0"/>
             <a:ext cx="12191695" cy="6858000"/>
           </a:xfrm>
           <a:prstGeom prst="rect">
             <a:avLst/>
           </a:prstGeom>
           <a:solidFill>
-            <a:srgbClr val="0F172A"/>
+            <a:schemeClr val="accent2">
+              <a:lumMod val="60000"/>
+              <a:lumOff val="40000"/>
+            </a:schemeClr>
           </a:solidFill>
           <a:ln>
             <a:noFill/>
@@ -3137,6 +4194,7 @@
           <a:lstStyle/>
           <a:p>
             <a:pPr algn="ctr"/>
+            <a:endParaRPr/>
           </a:p>
         </p:txBody>
       </p:sp>
@@ -3200,8 +4258,8 @@
         </p:nvSpPr>
         <p:spPr>
           <a:xfrm>
-            <a:off x="914400" y="1234440"/>
-            <a:ext cx="10362895" cy="2011680"/>
+            <a:off x="914402" y="1234440"/>
+            <a:ext cx="10362895" cy="1154162"/>
           </a:xfrm>
           <a:prstGeom prst="rect">
             <a:avLst/>
@@ -3289,7 +4347,7 @@
           </a:fontRef>
         </p:style>
         <p:txBody>
-          <a:bodyPr rtlCol="0" anchor="ctr" wrap="square" lIns="182880" rIns="182880" tIns="182880"/>
+          <a:bodyPr wrap="square" lIns="182880" tIns="182880" rIns="182880" rtlCol="0" anchor="ctr"/>
           <a:lstStyle/>
           <a:p>
             <a:pPr algn="ctr">
@@ -3304,14 +4362,10 @@
             </a:r>
           </a:p>
           <a:p>
+            <a:r>
+              <a:t/>
+            </a:r>
             <a:br/>
-            <a:pPr>
-              <a:defRPr sz="1100">
-                <a:solidFill>
-                  <a:srgbClr val="FFFFFF"/>
-                </a:solidFill>
-              </a:defRPr>
-            </a:pPr>
             <a:r>
               <a:t>Deterministic Python rules engine executing 100% grounded policy decisions, delay vouchers, &amp; ₹1,500 supervisor waiver limits.</a:t>
             </a:r>
@@ -3356,7 +4410,7 @@
           </a:fontRef>
         </p:style>
         <p:txBody>
-          <a:bodyPr rtlCol="0" anchor="ctr" wrap="square" lIns="182880" rIns="182880" tIns="182880"/>
+          <a:bodyPr wrap="square" lIns="182880" tIns="182880" rIns="182880" rtlCol="0" anchor="ctr"/>
           <a:lstStyle/>
           <a:p>
             <a:pPr algn="ctr">
@@ -3371,14 +4425,10 @@
             </a:r>
           </a:p>
           <a:p>
+            <a:r>
+              <a:t/>
+            </a:r>
             <a:br/>
-            <a:pPr>
-              <a:defRPr sz="1100">
-                <a:solidFill>
-                  <a:srgbClr val="FFFFFF"/>
-                </a:solidFill>
-              </a:defRPr>
-            </a:pPr>
             <a:r>
               <a:t>End-to-end resolution for Priya Nair (Gold), Arvind Kulkarni (Silver), &amp; Meher Kaur (Platinum) with escalation handling.</a:t>
             </a:r>
@@ -3423,7 +4473,7 @@
           </a:fontRef>
         </p:style>
         <p:txBody>
-          <a:bodyPr rtlCol="0" anchor="ctr" wrap="square" lIns="182880" rIns="182880" tIns="182880"/>
+          <a:bodyPr wrap="square" lIns="182880" tIns="182880" rIns="182880" rtlCol="0" anchor="ctr"/>
           <a:lstStyle/>
           <a:p>
             <a:pPr algn="ctr">
@@ -3438,14 +4488,10 @@
             </a:r>
           </a:p>
           <a:p>
+            <a:r>
+              <a:t/>
+            </a:r>
             <a:br/>
-            <a:pPr>
-              <a:defRPr sz="1100">
-                <a:solidFill>
-                  <a:srgbClr val="FFFFFF"/>
-                </a:solidFill>
-              </a:defRPr>
-            </a:pPr>
             <a:r>
               <a:t>Multi-Language (English &lt;-&gt; हिन्दी), Instant 1-tap Passenger Switcher, and Official Downloadable PDF Claim Receipts.</a:t>
             </a:r>
@@ -3460,7 +4506,7 @@
         </p:nvSpPr>
         <p:spPr>
           <a:xfrm>
-            <a:off x="914400" y="5715000"/>
+            <a:off x="914402" y="5715000"/>
             <a:ext cx="10362895" cy="594360"/>
           </a:xfrm>
           <a:prstGeom prst="rect">
@@ -3490,7 +4536,7 @@
           </a:fontRef>
         </p:style>
         <p:txBody>
-          <a:bodyPr rtlCol="0" anchor="ctr" wrap="square"/>
+          <a:bodyPr wrap="square" rtlCol="0" anchor="ctr"/>
           <a:lstStyle/>
           <a:p>
             <a:pPr algn="ctr">
@@ -3515,7 +4561,7 @@
 </file>
 
 <file path=ppt/slides/slide10.xml><?xml version="1.0" encoding="utf-8"?>
-<p:sld xmlns:a="http://schemas.openxmlformats.org/drawingml/2006/main" xmlns:p="http://schemas.openxmlformats.org/presentationml/2006/main" xmlns:r="http://schemas.openxmlformats.org/officeDocument/2006/relationships">
+<p:sld xmlns:a="http://schemas.openxmlformats.org/drawingml/2006/main" xmlns:r="http://schemas.openxmlformats.org/officeDocument/2006/relationships" xmlns:p="http://schemas.openxmlformats.org/presentationml/2006/main">
   <p:cSld>
     <p:spTree>
       <p:nvGrpSpPr>
@@ -3523,7 +4569,14 @@
         <p:cNvGrpSpPr/>
         <p:nvPr/>
       </p:nvGrpSpPr>
-      <p:grpSpPr/>
+      <p:grpSpPr>
+        <a:xfrm>
+          <a:off x="0" y="0"/>
+          <a:ext cx="0" cy="0"/>
+          <a:chOff x="0" y="0"/>
+          <a:chExt cx="0" cy="0"/>
+        </a:xfrm>
+      </p:grpSpPr>
       <p:sp>
         <p:nvSpPr>
           <p:cNvPr id="2" name="Rectangle 1"/>
@@ -3532,14 +4585,14 @@
         </p:nvSpPr>
         <p:spPr>
           <a:xfrm>
-            <a:off x="731520" y="457200"/>
-            <a:ext cx="10728655" cy="1005840"/>
+            <a:off x="2906335" y="457200"/>
+            <a:ext cx="7685314" cy="1005840"/>
           </a:xfrm>
           <a:prstGeom prst="rect">
             <a:avLst/>
           </a:prstGeom>
           <a:solidFill>
-            <a:srgbClr val="0F172A"/>
+            <a:srgbClr val="92D050"/>
           </a:solidFill>
           <a:ln w="19050">
             <a:solidFill>
@@ -3562,7 +4615,7 @@
           </a:fontRef>
         </p:style>
         <p:txBody>
-          <a:bodyPr rtlCol="0" anchor="ctr" wrap="square" lIns="274320" tIns="137160"/>
+          <a:bodyPr wrap="square" lIns="274320" tIns="137160" rtlCol="0" anchor="ctr"/>
           <a:lstStyle/>
           <a:p>
             <a:pPr algn="ctr">
@@ -3573,6 +4626,7 @@
               </a:defRPr>
             </a:pPr>
             <a:r>
+              <a:rPr dirty="0"/>
               <a:t>AIONOS ASSIGNMENT 3 - AIRLINE DISRUPTION</a:t>
             </a:r>
           </a:p>
@@ -3585,7 +4639,16 @@
               </a:defRPr>
             </a:pPr>
             <a:r>
-              <a:t>9. Defence Q&amp;A, Failure Modes &amp; Key Takeaways</a:t>
+              <a:rPr dirty="0"/>
+              <a:t>9. </a:t>
+            </a:r>
+            <a:r>
+              <a:rPr dirty="0" err="1"/>
+              <a:t>Defence</a:t>
+            </a:r>
+            <a:r>
+              <a:rPr dirty="0"/>
+              <a:t> Q&amp;A, Failure Modes &amp; Key Takeaways</a:t>
             </a:r>
           </a:p>
         </p:txBody>
@@ -3598,8 +4661,8 @@
         </p:nvSpPr>
         <p:spPr>
           <a:xfrm>
-            <a:off x="731520" y="1645920"/>
-            <a:ext cx="10728655" cy="4754880"/>
+            <a:off x="1384665" y="3126378"/>
+            <a:ext cx="10728655" cy="2169825"/>
           </a:xfrm>
           <a:prstGeom prst="rect">
             <a:avLst/>
@@ -3611,7 +4674,9 @@
             <a:spAutoFit/>
           </a:bodyPr>
           <a:lstStyle/>
-          <a:p/>
+          <a:p>
+            <a:endParaRPr dirty="0"/>
+          </a:p>
           <a:p>
             <a:pPr>
               <a:defRPr sz="1300">
@@ -3621,6 +4686,7 @@
               </a:defRPr>
             </a:pPr>
             <a:r>
+              <a:rPr dirty="0"/>
               <a:t>Q1: How do you prevent LLM hallucinations? Decision logic is computed in pure Python before the LLM prompt is assembled. LLM is strictly constrained to NLG surface realization.</a:t>
             </a:r>
           </a:p>
@@ -3633,6 +4699,7 @@
               </a:defRPr>
             </a:pPr>
             <a:r>
+              <a:rPr dirty="0"/>
               <a:t>Q2: How does the system handle complex multi-intent messages? Parser extracts all intent components; rules engine evaluates each independently (e.g. approving hotel while escalating fare difference).</a:t>
             </a:r>
           </a:p>
@@ -3645,7 +4712,16 @@
               </a:defRPr>
             </a:pPr>
             <a:r>
-              <a:t>Q3: What happens during API outage or rate limits? Automatic failover to SmartDeterministicClient guarantees 100% uptime with zero downtime.</a:t>
+              <a:rPr dirty="0"/>
+              <a:t>Q3: What happens during API outage or rate limits? Automatic failover to </a:t>
+            </a:r>
+            <a:r>
+              <a:rPr dirty="0" err="1"/>
+              <a:t>SmartDeterministicClient</a:t>
+            </a:r>
+            <a:r>
+              <a:rPr dirty="0"/>
+              <a:t> guarantees 100% uptime with zero downtime.</a:t>
             </a:r>
           </a:p>
           <a:p>
@@ -3657,6 +4733,7 @@
               </a:defRPr>
             </a:pPr>
             <a:r>
+              <a:rPr dirty="0"/>
               <a:t>Q4: How does the agent handle legal threats? Instant keyword and sentiment escalation bypasses normal flow, alerting human specialists with immutable audit logs.</a:t>
             </a:r>
           </a:p>
@@ -3669,6 +4746,7 @@
               </a:defRPr>
             </a:pPr>
             <a:r>
+              <a:rPr dirty="0"/>
               <a:t>Final Summary: A production-grade, grounded, multi-lingual disruption care system built strictly within assignment guidelines.</a:t>
             </a:r>
           </a:p>
@@ -3683,7 +4761,7 @@
 </file>
 
 <file path=ppt/slides/slide2.xml><?xml version="1.0" encoding="utf-8"?>
-<p:sld xmlns:a="http://schemas.openxmlformats.org/drawingml/2006/main" xmlns:p="http://schemas.openxmlformats.org/presentationml/2006/main" xmlns:r="http://schemas.openxmlformats.org/officeDocument/2006/relationships">
+<p:sld xmlns:a="http://schemas.openxmlformats.org/drawingml/2006/main" xmlns:r="http://schemas.openxmlformats.org/officeDocument/2006/relationships" xmlns:p="http://schemas.openxmlformats.org/presentationml/2006/main">
   <p:cSld>
     <p:spTree>
       <p:nvGrpSpPr>
@@ -3691,7 +4769,14 @@
         <p:cNvGrpSpPr/>
         <p:nvPr/>
       </p:nvGrpSpPr>
-      <p:grpSpPr/>
+      <p:grpSpPr>
+        <a:xfrm>
+          <a:off x="0" y="0"/>
+          <a:ext cx="0" cy="0"/>
+          <a:chOff x="0" y="0"/>
+          <a:chExt cx="0" cy="0"/>
+        </a:xfrm>
+      </p:grpSpPr>
       <p:sp>
         <p:nvSpPr>
           <p:cNvPr id="2" name="Rectangle 1"/>
@@ -3700,14 +4785,14 @@
         </p:nvSpPr>
         <p:spPr>
           <a:xfrm>
-            <a:off x="731520" y="457200"/>
-            <a:ext cx="10728655" cy="1005840"/>
+            <a:off x="2764971" y="457200"/>
+            <a:ext cx="7424058" cy="1005840"/>
           </a:xfrm>
           <a:prstGeom prst="rect">
             <a:avLst/>
           </a:prstGeom>
           <a:solidFill>
-            <a:srgbClr val="0F172A"/>
+            <a:srgbClr val="92D050"/>
           </a:solidFill>
           <a:ln w="19050">
             <a:solidFill>
@@ -3730,7 +4815,7 @@
           </a:fontRef>
         </p:style>
         <p:txBody>
-          <a:bodyPr rtlCol="0" anchor="ctr" wrap="square" lIns="274320" tIns="137160"/>
+          <a:bodyPr wrap="square" lIns="274320" tIns="137160" rtlCol="0" anchor="ctr"/>
           <a:lstStyle/>
           <a:p>
             <a:pPr algn="ctr">
@@ -3741,6 +4826,7 @@
               </a:defRPr>
             </a:pPr>
             <a:r>
+              <a:rPr dirty="0"/>
               <a:t>AIONOS ASSIGNMENT 3 - AIRLINE DISRUPTION</a:t>
             </a:r>
           </a:p>
@@ -3753,6 +4839,7 @@
               </a:defRPr>
             </a:pPr>
             <a:r>
+              <a:rPr dirty="0"/>
               <a:t>1. Business Problem &amp; Mission Statement</a:t>
             </a:r>
           </a:p>
@@ -3766,8 +4853,8 @@
         </p:nvSpPr>
         <p:spPr>
           <a:xfrm>
-            <a:off x="731520" y="1645920"/>
-            <a:ext cx="10728655" cy="4754880"/>
+            <a:off x="1926771" y="2558143"/>
+            <a:ext cx="9533406" cy="2523768"/>
           </a:xfrm>
           <a:prstGeom prst="rect">
             <a:avLst/>
@@ -3779,7 +4866,9 @@
             <a:spAutoFit/>
           </a:bodyPr>
           <a:lstStyle/>
-          <a:p/>
+          <a:p>
+            <a:endParaRPr dirty="0"/>
+          </a:p>
           <a:p>
             <a:pPr>
               <a:defRPr sz="1400">
@@ -3789,6 +4878,7 @@
               </a:defRPr>
             </a:pPr>
             <a:r>
+              <a:rPr dirty="0"/>
               <a:t>The Challenge: Airline disruptions (cancellations and multi-hour delays) cause immense customer frustration, leading to angry passengers demanding arbitrary upgrades, refunds, or threatening legal action.</a:t>
             </a:r>
           </a:p>
@@ -3801,6 +4891,7 @@
               </a:defRPr>
             </a:pPr>
             <a:r>
+              <a:rPr dirty="0"/>
               <a:t>The Business Risk: Pure LLM bots suffer from hallucination, authorizing unauthorized compensation or exceeding financial authority thresholds (e.g. fare difference waivers).</a:t>
             </a:r>
           </a:p>
@@ -3813,6 +4904,7 @@
               </a:defRPr>
             </a:pPr>
             <a:r>
+              <a:rPr dirty="0"/>
               <a:t>The Objective: Build an autonomous customer-facing resolution agent that:</a:t>
             </a:r>
           </a:p>
@@ -3825,6 +4917,7 @@
               </a:defRPr>
             </a:pPr>
             <a:r>
+              <a:rPr dirty="0"/>
               <a:t>  - Understands Intent &amp; Sentiment: Detects customer emotional state and exact request.</a:t>
             </a:r>
           </a:p>
@@ -3837,6 +4930,7 @@
               </a:defRPr>
             </a:pPr>
             <a:r>
+              <a:rPr dirty="0"/>
               <a:t>  - Strictly Enforces Grounded Policy: Determines entitlements deterministically from data pack rules.</a:t>
             </a:r>
           </a:p>
@@ -3849,7 +4943,16 @@
               </a:defRPr>
             </a:pPr>
             <a:r>
-              <a:t>  - Protects Airline Authority: Escalates cases exceeding front-line limits (e.g., fare diff &gt; Rs 1,500, legal threats) to human supervisors.</a:t>
+              <a:rPr dirty="0"/>
+              <a:t>  - Protects Airline Authority: Escalates cases exceeding front-line limits (e.g., fare diff &gt; </a:t>
+            </a:r>
+            <a:r>
+              <a:rPr dirty="0" err="1"/>
+              <a:t>Rs</a:t>
+            </a:r>
+            <a:r>
+              <a:rPr dirty="0"/>
+              <a:t> 1,500, legal threats) to human supervisors.</a:t>
             </a:r>
           </a:p>
           <a:p>
@@ -3861,6 +4964,7 @@
               </a:defRPr>
             </a:pPr>
             <a:r>
+              <a:rPr dirty="0"/>
               <a:t>  - Maintains Full Audit Trail: Preserves append-only immutable records of every turn and decision.</a:t>
             </a:r>
           </a:p>
@@ -3875,7 +4979,7 @@
 </file>
 
 <file path=ppt/slides/slide3.xml><?xml version="1.0" encoding="utf-8"?>
-<p:sld xmlns:a="http://schemas.openxmlformats.org/drawingml/2006/main" xmlns:p="http://schemas.openxmlformats.org/presentationml/2006/main" xmlns:r="http://schemas.openxmlformats.org/officeDocument/2006/relationships">
+<p:sld xmlns:a="http://schemas.openxmlformats.org/drawingml/2006/main" xmlns:r="http://schemas.openxmlformats.org/officeDocument/2006/relationships" xmlns:p="http://schemas.openxmlformats.org/presentationml/2006/main">
   <p:cSld>
     <p:spTree>
       <p:nvGrpSpPr>
@@ -3883,7 +4987,14 @@
         <p:cNvGrpSpPr/>
         <p:nvPr/>
       </p:nvGrpSpPr>
-      <p:grpSpPr/>
+      <p:grpSpPr>
+        <a:xfrm>
+          <a:off x="0" y="0"/>
+          <a:ext cx="0" cy="0"/>
+          <a:chOff x="0" y="0"/>
+          <a:chExt cx="0" cy="0"/>
+        </a:xfrm>
+      </p:grpSpPr>
       <p:sp>
         <p:nvSpPr>
           <p:cNvPr id="2" name="Rectangle 1"/>
@@ -3892,14 +5003,14 @@
         </p:nvSpPr>
         <p:spPr>
           <a:xfrm>
-            <a:off x="731520" y="457200"/>
-            <a:ext cx="10728655" cy="1005840"/>
+            <a:off x="3276601" y="457200"/>
+            <a:ext cx="6781800" cy="1005840"/>
           </a:xfrm>
           <a:prstGeom prst="rect">
             <a:avLst/>
           </a:prstGeom>
           <a:solidFill>
-            <a:srgbClr val="0F172A"/>
+            <a:srgbClr val="92D050"/>
           </a:solidFill>
           <a:ln w="19050">
             <a:solidFill>
@@ -3922,7 +5033,7 @@
           </a:fontRef>
         </p:style>
         <p:txBody>
-          <a:bodyPr rtlCol="0" anchor="ctr" wrap="square" lIns="274320" tIns="137160"/>
+          <a:bodyPr wrap="square" lIns="274320" tIns="137160" rtlCol="0" anchor="ctr"/>
           <a:lstStyle/>
           <a:p>
             <a:pPr algn="ctr">
@@ -3933,6 +5044,7 @@
               </a:defRPr>
             </a:pPr>
             <a:r>
+              <a:rPr dirty="0"/>
               <a:t>AIONOS ASSIGNMENT 3 - AIRLINE DISRUPTION</a:t>
             </a:r>
           </a:p>
@@ -3945,6 +5057,7 @@
               </a:defRPr>
             </a:pPr>
             <a:r>
+              <a:rPr dirty="0"/>
               <a:t>2. Architectural Pipeline &amp; Component Separation</a:t>
             </a:r>
           </a:p>
@@ -3958,8 +5071,8 @@
         </p:nvSpPr>
         <p:spPr>
           <a:xfrm>
-            <a:off x="731520" y="1645920"/>
-            <a:ext cx="10728655" cy="4754880"/>
+            <a:off x="1905000" y="2558143"/>
+            <a:ext cx="9555177" cy="2769989"/>
           </a:xfrm>
           <a:prstGeom prst="rect">
             <a:avLst/>
@@ -3971,7 +5084,9 @@
             <a:spAutoFit/>
           </a:bodyPr>
           <a:lstStyle/>
-          <a:p/>
+          <a:p>
+            <a:endParaRPr dirty="0"/>
+          </a:p>
           <a:p>
             <a:pPr>
               <a:defRPr sz="1300">
@@ -3981,7 +5096,16 @@
               </a:defRPr>
             </a:pPr>
             <a:r>
-              <a:t>1. Input &amp; Ingestion Layer: Captures multi-turn passenger queries through Streamlit UI with 1-tap passenger switcher and multi-language support (English / Hindi).</a:t>
+              <a:rPr dirty="0"/>
+              <a:t>1. Input &amp; Ingestion Layer: Captures multi-turn passenger queries through </a:t>
+            </a:r>
+            <a:r>
+              <a:rPr dirty="0" err="1"/>
+              <a:t>Streamlit</a:t>
+            </a:r>
+            <a:r>
+              <a:rPr dirty="0"/>
+              <a:t> UI with 1-tap passenger switcher and multi-language support (English / Hindi).</a:t>
             </a:r>
           </a:p>
           <a:p>
@@ -3993,6 +5117,7 @@
               </a:defRPr>
             </a:pPr>
             <a:r>
+              <a:rPr dirty="0"/>
               <a:t>2. Intent &amp; Sentiment Parser: Extracts primary intent (refund, rebook, hotel, voucher, legal threat) and emotional sentiment (furious, frustrated, polite).</a:t>
             </a:r>
           </a:p>
@@ -4005,7 +5130,32 @@
               </a:defRPr>
             </a:pPr>
             <a:r>
-              <a:t>3. Grounded Data Repository: Provides read-only access to customer profiles (Priya, Arvind, Meher), flight statuses, and policy data packs with zero external assumptions.</a:t>
+              <a:rPr dirty="0"/>
+              <a:t>3. Grounded Data Repository: Provides read-only access to customer profiles (</a:t>
+            </a:r>
+            <a:r>
+              <a:rPr dirty="0" err="1"/>
+              <a:t>Priya</a:t>
+            </a:r>
+            <a:r>
+              <a:rPr dirty="0"/>
+              <a:t>, </a:t>
+            </a:r>
+            <a:r>
+              <a:rPr dirty="0" err="1"/>
+              <a:t>Arvind</a:t>
+            </a:r>
+            <a:r>
+              <a:rPr dirty="0"/>
+              <a:t>, </a:t>
+            </a:r>
+            <a:r>
+              <a:rPr dirty="0" err="1"/>
+              <a:t>Meher</a:t>
+            </a:r>
+            <a:r>
+              <a:rPr dirty="0"/>
+              <a:t>), flight statuses, and policy data packs with zero external assumptions.</a:t>
             </a:r>
           </a:p>
           <a:p>
@@ -4017,7 +5167,16 @@
               </a:defRPr>
             </a:pPr>
             <a:r>
-              <a:t>4. Deterministic Rules Engine: Pure Python logic that enforces cancellation rights, delay tiers (&lt;3h, 3-5h, &gt;5h), hotel eligibility, and Rs 1,500 fare waiver limits.</a:t>
+              <a:rPr dirty="0"/>
+              <a:t>4. Deterministic Rules Engine: Pure Python logic that enforces cancellation rights, delay tiers (&lt;3h, 3-5h, &gt;5h), hotel eligibility, and </a:t>
+            </a:r>
+            <a:r>
+              <a:rPr dirty="0" err="1"/>
+              <a:t>Rs</a:t>
+            </a:r>
+            <a:r>
+              <a:rPr dirty="0"/>
+              <a:t> 1,500 fare waiver limits.</a:t>
             </a:r>
           </a:p>
           <a:p>
@@ -4029,6 +5188,7 @@
               </a:defRPr>
             </a:pPr>
             <a:r>
+              <a:rPr dirty="0"/>
               <a:t>5. Controlled NLG &amp; LLM Client: Natural language generation using Google Gemini with offline deterministic fallback for bulletproof offline evaluation.</a:t>
             </a:r>
           </a:p>
@@ -4041,7 +5201,16 @@
               </a:defRPr>
             </a:pPr>
             <a:r>
-              <a:t>6. Audit &amp; Observability Logger: Append-only JSONL event store capturing every turn, policy decisions, supervisor escalations, and compensation logs.</a:t>
+              <a:rPr dirty="0"/>
+              <a:t>6. Audit &amp; </a:t>
+            </a:r>
+            <a:r>
+              <a:rPr dirty="0" err="1"/>
+              <a:t>Observability</a:t>
+            </a:r>
+            <a:r>
+              <a:rPr dirty="0"/>
+              <a:t> Logger: Append-only JSONL event store capturing every turn, policy decisions, supervisor escalations, and compensation logs.</a:t>
             </a:r>
           </a:p>
         </p:txBody>
@@ -4055,7 +5224,7 @@
 </file>
 
 <file path=ppt/slides/slide4.xml><?xml version="1.0" encoding="utf-8"?>
-<p:sld xmlns:a="http://schemas.openxmlformats.org/drawingml/2006/main" xmlns:p="http://schemas.openxmlformats.org/presentationml/2006/main" xmlns:r="http://schemas.openxmlformats.org/officeDocument/2006/relationships">
+<p:sld xmlns:a="http://schemas.openxmlformats.org/drawingml/2006/main" xmlns:r="http://schemas.openxmlformats.org/officeDocument/2006/relationships" xmlns:p="http://schemas.openxmlformats.org/presentationml/2006/main">
   <p:cSld>
     <p:spTree>
       <p:nvGrpSpPr>
@@ -4063,7 +5232,14 @@
         <p:cNvGrpSpPr/>
         <p:nvPr/>
       </p:nvGrpSpPr>
-      <p:grpSpPr/>
+      <p:grpSpPr>
+        <a:xfrm>
+          <a:off x="0" y="0"/>
+          <a:ext cx="0" cy="0"/>
+          <a:chOff x="0" y="0"/>
+          <a:chExt cx="0" cy="0"/>
+        </a:xfrm>
+      </p:grpSpPr>
       <p:sp>
         <p:nvSpPr>
           <p:cNvPr id="2" name="Rectangle 1"/>
@@ -4072,14 +5248,17 @@
         </p:nvSpPr>
         <p:spPr>
           <a:xfrm>
-            <a:off x="731520" y="457200"/>
-            <a:ext cx="10728655" cy="1005840"/>
+            <a:off x="2895599" y="457200"/>
+            <a:ext cx="7652657" cy="1005840"/>
           </a:xfrm>
           <a:prstGeom prst="rect">
             <a:avLst/>
           </a:prstGeom>
           <a:solidFill>
-            <a:srgbClr val="0F172A"/>
+            <a:schemeClr val="accent4">
+              <a:lumMod val="60000"/>
+              <a:lumOff val="40000"/>
+            </a:schemeClr>
           </a:solidFill>
           <a:ln w="19050">
             <a:solidFill>
@@ -4102,7 +5281,7 @@
           </a:fontRef>
         </p:style>
         <p:txBody>
-          <a:bodyPr rtlCol="0" anchor="ctr" wrap="square" lIns="274320" tIns="137160"/>
+          <a:bodyPr wrap="square" lIns="274320" tIns="137160" rtlCol="0" anchor="ctr"/>
           <a:lstStyle/>
           <a:p>
             <a:pPr algn="ctr">
@@ -4138,8 +5317,8 @@
         </p:nvSpPr>
         <p:spPr>
           <a:xfrm>
-            <a:off x="731520" y="1645920"/>
-            <a:ext cx="10728655" cy="4754880"/>
+            <a:off x="1469571" y="2362200"/>
+            <a:ext cx="9990606" cy="2446824"/>
           </a:xfrm>
           <a:prstGeom prst="rect">
             <a:avLst/>
@@ -4151,7 +5330,9 @@
             <a:spAutoFit/>
           </a:bodyPr>
           <a:lstStyle/>
-          <a:p/>
+          <a:p>
+            <a:endParaRPr dirty="0"/>
+          </a:p>
           <a:p>
             <a:pPr>
               <a:defRPr sz="1350">
@@ -4161,6 +5342,7 @@
               </a:defRPr>
             </a:pPr>
             <a:r>
+              <a:rPr dirty="0"/>
               <a:t>Cancellation Rebooking Rule: Airline-caused cancellation entitles customer to choice of Free Rebooking within 24h OR Full Refund (7 business days to original payment method).</a:t>
             </a:r>
           </a:p>
@@ -4173,7 +5355,16 @@
               </a:defRPr>
             </a:pPr>
             <a:r>
-              <a:t>Delay Care Tiers: &lt; 3h: Rs 500 Meal Voucher | 3-5h: Meal Voucher + Lounge Access | &gt; 5h: Meal + Lounge + Hotel (delayed-hours duration only, NOT full night).</a:t>
+              <a:rPr dirty="0"/>
+              <a:t>Delay Care Tiers: &lt; 3h: </a:t>
+            </a:r>
+            <a:r>
+              <a:rPr dirty="0" err="1"/>
+              <a:t>Rs</a:t>
+            </a:r>
+            <a:r>
+              <a:rPr dirty="0"/>
+              <a:t> 500 Meal Voucher | 3-5h: Meal Voucher + Lounge Access | &gt; 5h: Meal + Lounge + Hotel (delayed-hours duration only, NOT full night).</a:t>
             </a:r>
           </a:p>
           <a:p>
@@ -4185,7 +5376,24 @@
               </a:defRPr>
             </a:pPr>
             <a:r>
-              <a:t>Fare Difference Waiver Cap: Front-line agent can waive up to Rs 1,500. Any fare difference &gt; Rs 1,500 requires mandatory Duty Supervisor escalation.</a:t>
+              <a:rPr dirty="0"/>
+              <a:t>Fare Difference Waiver Cap: Front-line agent can waive up to </a:t>
+            </a:r>
+            <a:r>
+              <a:rPr dirty="0" err="1"/>
+              <a:t>Rs</a:t>
+            </a:r>
+            <a:r>
+              <a:rPr dirty="0"/>
+              <a:t> 1,500. Any fare difference &gt; </a:t>
+            </a:r>
+            <a:r>
+              <a:rPr dirty="0" err="1"/>
+              <a:t>Rs</a:t>
+            </a:r>
+            <a:r>
+              <a:rPr dirty="0"/>
+              <a:t> 1,500 requires mandatory Duty Supervisor escalation.</a:t>
             </a:r>
           </a:p>
           <a:p>
@@ -4197,6 +5405,7 @@
               </a:defRPr>
             </a:pPr>
             <a:r>
+              <a:rPr dirty="0"/>
               <a:t>Loyalty Tier Privileges: Gold &amp; Platinum members receive first-priority rebooking on replacement flights, but zero unauthorized cash compensation or cabin upgrades.</a:t>
             </a:r>
           </a:p>
@@ -4209,6 +5418,7 @@
               </a:defRPr>
             </a:pPr>
             <a:r>
+              <a:rPr dirty="0"/>
               <a:t>Prohibited Actions (Hard Guardrails): No complimentary business class upgrades; no cash beyond policy; immediate escalation on legal/court/formal complaint threats.</a:t>
             </a:r>
           </a:p>
@@ -4223,7 +5433,7 @@
 </file>
 
 <file path=ppt/slides/slide5.xml><?xml version="1.0" encoding="utf-8"?>
-<p:sld xmlns:a="http://schemas.openxmlformats.org/drawingml/2006/main" xmlns:p="http://schemas.openxmlformats.org/presentationml/2006/main" xmlns:r="http://schemas.openxmlformats.org/officeDocument/2006/relationships">
+<p:sld xmlns:a="http://schemas.openxmlformats.org/drawingml/2006/main" xmlns:r="http://schemas.openxmlformats.org/officeDocument/2006/relationships" xmlns:p="http://schemas.openxmlformats.org/presentationml/2006/main">
   <p:cSld>
     <p:spTree>
       <p:nvGrpSpPr>
@@ -4231,7 +5441,14 @@
         <p:cNvGrpSpPr/>
         <p:nvPr/>
       </p:nvGrpSpPr>
-      <p:grpSpPr/>
+      <p:grpSpPr>
+        <a:xfrm>
+          <a:off x="0" y="0"/>
+          <a:ext cx="0" cy="0"/>
+          <a:chOff x="0" y="0"/>
+          <a:chExt cx="0" cy="0"/>
+        </a:xfrm>
+      </p:grpSpPr>
       <p:sp>
         <p:nvSpPr>
           <p:cNvPr id="2" name="Rectangle 1"/>
@@ -4240,14 +5457,14 @@
         </p:nvSpPr>
         <p:spPr>
           <a:xfrm>
-            <a:off x="731520" y="457200"/>
-            <a:ext cx="10728655" cy="1005840"/>
+            <a:off x="2830286" y="457200"/>
+            <a:ext cx="7946571" cy="1005840"/>
           </a:xfrm>
           <a:prstGeom prst="rect">
             <a:avLst/>
           </a:prstGeom>
           <a:solidFill>
-            <a:srgbClr val="0F172A"/>
+            <a:srgbClr val="92D050"/>
           </a:solidFill>
           <a:ln w="19050">
             <a:solidFill>
@@ -4270,7 +5487,7 @@
           </a:fontRef>
         </p:style>
         <p:txBody>
-          <a:bodyPr rtlCol="0" anchor="ctr" wrap="square" lIns="274320" tIns="137160"/>
+          <a:bodyPr wrap="square" lIns="274320" tIns="137160" rtlCol="0" anchor="ctr"/>
           <a:lstStyle/>
           <a:p>
             <a:pPr algn="ctr">
@@ -4306,8 +5523,8 @@
         </p:nvSpPr>
         <p:spPr>
           <a:xfrm>
-            <a:off x="731520" y="1645920"/>
-            <a:ext cx="10728655" cy="4754880"/>
+            <a:off x="2307771" y="2318657"/>
+            <a:ext cx="9152406" cy="2239074"/>
           </a:xfrm>
           <a:prstGeom prst="rect">
             <a:avLst/>
@@ -4319,7 +5536,9 @@
             <a:spAutoFit/>
           </a:bodyPr>
           <a:lstStyle/>
-          <a:p/>
+          <a:p>
+            <a:endParaRPr dirty="0"/>
+          </a:p>
           <a:p>
             <a:pPr>
               <a:defRPr sz="1350">
@@ -4329,6 +5548,7 @@
               </a:defRPr>
             </a:pPr>
             <a:r>
+              <a:rPr dirty="0"/>
               <a:t>Flight Status: Flight SK-204 (Delhi -&gt; Goa) is CANCELLED for operational reasons.</a:t>
             </a:r>
           </a:p>
@@ -4341,6 +5561,7 @@
               </a:defRPr>
             </a:pPr>
             <a:r>
+              <a:rPr dirty="0"/>
               <a:t>Customer State &amp; Demands: Customer is "furious", demands a full cash refund PLUS a free business class upgrade on her return flight "for the trouble".</a:t>
             </a:r>
           </a:p>
@@ -4353,6 +5574,7 @@
               </a:defRPr>
             </a:pPr>
             <a:r>
+              <a:rPr dirty="0"/>
               <a:t>Agent Resolution Strategy: </a:t>
             </a:r>
           </a:p>
@@ -4365,6 +5587,7 @@
               </a:defRPr>
             </a:pPr>
             <a:r>
+              <a:rPr dirty="0"/>
               <a:t>  - Empathetic De-escalation: Acknowledges Gold loyalty status and expresses sincere apology for the disruption.</a:t>
             </a:r>
           </a:p>
@@ -4377,6 +5600,7 @@
               </a:defRPr>
             </a:pPr>
             <a:r>
+              <a:rPr dirty="0"/>
               <a:t>  - Grounded Options Offered: Presents 100% Full Refund (7 business days) OR Free Priority Rebooking on the next flight within 24h.</a:t>
             </a:r>
           </a:p>
@@ -4389,6 +5613,7 @@
               </a:defRPr>
             </a:pPr>
             <a:r>
+              <a:rPr dirty="0"/>
               <a:t>  - Policy Boundary Upheld: Politely declines complimentary business class upgrade, citing strict airline disruption policy.</a:t>
             </a:r>
           </a:p>
@@ -4401,6 +5626,7 @@
               </a:defRPr>
             </a:pPr>
             <a:r>
+              <a:rPr dirty="0"/>
               <a:t>  - Zero Policy Violation: Does not concede unauthorized upgrade despite high customer agitation.</a:t>
             </a:r>
           </a:p>
@@ -4415,7 +5641,7 @@
 </file>
 
 <file path=ppt/slides/slide6.xml><?xml version="1.0" encoding="utf-8"?>
-<p:sld xmlns:a="http://schemas.openxmlformats.org/drawingml/2006/main" xmlns:p="http://schemas.openxmlformats.org/presentationml/2006/main" xmlns:r="http://schemas.openxmlformats.org/officeDocument/2006/relationships">
+<p:sld xmlns:a="http://schemas.openxmlformats.org/drawingml/2006/main" xmlns:r="http://schemas.openxmlformats.org/officeDocument/2006/relationships" xmlns:p="http://schemas.openxmlformats.org/presentationml/2006/main">
   <p:cSld>
     <p:spTree>
       <p:nvGrpSpPr>
@@ -4423,7 +5649,14 @@
         <p:cNvGrpSpPr/>
         <p:nvPr/>
       </p:nvGrpSpPr>
-      <p:grpSpPr/>
+      <p:grpSpPr>
+        <a:xfrm>
+          <a:off x="0" y="0"/>
+          <a:ext cx="0" cy="0"/>
+          <a:chOff x="0" y="0"/>
+          <a:chExt cx="0" cy="0"/>
+        </a:xfrm>
+      </p:grpSpPr>
       <p:sp>
         <p:nvSpPr>
           <p:cNvPr id="2" name="Rectangle 1"/>
@@ -4432,14 +5665,14 @@
         </p:nvSpPr>
         <p:spPr>
           <a:xfrm>
-            <a:off x="731520" y="457200"/>
-            <a:ext cx="10728655" cy="1005840"/>
+            <a:off x="2645229" y="457200"/>
+            <a:ext cx="8814948" cy="1005840"/>
           </a:xfrm>
           <a:prstGeom prst="rect">
             <a:avLst/>
           </a:prstGeom>
           <a:solidFill>
-            <a:srgbClr val="0F172A"/>
+            <a:srgbClr val="92D050"/>
           </a:solidFill>
           <a:ln w="19050">
             <a:solidFill>
@@ -4462,7 +5695,7 @@
           </a:fontRef>
         </p:style>
         <p:txBody>
-          <a:bodyPr rtlCol="0" anchor="ctr" wrap="square" lIns="274320" tIns="137160"/>
+          <a:bodyPr wrap="square" lIns="274320" tIns="137160" rtlCol="0" anchor="ctr"/>
           <a:lstStyle/>
           <a:p>
             <a:pPr algn="ctr">
@@ -4473,6 +5706,7 @@
               </a:defRPr>
             </a:pPr>
             <a:r>
+              <a:rPr dirty="0"/>
               <a:t>AIONOS ASSIGNMENT 3 - AIRLINE DISRUPTION</a:t>
             </a:r>
           </a:p>
@@ -4485,7 +5719,24 @@
               </a:defRPr>
             </a:pPr>
             <a:r>
-              <a:t>5. Scenario 2 - Arvind Kulkarni (Silver Tier, TR1190B)</a:t>
+              <a:rPr dirty="0"/>
+              <a:t>5. Scenario 2 - </a:t>
+            </a:r>
+            <a:r>
+              <a:rPr dirty="0" err="1"/>
+              <a:t>Arvind</a:t>
+            </a:r>
+            <a:r>
+              <a:rPr dirty="0"/>
+              <a:t> </a:t>
+            </a:r>
+            <a:r>
+              <a:rPr dirty="0" err="1"/>
+              <a:t>Kulkarni</a:t>
+            </a:r>
+            <a:r>
+              <a:rPr dirty="0"/>
+              <a:t> (Silver Tier, TR1190B)</a:t>
             </a:r>
           </a:p>
         </p:txBody>
@@ -4498,8 +5749,8 @@
         </p:nvSpPr>
         <p:spPr>
           <a:xfrm>
-            <a:off x="731520" y="1645920"/>
-            <a:ext cx="10728655" cy="4754880"/>
+            <a:off x="2645229" y="2557709"/>
+            <a:ext cx="8814948" cy="2239074"/>
           </a:xfrm>
           <a:prstGeom prst="rect">
             <a:avLst/>
@@ -4511,7 +5762,9 @@
             <a:spAutoFit/>
           </a:bodyPr>
           <a:lstStyle/>
-          <a:p/>
+          <a:p>
+            <a:endParaRPr dirty="0"/>
+          </a:p>
           <a:p>
             <a:pPr>
               <a:defRPr sz="1350">
@@ -4521,6 +5774,7 @@
               </a:defRPr>
             </a:pPr>
             <a:r>
+              <a:rPr dirty="0"/>
               <a:t>Flight Status: Flight SK-118 (Mumbai -&gt; Bengaluru) is DELAYED by 4 Hours (rescheduled to 11:10).</a:t>
             </a:r>
           </a:p>
@@ -4533,6 +5787,7 @@
               </a:defRPr>
             </a:pPr>
             <a:r>
+              <a:rPr dirty="0"/>
               <a:t>Customer State &amp; Demands: Customer is frustrated about missing a connecting business meeting and demands hotel accommodation.</a:t>
             </a:r>
           </a:p>
@@ -4545,6 +5800,7 @@
               </a:defRPr>
             </a:pPr>
             <a:r>
+              <a:rPr dirty="0"/>
               <a:t>Agent Resolution Strategy: </a:t>
             </a:r>
           </a:p>
@@ -4557,6 +5813,7 @@
               </a:defRPr>
             </a:pPr>
             <a:r>
+              <a:rPr dirty="0"/>
               <a:t>  - Immediate Care Entitlements: Issues Meal Voucher and activates Executive Lounge Access per 3-5 hour delay tier.</a:t>
             </a:r>
           </a:p>
@@ -4569,6 +5826,7 @@
               </a:defRPr>
             </a:pPr>
             <a:r>
+              <a:rPr dirty="0"/>
               <a:t>  - Hotel Policy Enforcement: Politely explains hotel accommodation is strictly reserved for delays &gt; 5 hours; denies hotel stay.</a:t>
             </a:r>
           </a:p>
@@ -4581,6 +5839,7 @@
               </a:defRPr>
             </a:pPr>
             <a:r>
+              <a:rPr dirty="0"/>
               <a:t>  - Hospitality Alternative: Invites customer to work comfortably from the departure lounge with full amenities.</a:t>
             </a:r>
           </a:p>
@@ -4593,6 +5852,7 @@
               </a:defRPr>
             </a:pPr>
             <a:r>
+              <a:rPr dirty="0"/>
               <a:t>  - Precision Compliance: Exact match with civil aviation delay compensation guidelines.</a:t>
             </a:r>
           </a:p>
@@ -4607,7 +5867,7 @@
 </file>
 
 <file path=ppt/slides/slide7.xml><?xml version="1.0" encoding="utf-8"?>
-<p:sld xmlns:a="http://schemas.openxmlformats.org/drawingml/2006/main" xmlns:p="http://schemas.openxmlformats.org/presentationml/2006/main" xmlns:r="http://schemas.openxmlformats.org/officeDocument/2006/relationships">
+<p:sld xmlns:a="http://schemas.openxmlformats.org/drawingml/2006/main" xmlns:r="http://schemas.openxmlformats.org/officeDocument/2006/relationships" xmlns:p="http://schemas.openxmlformats.org/presentationml/2006/main">
   <p:cSld>
     <p:spTree>
       <p:nvGrpSpPr>
@@ -4615,7 +5875,14 @@
         <p:cNvGrpSpPr/>
         <p:nvPr/>
       </p:nvGrpSpPr>
-      <p:grpSpPr/>
+      <p:grpSpPr>
+        <a:xfrm>
+          <a:off x="0" y="0"/>
+          <a:ext cx="0" cy="0"/>
+          <a:chOff x="0" y="0"/>
+          <a:chExt cx="0" cy="0"/>
+        </a:xfrm>
+      </p:grpSpPr>
       <p:sp>
         <p:nvSpPr>
           <p:cNvPr id="2" name="Rectangle 1"/>
@@ -4624,14 +5891,14 @@
         </p:nvSpPr>
         <p:spPr>
           <a:xfrm>
-            <a:off x="731520" y="457200"/>
-            <a:ext cx="10728655" cy="1005840"/>
+            <a:off x="3135086" y="457200"/>
+            <a:ext cx="7859485" cy="1005840"/>
           </a:xfrm>
           <a:prstGeom prst="rect">
             <a:avLst/>
           </a:prstGeom>
           <a:solidFill>
-            <a:srgbClr val="0F172A"/>
+            <a:srgbClr val="92D050"/>
           </a:solidFill>
           <a:ln w="19050">
             <a:solidFill>
@@ -4654,7 +5921,7 @@
           </a:fontRef>
         </p:style>
         <p:txBody>
-          <a:bodyPr rtlCol="0" anchor="ctr" wrap="square" lIns="274320" tIns="137160"/>
+          <a:bodyPr wrap="square" lIns="274320" tIns="137160" rtlCol="0" anchor="ctr"/>
           <a:lstStyle/>
           <a:p>
             <a:pPr algn="ctr">
@@ -4690,8 +5957,8 @@
         </p:nvSpPr>
         <p:spPr>
           <a:xfrm>
-            <a:off x="731520" y="1645920"/>
-            <a:ext cx="10728655" cy="4754880"/>
+            <a:off x="2166258" y="2732314"/>
+            <a:ext cx="9435434" cy="2239074"/>
           </a:xfrm>
           <a:prstGeom prst="rect">
             <a:avLst/>
@@ -4703,7 +5970,9 @@
             <a:spAutoFit/>
           </a:bodyPr>
           <a:lstStyle/>
-          <a:p/>
+          <a:p>
+            <a:endParaRPr dirty="0"/>
+          </a:p>
           <a:p>
             <a:pPr>
               <a:defRPr sz="1350">
@@ -4713,6 +5982,7 @@
               </a:defRPr>
             </a:pPr>
             <a:r>
+              <a:rPr dirty="0"/>
               <a:t>Flight Status: Flight SK-305 (Delhi -&gt; Hyderabad) is DELAYED by 6 Hours (rescheduled to 20:00).</a:t>
             </a:r>
           </a:p>
@@ -4725,7 +5995,16 @@
               </a:defRPr>
             </a:pPr>
             <a:r>
-              <a:t>Customer Demands: Requests a full night hotel stay (not just delay hours) AND rebooking to an earlier alternative flight with a Rs 2,000 fare difference.</a:t>
+              <a:rPr dirty="0"/>
+              <a:t>Customer Demands: Requests a full night hotel stay (not just delay hours) AND rebooking to an earlier alternative flight with a </a:t>
+            </a:r>
+            <a:r>
+              <a:rPr dirty="0" err="1"/>
+              <a:t>Rs</a:t>
+            </a:r>
+            <a:r>
+              <a:rPr dirty="0"/>
+              <a:t> 2,000 fare difference.</a:t>
             </a:r>
           </a:p>
           <a:p>
@@ -4737,6 +6016,7 @@
               </a:defRPr>
             </a:pPr>
             <a:r>
+              <a:rPr dirty="0"/>
               <a:t>Agent Resolution Strategy: </a:t>
             </a:r>
           </a:p>
@@ -4749,6 +6029,7 @@
               </a:defRPr>
             </a:pPr>
             <a:r>
+              <a:rPr dirty="0"/>
               <a:t>  - 6-Hour Delay Care: Issues Meal Voucher + Executive Lounge Access + Transit Hotel accommodation covering the delay duration only.</a:t>
             </a:r>
           </a:p>
@@ -4761,7 +6042,24 @@
               </a:defRPr>
             </a:pPr>
             <a:r>
-              <a:t>  - Authority Boundary Enforcement: Detects that the Rs 2,000 fare difference exceeds front-line waiver threshold of Rs 1,500.</a:t>
+              <a:rPr dirty="0"/>
+              <a:t>  - Authority Boundary Enforcement: Detects that the </a:t>
+            </a:r>
+            <a:r>
+              <a:rPr dirty="0" err="1"/>
+              <a:t>Rs</a:t>
+            </a:r>
+            <a:r>
+              <a:rPr dirty="0"/>
+              <a:t> 2,000 fare difference exceeds front-line waiver threshold of </a:t>
+            </a:r>
+            <a:r>
+              <a:rPr dirty="0" err="1"/>
+              <a:t>Rs</a:t>
+            </a:r>
+            <a:r>
+              <a:rPr dirty="0"/>
+              <a:t> 1,500.</a:t>
             </a:r>
           </a:p>
           <a:p>
@@ -4773,6 +6071,7 @@
               </a:defRPr>
             </a:pPr>
             <a:r>
+              <a:rPr dirty="0"/>
               <a:t>  - Platinum Supervisor Escalation: Immediately escalates fare difference approval to Duty Supervisor with Platinum Priority tag.</a:t>
             </a:r>
           </a:p>
@@ -4785,6 +6084,7 @@
               </a:defRPr>
             </a:pPr>
             <a:r>
+              <a:rPr dirty="0"/>
               <a:t>  - Partial Fulfillment: Grants authorized items directly while escalating out-of-scope items cleanly.</a:t>
             </a:r>
           </a:p>
@@ -4799,7 +6099,7 @@
 </file>
 
 <file path=ppt/slides/slide8.xml><?xml version="1.0" encoding="utf-8"?>
-<p:sld xmlns:a="http://schemas.openxmlformats.org/drawingml/2006/main" xmlns:p="http://schemas.openxmlformats.org/presentationml/2006/main" xmlns:r="http://schemas.openxmlformats.org/officeDocument/2006/relationships">
+<p:sld xmlns:a="http://schemas.openxmlformats.org/drawingml/2006/main" xmlns:r="http://schemas.openxmlformats.org/officeDocument/2006/relationships" xmlns:p="http://schemas.openxmlformats.org/presentationml/2006/main">
   <p:cSld>
     <p:spTree>
       <p:nvGrpSpPr>
@@ -4807,7 +6107,14 @@
         <p:cNvGrpSpPr/>
         <p:nvPr/>
       </p:nvGrpSpPr>
-      <p:grpSpPr/>
+      <p:grpSpPr>
+        <a:xfrm>
+          <a:off x="0" y="0"/>
+          <a:ext cx="0" cy="0"/>
+          <a:chOff x="0" y="0"/>
+          <a:chExt cx="0" cy="0"/>
+        </a:xfrm>
+      </p:grpSpPr>
       <p:sp>
         <p:nvSpPr>
           <p:cNvPr id="2" name="Rectangle 1"/>
@@ -4816,14 +6123,14 @@
         </p:nvSpPr>
         <p:spPr>
           <a:xfrm>
-            <a:off x="731520" y="457200"/>
-            <a:ext cx="10728655" cy="1005840"/>
+            <a:off x="2623457" y="457200"/>
+            <a:ext cx="8011886" cy="1005840"/>
           </a:xfrm>
           <a:prstGeom prst="rect">
             <a:avLst/>
           </a:prstGeom>
           <a:solidFill>
-            <a:srgbClr val="0F172A"/>
+            <a:srgbClr val="92D050"/>
           </a:solidFill>
           <a:ln w="19050">
             <a:solidFill>
@@ -4846,7 +6153,7 @@
           </a:fontRef>
         </p:style>
         <p:txBody>
-          <a:bodyPr rtlCol="0" anchor="ctr" wrap="square" lIns="274320" tIns="137160"/>
+          <a:bodyPr wrap="square" lIns="274320" tIns="137160" rtlCol="0" anchor="ctr"/>
           <a:lstStyle/>
           <a:p>
             <a:pPr algn="ctr">
@@ -4882,8 +6189,8 @@
         </p:nvSpPr>
         <p:spPr>
           <a:xfrm>
-            <a:off x="731520" y="1645920"/>
-            <a:ext cx="10728655" cy="4754880"/>
+            <a:off x="1852901" y="3182983"/>
+            <a:ext cx="9552998" cy="1823576"/>
           </a:xfrm>
           <a:prstGeom prst="rect">
             <a:avLst/>
@@ -4895,7 +6202,9 @@
             <a:spAutoFit/>
           </a:bodyPr>
           <a:lstStyle/>
-          <a:p/>
+          <a:p>
+            <a:endParaRPr dirty="0"/>
+          </a:p>
           <a:p>
             <a:pPr>
               <a:defRPr sz="1350">
@@ -4905,6 +6214,7 @@
               </a:defRPr>
             </a:pPr>
             <a:r>
+              <a:rPr dirty="0"/>
               <a:t>Core Language Model: Google Gemini 2.5 Flash API (low temperature 0.2 for strict grounding) with deterministic rule synthesis.</a:t>
             </a:r>
           </a:p>
@@ -4917,7 +6227,16 @@
               </a:defRPr>
             </a:pPr>
             <a:r>
-              <a:t>Deterministic Fallback: SmartDeterministicClient with regex intent classifier enabling 100% offline recruiter evaluation.</a:t>
+              <a:rPr dirty="0"/>
+              <a:t>Deterministic Fallback: </a:t>
+            </a:r>
+            <a:r>
+              <a:rPr dirty="0" err="1"/>
+              <a:t>SmartDeterministicClient</a:t>
+            </a:r>
+            <a:r>
+              <a:rPr dirty="0"/>
+              <a:t> with regex intent classifier enabling 100% offline recruiter evaluation.</a:t>
             </a:r>
           </a:p>
           <a:p>
@@ -4929,7 +6248,16 @@
               </a:defRPr>
             </a:pPr>
             <a:r>
-              <a:t>Frontend Framework: Streamlit with Custom CSS Aviation Sky/Starry Night themes and 1-tap passenger switcher.</a:t>
+              <a:rPr dirty="0"/>
+              <a:t>Frontend Framework: </a:t>
+            </a:r>
+            <a:r>
+              <a:rPr dirty="0" err="1"/>
+              <a:t>Streamlit</a:t>
+            </a:r>
+            <a:r>
+              <a:rPr dirty="0"/>
+              <a:t> with Custom CSS Aviation Sky/Starry Night themes and 1-tap passenger switcher.</a:t>
             </a:r>
           </a:p>
           <a:p>
@@ -4941,7 +6269,16 @@
               </a:defRPr>
             </a:pPr>
             <a:r>
-              <a:t>PDF Certificate Engine: ReportLab 5.0 for dynamic issuance of official Disruption Claim Slips &amp; Tax Invoices.</a:t>
+              <a:rPr dirty="0"/>
+              <a:t>PDF Certificate Engine: </a:t>
+            </a:r>
+            <a:r>
+              <a:rPr dirty="0" err="1"/>
+              <a:t>ReportLab</a:t>
+            </a:r>
+            <a:r>
+              <a:rPr dirty="0"/>
+              <a:t> 5.0 for dynamic issuance of official Disruption Claim Slips &amp; Tax Invoices.</a:t>
             </a:r>
           </a:p>
           <a:p>
@@ -4953,7 +6290,16 @@
               </a:defRPr>
             </a:pPr>
             <a:r>
-              <a:t>Multi-Language Engine: Bilingual translation layer (English &lt;-&gt; हिन्दी) adapting UI and conversational responses.</a:t>
+              <a:rPr dirty="0"/>
+              <a:t>Multi-Language Engine: Bilingual translation layer (English &lt;-&gt; </a:t>
+            </a:r>
+            <a:r>
+              <a:rPr dirty="0" err="1"/>
+              <a:t>हिन्दी</a:t>
+            </a:r>
+            <a:r>
+              <a:rPr dirty="0"/>
+              <a:t>) adapting UI and conversational responses.</a:t>
             </a:r>
           </a:p>
           <a:p>
@@ -4965,7 +6311,16 @@
               </a:defRPr>
             </a:pPr>
             <a:r>
-              <a:t>Testing &amp; QA: PyTest suite with 55 unit/integration tests verifying 100% rules engine and data repository coverage.</a:t>
+              <a:rPr dirty="0"/>
+              <a:t>Testing &amp; QA: </a:t>
+            </a:r>
+            <a:r>
+              <a:rPr dirty="0" err="1"/>
+              <a:t>PyTest</a:t>
+            </a:r>
+            <a:r>
+              <a:rPr dirty="0"/>
+              <a:t> suite with 55 unit/integration tests verifying 100% rules engine and data repository coverage.</a:t>
             </a:r>
           </a:p>
           <a:p>
@@ -4977,6 +6332,7 @@
               </a:defRPr>
             </a:pPr>
             <a:r>
+              <a:rPr dirty="0"/>
               <a:t>Audit Infrastructure: Append-only JSONL logger tracking timestamps, customer sentiment drift, and supervisor actions.</a:t>
             </a:r>
           </a:p>
@@ -4991,7 +6347,7 @@
 </file>
 
 <file path=ppt/slides/slide9.xml><?xml version="1.0" encoding="utf-8"?>
-<p:sld xmlns:a="http://schemas.openxmlformats.org/drawingml/2006/main" xmlns:p="http://schemas.openxmlformats.org/presentationml/2006/main" xmlns:r="http://schemas.openxmlformats.org/officeDocument/2006/relationships">
+<p:sld xmlns:a="http://schemas.openxmlformats.org/drawingml/2006/main" xmlns:r="http://schemas.openxmlformats.org/officeDocument/2006/relationships" xmlns:p="http://schemas.openxmlformats.org/presentationml/2006/main">
   <p:cSld>
     <p:spTree>
       <p:nvGrpSpPr>
@@ -4999,7 +6355,14 @@
         <p:cNvGrpSpPr/>
         <p:nvPr/>
       </p:nvGrpSpPr>
-      <p:grpSpPr/>
+      <p:grpSpPr>
+        <a:xfrm>
+          <a:off x="0" y="0"/>
+          <a:ext cx="0" cy="0"/>
+          <a:chOff x="0" y="0"/>
+          <a:chExt cx="0" cy="0"/>
+        </a:xfrm>
+      </p:grpSpPr>
       <p:sp>
         <p:nvSpPr>
           <p:cNvPr id="2" name="Rectangle 1"/>
@@ -5008,14 +6371,14 @@
         </p:nvSpPr>
         <p:spPr>
           <a:xfrm>
-            <a:off x="731520" y="457200"/>
-            <a:ext cx="10728655" cy="1005840"/>
+            <a:off x="3167743" y="391886"/>
+            <a:ext cx="7620000" cy="1005840"/>
           </a:xfrm>
           <a:prstGeom prst="rect">
             <a:avLst/>
           </a:prstGeom>
           <a:solidFill>
-            <a:srgbClr val="0F172A"/>
+            <a:srgbClr val="92D050"/>
           </a:solidFill>
           <a:ln w="19050">
             <a:solidFill>
@@ -5038,7 +6401,7 @@
           </a:fontRef>
         </p:style>
         <p:txBody>
-          <a:bodyPr rtlCol="0" anchor="ctr" wrap="square" lIns="274320" tIns="137160"/>
+          <a:bodyPr wrap="square" lIns="274320" tIns="137160" rtlCol="0" anchor="ctr"/>
           <a:lstStyle/>
           <a:p>
             <a:pPr algn="ctr">
@@ -5074,8 +6437,8 @@
         </p:nvSpPr>
         <p:spPr>
           <a:xfrm>
-            <a:off x="731520" y="1645920"/>
-            <a:ext cx="10728655" cy="4754880"/>
+            <a:off x="2373086" y="3300549"/>
+            <a:ext cx="9013372" cy="2092881"/>
           </a:xfrm>
           <a:prstGeom prst="rect">
             <a:avLst/>
@@ -5087,7 +6450,9 @@
             <a:spAutoFit/>
           </a:bodyPr>
           <a:lstStyle/>
-          <a:p/>
+          <a:p>
+            <a:endParaRPr dirty="0"/>
+          </a:p>
           <a:p>
             <a:pPr>
               <a:defRPr sz="1400">
@@ -5097,6 +6462,7 @@
               </a:defRPr>
             </a:pPr>
             <a:r>
+              <a:rPr dirty="0"/>
               <a:t>Average Resolution Time: Reduced from 18 minutes (manual human phone queue) to under 15 seconds (98.6% faster).</a:t>
             </a:r>
           </a:p>
@@ -5109,6 +6475,7 @@
               </a:defRPr>
             </a:pPr>
             <a:r>
+              <a:rPr dirty="0"/>
               <a:t>Operational Cost Reduction: Resolves ~75% of disruption interactions without human agent intervention, cutting support costs by 68%.</a:t>
             </a:r>
           </a:p>
@@ -5121,6 +6488,7 @@
               </a:defRPr>
             </a:pPr>
             <a:r>
+              <a:rPr dirty="0"/>
               <a:t>Policy Compliance Rate: 100% zero unauthorized compensation leakage (zero hallucinated business class upgrades or unapproved waivers).</a:t>
             </a:r>
           </a:p>
@@ -5133,6 +6501,7 @@
               </a:defRPr>
             </a:pPr>
             <a:r>
+              <a:rPr dirty="0"/>
               <a:t>Customer NPS Impact: Instant meal/lounge voucher delivery and transparent claim certificates increase retention during crisis events.</a:t>
             </a:r>
           </a:p>
@@ -5145,6 +6514,7 @@
               </a:defRPr>
             </a:pPr>
             <a:r>
+              <a:rPr dirty="0"/>
               <a:t>Supervisor Productivity: Supervisors receive pre-classified, structured escalation dossiers with exact policy context.</a:t>
             </a:r>
           </a:p>
@@ -5159,9 +6529,9 @@
 </file>
 
 <file path=ppt/theme/theme1.xml><?xml version="1.0" encoding="utf-8"?>
-<a:theme xmlns:a="http://schemas.openxmlformats.org/drawingml/2006/main" name="Office Theme">
+<a:theme xmlns:a="http://schemas.openxmlformats.org/drawingml/2006/main" name="Solstice">
   <a:themeElements>
-    <a:clrScheme name="Office">
+    <a:clrScheme name="Solstice">
       <a:dk1>
         <a:sysClr val="windowText" lastClr="000000"/>
       </a:dk1>
@@ -5169,81 +6539,48 @@
         <a:sysClr val="window" lastClr="FFFFFF"/>
       </a:lt1>
       <a:dk2>
-        <a:srgbClr val="1F497D"/>
+        <a:srgbClr val="4F271C"/>
       </a:dk2>
       <a:lt2>
-        <a:srgbClr val="EEECE1"/>
+        <a:srgbClr val="E7DEC9"/>
       </a:lt2>
       <a:accent1>
-        <a:srgbClr val="4F81BD"/>
+        <a:srgbClr val="3891A7"/>
       </a:accent1>
       <a:accent2>
-        <a:srgbClr val="C0504D"/>
+        <a:srgbClr val="FEB80A"/>
       </a:accent2>
       <a:accent3>
-        <a:srgbClr val="9BBB59"/>
+        <a:srgbClr val="C32D2E"/>
       </a:accent3>
       <a:accent4>
-        <a:srgbClr val="8064A2"/>
+        <a:srgbClr val="84AA33"/>
       </a:accent4>
       <a:accent5>
-        <a:srgbClr val="4BACC6"/>
+        <a:srgbClr val="964305"/>
       </a:accent5>
       <a:accent6>
-        <a:srgbClr val="F79646"/>
+        <a:srgbClr val="475A8D"/>
       </a:accent6>
       <a:hlink>
-        <a:srgbClr val="0000FF"/>
+        <a:srgbClr val="8DC765"/>
       </a:hlink>
       <a:folHlink>
-        <a:srgbClr val="800080"/>
+        <a:srgbClr val="AA8A14"/>
       </a:folHlink>
     </a:clrScheme>
-    <a:fontScheme name="Office">
+    <a:fontScheme name="Solstice">
       <a:majorFont>
-        <a:latin typeface="Calibri"/>
+        <a:latin typeface="Gill Sans MT"/>
         <a:ea typeface=""/>
         <a:cs typeface=""/>
-        <a:font script="Jpan" typeface="ＭＳ Ｐゴシック"/>
-        <a:font script="Hang" typeface="맑은 고딕"/>
-        <a:font script="Hans" typeface="宋体"/>
-        <a:font script="Hant" typeface="新細明體"/>
-        <a:font script="Arab" typeface="Times New Roman"/>
-        <a:font script="Hebr" typeface="Times New Roman"/>
-        <a:font script="Thai" typeface="Angsana New"/>
-        <a:font script="Ethi" typeface="Nyala"/>
-        <a:font script="Beng" typeface="Vrinda"/>
-        <a:font script="Gujr" typeface="Shruti"/>
-        <a:font script="Khmr" typeface="MoolBoran"/>
-        <a:font script="Knda" typeface="Tunga"/>
-        <a:font script="Guru" typeface="Raavi"/>
-        <a:font script="Cans" typeface="Euphemia"/>
-        <a:font script="Cher" typeface="Plantagenet Cherokee"/>
-        <a:font script="Yiii" typeface="Microsoft Yi Baiti"/>
-        <a:font script="Tibt" typeface="Microsoft Himalaya"/>
-        <a:font script="Thaa" typeface="MV Boli"/>
-        <a:font script="Deva" typeface="Mangal"/>
-        <a:font script="Telu" typeface="Gautami"/>
-        <a:font script="Taml" typeface="Latha"/>
-        <a:font script="Syrc" typeface="Estrangelo Edessa"/>
-        <a:font script="Orya" typeface="Kalinga"/>
-        <a:font script="Mlym" typeface="Kartika"/>
-        <a:font script="Laoo" typeface="DokChampa"/>
-        <a:font script="Sinh" typeface="Iskoola Pota"/>
-        <a:font script="Mong" typeface="Mongolian Baiti"/>
-        <a:font script="Viet" typeface="Times New Roman"/>
-        <a:font script="Uigh" typeface="Microsoft Uighur"/>
-        <a:font script="Geor" typeface="Sylfaen"/>
-      </a:majorFont>
-      <a:minorFont>
-        <a:latin typeface="Calibri"/>
-        <a:ea typeface=""/>
-        <a:cs typeface=""/>
-        <a:font script="Jpan" typeface="ＭＳ Ｐゴシック"/>
-        <a:font script="Hang" typeface="맑은 고딕"/>
-        <a:font script="Hans" typeface="宋体"/>
-        <a:font script="Hant" typeface="新細明體"/>
-        <a:font script="Arab" typeface="Arial"/>
+        <a:font script="Grek" typeface="Corbel"/>
+        <a:font script="Cyrl" typeface="Corbel"/>
+        <a:font script="Jpan" typeface="HGｺﾞｼｯｸE"/>
+        <a:font script="Hang" typeface="휴먼매직체"/>
+        <a:font script="Hans" typeface="华文中宋"/>
+        <a:font script="Hant" typeface="微軟正黑體"/>
+        <a:font script="Arab" typeface="Majalla UI"/>
         <a:font script="Hebr" typeface="Arial"/>
         <a:font script="Thai" typeface="Cordia New"/>
         <a:font script="Ethi" typeface="Nyala"/>
@@ -5266,12 +6603,49 @@
         <a:font script="Laoo" typeface="DokChampa"/>
         <a:font script="Sinh" typeface="Iskoola Pota"/>
         <a:font script="Mong" typeface="Mongolian Baiti"/>
-        <a:font script="Viet" typeface="Arial"/>
+        <a:font script="Viet" typeface="Tahoma"/>
+        <a:font script="Uigh" typeface="Microsoft Uighur"/>
+        <a:font script="Geor" typeface="Sylfaen"/>
+      </a:majorFont>
+      <a:minorFont>
+        <a:latin typeface="Gill Sans MT"/>
+        <a:ea typeface=""/>
+        <a:cs typeface=""/>
+        <a:font script="Grek" typeface="Corbel"/>
+        <a:font script="Cyrl" typeface="Corbel"/>
+        <a:font script="Jpan" typeface="HGｺﾞｼｯｸE"/>
+        <a:font script="Hang" typeface="HY엽서L"/>
+        <a:font script="Hans" typeface="华文中宋"/>
+        <a:font script="Hant" typeface="微軟正黑體"/>
+        <a:font script="Arab" typeface="Majalla UI"/>
+        <a:font script="Hebr" typeface="Arial"/>
+        <a:font script="Thai" typeface="Cordia New"/>
+        <a:font script="Ethi" typeface="Nyala"/>
+        <a:font script="Beng" typeface="Vrinda"/>
+        <a:font script="Gujr" typeface="Shruti"/>
+        <a:font script="Khmr" typeface="DaunPenh"/>
+        <a:font script="Knda" typeface="Tunga"/>
+        <a:font script="Guru" typeface="Raavi"/>
+        <a:font script="Cans" typeface="Euphemia"/>
+        <a:font script="Cher" typeface="Plantagenet Cherokee"/>
+        <a:font script="Yiii" typeface="Microsoft Yi Baiti"/>
+        <a:font script="Tibt" typeface="Microsoft Himalaya"/>
+        <a:font script="Thaa" typeface="MV Boli"/>
+        <a:font script="Deva" typeface="Mangal"/>
+        <a:font script="Telu" typeface="Gautami"/>
+        <a:font script="Taml" typeface="Latha"/>
+        <a:font script="Syrc" typeface="Estrangelo Edessa"/>
+        <a:font script="Orya" typeface="Kalinga"/>
+        <a:font script="Mlym" typeface="Kartika"/>
+        <a:font script="Laoo" typeface="DokChampa"/>
+        <a:font script="Sinh" typeface="Iskoola Pota"/>
+        <a:font script="Mong" typeface="Mongolian Baiti"/>
+        <a:font script="Viet" typeface="Tahoma"/>
         <a:font script="Uigh" typeface="Microsoft Uighur"/>
         <a:font script="Geor" typeface="Sylfaen"/>
       </a:minorFont>
     </a:fontScheme>
-    <a:fmtScheme name="Office">
+    <a:fmtScheme name="Solstice">
       <a:fillStyleLst>
         <a:solidFill>
           <a:schemeClr val="phClr"/>
@@ -5280,52 +6654,78 @@
           <a:gsLst>
             <a:gs pos="0">
               <a:schemeClr val="phClr">
-                <a:tint val="50000"/>
-                <a:satMod val="300000"/>
+                <a:tint val="35000"/>
+                <a:satMod val="253000"/>
               </a:schemeClr>
             </a:gs>
-            <a:gs pos="35000">
+            <a:gs pos="50000">
               <a:schemeClr val="phClr">
-                <a:tint val="37000"/>
-                <a:satMod val="300000"/>
+                <a:tint val="42000"/>
+                <a:satMod val="255000"/>
+              </a:schemeClr>
+            </a:gs>
+            <a:gs pos="97000">
+              <a:schemeClr val="phClr">
+                <a:tint val="53000"/>
+                <a:satMod val="260000"/>
               </a:schemeClr>
             </a:gs>
             <a:gs pos="100000">
               <a:schemeClr val="phClr">
-                <a:tint val="15000"/>
-                <a:satMod val="350000"/>
+                <a:tint val="56000"/>
+                <a:satMod val="275000"/>
               </a:schemeClr>
             </a:gs>
           </a:gsLst>
-          <a:lin ang="16200000" scaled="1"/>
+          <a:path path="circle">
+            <a:fillToRect l="50000" t="50000" r="50000" b="50000"/>
+          </a:path>
         </a:gradFill>
         <a:gradFill rotWithShape="1">
           <a:gsLst>
             <a:gs pos="0">
               <a:schemeClr val="phClr">
-                <a:tint val="100000"/>
-                <a:shade val="100000"/>
-                <a:satMod val="130000"/>
+                <a:tint val="92000"/>
+                <a:satMod val="170000"/>
+              </a:schemeClr>
+            </a:gs>
+            <a:gs pos="15000">
+              <a:schemeClr val="phClr">
+                <a:tint val="92000"/>
+                <a:shade val="99000"/>
+                <a:satMod val="170000"/>
+              </a:schemeClr>
+            </a:gs>
+            <a:gs pos="62000">
+              <a:schemeClr val="phClr">
+                <a:tint val="96000"/>
+                <a:shade val="80000"/>
+                <a:satMod val="170000"/>
+              </a:schemeClr>
+            </a:gs>
+            <a:gs pos="97000">
+              <a:schemeClr val="phClr">
+                <a:tint val="98000"/>
+                <a:shade val="63000"/>
+                <a:satMod val="170000"/>
               </a:schemeClr>
             </a:gs>
             <a:gs pos="100000">
               <a:schemeClr val="phClr">
-                <a:tint val="50000"/>
-                <a:shade val="100000"/>
-                <a:satMod val="350000"/>
+                <a:shade val="62000"/>
+                <a:satMod val="170000"/>
               </a:schemeClr>
             </a:gs>
           </a:gsLst>
-          <a:lin ang="16200000" scaled="0"/>
+          <a:path path="circle">
+            <a:fillToRect l="50000" t="50000" r="50000" b="50000"/>
+          </a:path>
         </a:gradFill>
       </a:fillStyleLst>
       <a:lnStyleLst>
         <a:ln w="9525" cap="flat" cmpd="sng" algn="ctr">
           <a:solidFill>
-            <a:schemeClr val="phClr">
-              <a:shade val="95000"/>
-              <a:satMod val="105000"/>
-            </a:schemeClr>
+            <a:schemeClr val="phClr"/>
           </a:solidFill>
           <a:prstDash val="solid"/>
         </a:ln>
@@ -5335,7 +6735,7 @@
           </a:solidFill>
           <a:prstDash val="solid"/>
         </a:ln>
-        <a:ln w="38100" cap="flat" cmpd="sng" algn="ctr">
+        <a:ln w="25400" cap="flat" cmpd="sng" algn="ctr">
           <a:solidFill>
             <a:schemeClr val="phClr"/>
           </a:solidFill>
@@ -5345,40 +6745,59 @@
       <a:effectStyleLst>
         <a:effectStyle>
           <a:effectLst>
-            <a:outerShdw blurRad="40000" dist="20000" dir="5400000" rotWithShape="0">
+            <a:outerShdw blurRad="63500" dist="25400" dir="5400000" rotWithShape="0">
               <a:srgbClr val="000000">
-                <a:alpha val="38000"/>
+                <a:alpha val="43137"/>
               </a:srgbClr>
             </a:outerShdw>
           </a:effectLst>
         </a:effectStyle>
         <a:effectStyle>
           <a:effectLst>
-            <a:outerShdw blurRad="40000" dist="23000" dir="5400000" rotWithShape="0">
+            <a:outerShdw blurRad="63500" dist="25400" dir="5400000" rotWithShape="0">
               <a:srgbClr val="000000">
-                <a:alpha val="35000"/>
-              </a:srgbClr>
-            </a:outerShdw>
-          </a:effectLst>
-        </a:effectStyle>
-        <a:effectStyle>
-          <a:effectLst>
-            <a:outerShdw blurRad="40000" dist="23000" dir="5400000" rotWithShape="0">
-              <a:srgbClr val="000000">
-                <a:alpha val="35000"/>
+                <a:alpha val="43137"/>
               </a:srgbClr>
             </a:outerShdw>
           </a:effectLst>
           <a:scene3d>
-            <a:camera prst="orthographicFront">
+            <a:camera prst="orthographicFront" fov="0">
               <a:rot lat="0" lon="0" rev="0"/>
             </a:camera>
-            <a:lightRig rig="threePt" dir="t">
-              <a:rot lat="0" lon="0" rev="1200000"/>
+            <a:lightRig rig="brightRoom" dir="tl">
+              <a:rot lat="0" lon="0" rev="8700000"/>
             </a:lightRig>
           </a:scene3d>
-          <a:sp3d>
-            <a:bevelT w="63500" h="25400"/>
+          <a:sp3d contourW="12700">
+            <a:bevelT w="0" h="0"/>
+            <a:contourClr>
+              <a:schemeClr val="phClr">
+                <a:shade val="80000"/>
+              </a:schemeClr>
+            </a:contourClr>
+          </a:sp3d>
+        </a:effectStyle>
+        <a:effectStyle>
+          <a:effectLst>
+            <a:outerShdw blurRad="63500" dist="25400" dir="5400000" rotWithShape="0">
+              <a:srgbClr val="000000">
+                <a:alpha val="43137"/>
+              </a:srgbClr>
+            </a:outerShdw>
+          </a:effectLst>
+          <a:scene3d>
+            <a:camera prst="orthographicFront" fov="0">
+              <a:rot lat="0" lon="0" rev="0"/>
+            </a:camera>
+            <a:lightRig rig="brightRoom" dir="tl">
+              <a:rot lat="0" lon="0" rev="5400000"/>
+            </a:lightRig>
+          </a:scene3d>
+          <a:sp3d contourW="12700">
+            <a:bevelT w="25400" h="50800" prst="angle"/>
+            <a:contourClr>
+              <a:schemeClr val="phClr"/>
+            </a:contourClr>
           </a:sp3d>
         </a:effectStyle>
       </a:effectStyleLst>
@@ -5390,90 +6809,46 @@
           <a:gsLst>
             <a:gs pos="0">
               <a:schemeClr val="phClr">
-                <a:tint val="40000"/>
-                <a:satMod val="350000"/>
+                <a:tint val="60000"/>
+                <a:satMod val="355000"/>
               </a:schemeClr>
             </a:gs>
             <a:gs pos="40000">
               <a:schemeClr val="phClr">
-                <a:tint val="45000"/>
-                <a:shade val="99000"/>
-                <a:satMod val="350000"/>
+                <a:tint val="85000"/>
+                <a:satMod val="320000"/>
               </a:schemeClr>
             </a:gs>
             <a:gs pos="100000">
               <a:schemeClr val="phClr">
-                <a:shade val="20000"/>
-                <a:satMod val="255000"/>
+                <a:shade val="55000"/>
+                <a:satMod val="300000"/>
               </a:schemeClr>
             </a:gs>
           </a:gsLst>
           <a:path path="circle">
-            <a:fillToRect l="50000" t="-80000" r="50000" b="180000"/>
+            <a:fillToRect l="-24500" t="-20000" r="124500" b="120000"/>
           </a:path>
         </a:gradFill>
-        <a:gradFill rotWithShape="1">
-          <a:gsLst>
-            <a:gs pos="0">
+        <a:blipFill>
+          <a:blip xmlns:r="http://schemas.openxmlformats.org/officeDocument/2006/relationships" r:embed="rId1">
+            <a:duotone>
               <a:schemeClr val="phClr">
-                <a:tint val="80000"/>
+                <a:shade val="9000"/>
                 <a:satMod val="300000"/>
               </a:schemeClr>
-            </a:gs>
-            <a:gs pos="100000">
               <a:schemeClr val="phClr">
-                <a:shade val="30000"/>
-                <a:satMod val="200000"/>
+                <a:tint val="90000"/>
+                <a:satMod val="225000"/>
               </a:schemeClr>
-            </a:gs>
-          </a:gsLst>
-          <a:path path="circle">
-            <a:fillToRect l="50000" t="50000" r="50000" b="50000"/>
-          </a:path>
-        </a:gradFill>
+            </a:duotone>
+          </a:blip>
+          <a:tile tx="0" ty="0" sx="90000" sy="90000" flip="xy" algn="tl"/>
+        </a:blipFill>
       </a:bgFillStyleLst>
     </a:fmtScheme>
   </a:themeElements>
-  <a:objectDefaults>
-    <a:spDef>
-      <a:spPr/>
-      <a:bodyPr/>
-      <a:lstStyle/>
-      <a:style>
-        <a:lnRef idx="1">
-          <a:schemeClr val="accent1"/>
-        </a:lnRef>
-        <a:fillRef idx="3">
-          <a:schemeClr val="accent1"/>
-        </a:fillRef>
-        <a:effectRef idx="2">
-          <a:schemeClr val="accent1"/>
-        </a:effectRef>
-        <a:fontRef idx="minor">
-          <a:schemeClr val="lt1"/>
-        </a:fontRef>
-      </a:style>
-    </a:spDef>
-    <a:lnDef>
-      <a:spPr/>
-      <a:bodyPr/>
-      <a:lstStyle/>
-      <a:style>
-        <a:lnRef idx="2">
-          <a:schemeClr val="accent1"/>
-        </a:lnRef>
-        <a:fillRef idx="0">
-          <a:schemeClr val="accent1"/>
-        </a:fillRef>
-        <a:effectRef idx="1">
-          <a:schemeClr val="accent1"/>
-        </a:effectRef>
-        <a:fontRef idx="minor">
-          <a:schemeClr val="tx1"/>
-        </a:fontRef>
-      </a:style>
-    </a:lnDef>
-  </a:objectDefaults>
+  <a:objectDefaults/>
   <a:extraClrSchemeLst/>
 </a:theme>
 </file>